--- a/Präsentation/Präsentation.pptx
+++ b/Präsentation/Präsentation.pptx
@@ -4,6 +4,9 @@
   <p:sldMasterIdLst>
     <p:sldMasterId id="2147483648" r:id="rId1"/>
   </p:sldMasterIdLst>
+  <p:notesMasterIdLst>
+    <p:notesMasterId r:id="rId15"/>
+  </p:notesMasterIdLst>
   <p:sldIdLst>
     <p:sldId id="256" r:id="rId2"/>
     <p:sldId id="257" r:id="rId3"/>
@@ -122,6 +125,763 @@
     </p:ext>
   </p:extLst>
 </p:presentation>
+</file>
+
+<file path=ppt/notesMasters/notesMaster1.xml><?xml version="1.0" encoding="utf-8"?>
+<p:notesMaster xmlns:a="http://schemas.openxmlformats.org/drawingml/2006/main" xmlns:r="http://schemas.openxmlformats.org/officeDocument/2006/relationships" xmlns:p="http://schemas.openxmlformats.org/presentationml/2006/main">
+  <p:cSld>
+    <p:bg>
+      <p:bgRef idx="1001">
+        <a:schemeClr val="bg1"/>
+      </p:bgRef>
+    </p:bg>
+    <p:spTree>
+      <p:nvGrpSpPr>
+        <p:cNvPr id="1" name=""/>
+        <p:cNvGrpSpPr/>
+        <p:nvPr/>
+      </p:nvGrpSpPr>
+      <p:grpSpPr>
+        <a:xfrm>
+          <a:off x="0" y="0"/>
+          <a:ext cx="0" cy="0"/>
+          <a:chOff x="0" y="0"/>
+          <a:chExt cx="0" cy="0"/>
+        </a:xfrm>
+      </p:grpSpPr>
+      <p:sp>
+        <p:nvSpPr>
+          <p:cNvPr id="2" name="Kopfzeilenplatzhalter 1"/>
+          <p:cNvSpPr>
+            <a:spLocks noGrp="1"/>
+          </p:cNvSpPr>
+          <p:nvPr>
+            <p:ph type="hdr" sz="quarter"/>
+          </p:nvPr>
+        </p:nvSpPr>
+        <p:spPr>
+          <a:xfrm>
+            <a:off x="0" y="0"/>
+            <a:ext cx="2971800" cy="458788"/>
+          </a:xfrm>
+          <a:prstGeom prst="rect">
+            <a:avLst/>
+          </a:prstGeom>
+        </p:spPr>
+        <p:txBody>
+          <a:bodyPr vert="horz" lIns="91440" tIns="45720" rIns="91440" bIns="45720" rtlCol="0"/>
+          <a:lstStyle>
+            <a:lvl1pPr algn="l">
+              <a:defRPr sz="1200"/>
+            </a:lvl1pPr>
+          </a:lstStyle>
+          <a:p>
+            <a:endParaRPr lang="de-DE"/>
+          </a:p>
+        </p:txBody>
+      </p:sp>
+      <p:sp>
+        <p:nvSpPr>
+          <p:cNvPr id="3" name="Datumsplatzhalter 2"/>
+          <p:cNvSpPr>
+            <a:spLocks noGrp="1"/>
+          </p:cNvSpPr>
+          <p:nvPr>
+            <p:ph type="dt" idx="1"/>
+          </p:nvPr>
+        </p:nvSpPr>
+        <p:spPr>
+          <a:xfrm>
+            <a:off x="3884613" y="0"/>
+            <a:ext cx="2971800" cy="458788"/>
+          </a:xfrm>
+          <a:prstGeom prst="rect">
+            <a:avLst/>
+          </a:prstGeom>
+        </p:spPr>
+        <p:txBody>
+          <a:bodyPr vert="horz" lIns="91440" tIns="45720" rIns="91440" bIns="45720" rtlCol="0"/>
+          <a:lstStyle>
+            <a:lvl1pPr algn="r">
+              <a:defRPr sz="1200"/>
+            </a:lvl1pPr>
+          </a:lstStyle>
+          <a:p>
+            <a:fld id="{7644AF23-4141-471D-8F47-D0D465B8A2CC}" type="datetimeFigureOut">
+              <a:rPr lang="de-DE" smtClean="0"/>
+              <a:t>26.08.2026</a:t>
+            </a:fld>
+            <a:endParaRPr lang="de-DE"/>
+          </a:p>
+        </p:txBody>
+      </p:sp>
+      <p:sp>
+        <p:nvSpPr>
+          <p:cNvPr id="4" name="Folienbildplatzhalter 3"/>
+          <p:cNvSpPr>
+            <a:spLocks noGrp="1" noRot="1" noChangeAspect="1"/>
+          </p:cNvSpPr>
+          <p:nvPr>
+            <p:ph type="sldImg" idx="2"/>
+          </p:nvPr>
+        </p:nvSpPr>
+        <p:spPr>
+          <a:xfrm>
+            <a:off x="685800" y="1143000"/>
+            <a:ext cx="5486400" cy="3086100"/>
+          </a:xfrm>
+          <a:prstGeom prst="rect">
+            <a:avLst/>
+          </a:prstGeom>
+          <a:noFill/>
+          <a:ln w="12700">
+            <a:solidFill>
+              <a:prstClr val="black"/>
+            </a:solidFill>
+          </a:ln>
+        </p:spPr>
+        <p:txBody>
+          <a:bodyPr vert="horz" lIns="91440" tIns="45720" rIns="91440" bIns="45720" rtlCol="0" anchor="ctr"/>
+          <a:lstStyle/>
+          <a:p>
+            <a:endParaRPr lang="de-DE"/>
+          </a:p>
+        </p:txBody>
+      </p:sp>
+      <p:sp>
+        <p:nvSpPr>
+          <p:cNvPr id="5" name="Notizenplatzhalter 4"/>
+          <p:cNvSpPr>
+            <a:spLocks noGrp="1"/>
+          </p:cNvSpPr>
+          <p:nvPr>
+            <p:ph type="body" sz="quarter" idx="3"/>
+          </p:nvPr>
+        </p:nvSpPr>
+        <p:spPr>
+          <a:xfrm>
+            <a:off x="685800" y="4400550"/>
+            <a:ext cx="5486400" cy="3600450"/>
+          </a:xfrm>
+          <a:prstGeom prst="rect">
+            <a:avLst/>
+          </a:prstGeom>
+        </p:spPr>
+        <p:txBody>
+          <a:bodyPr vert="horz" lIns="91440" tIns="45720" rIns="91440" bIns="45720" rtlCol="0"/>
+          <a:lstStyle/>
+          <a:p>
+            <a:pPr lvl="0"/>
+            <a:r>
+              <a:rPr lang="de-DE"/>
+              <a:t>Mastertextformat bearbeiten</a:t>
+            </a:r>
+          </a:p>
+          <a:p>
+            <a:pPr lvl="1"/>
+            <a:r>
+              <a:rPr lang="de-DE"/>
+              <a:t>Zweite Ebene</a:t>
+            </a:r>
+          </a:p>
+          <a:p>
+            <a:pPr lvl="2"/>
+            <a:r>
+              <a:rPr lang="de-DE"/>
+              <a:t>Dritte Ebene</a:t>
+            </a:r>
+          </a:p>
+          <a:p>
+            <a:pPr lvl="3"/>
+            <a:r>
+              <a:rPr lang="de-DE"/>
+              <a:t>Vierte Ebene</a:t>
+            </a:r>
+          </a:p>
+          <a:p>
+            <a:pPr lvl="4"/>
+            <a:r>
+              <a:rPr lang="de-DE"/>
+              <a:t>Fünfte Ebene</a:t>
+            </a:r>
+          </a:p>
+        </p:txBody>
+      </p:sp>
+      <p:sp>
+        <p:nvSpPr>
+          <p:cNvPr id="6" name="Fußzeilenplatzhalter 5"/>
+          <p:cNvSpPr>
+            <a:spLocks noGrp="1"/>
+          </p:cNvSpPr>
+          <p:nvPr>
+            <p:ph type="ftr" sz="quarter" idx="4"/>
+          </p:nvPr>
+        </p:nvSpPr>
+        <p:spPr>
+          <a:xfrm>
+            <a:off x="0" y="8685213"/>
+            <a:ext cx="2971800" cy="458787"/>
+          </a:xfrm>
+          <a:prstGeom prst="rect">
+            <a:avLst/>
+          </a:prstGeom>
+        </p:spPr>
+        <p:txBody>
+          <a:bodyPr vert="horz" lIns="91440" tIns="45720" rIns="91440" bIns="45720" rtlCol="0" anchor="b"/>
+          <a:lstStyle>
+            <a:lvl1pPr algn="l">
+              <a:defRPr sz="1200"/>
+            </a:lvl1pPr>
+          </a:lstStyle>
+          <a:p>
+            <a:endParaRPr lang="de-DE"/>
+          </a:p>
+        </p:txBody>
+      </p:sp>
+      <p:sp>
+        <p:nvSpPr>
+          <p:cNvPr id="7" name="Foliennummernplatzhalter 6"/>
+          <p:cNvSpPr>
+            <a:spLocks noGrp="1"/>
+          </p:cNvSpPr>
+          <p:nvPr>
+            <p:ph type="sldNum" sz="quarter" idx="5"/>
+          </p:nvPr>
+        </p:nvSpPr>
+        <p:spPr>
+          <a:xfrm>
+            <a:off x="3884613" y="8685213"/>
+            <a:ext cx="2971800" cy="458787"/>
+          </a:xfrm>
+          <a:prstGeom prst="rect">
+            <a:avLst/>
+          </a:prstGeom>
+        </p:spPr>
+        <p:txBody>
+          <a:bodyPr vert="horz" lIns="91440" tIns="45720" rIns="91440" bIns="45720" rtlCol="0" anchor="b"/>
+          <a:lstStyle>
+            <a:lvl1pPr algn="r">
+              <a:defRPr sz="1200"/>
+            </a:lvl1pPr>
+          </a:lstStyle>
+          <a:p>
+            <a:fld id="{F9573A14-2FD9-4F88-9CDD-7A01E9A13A5F}" type="slidenum">
+              <a:rPr lang="de-DE" smtClean="0"/>
+              <a:t>‹Nr.›</a:t>
+            </a:fld>
+            <a:endParaRPr lang="de-DE"/>
+          </a:p>
+        </p:txBody>
+      </p:sp>
+    </p:spTree>
+    <p:extLst>
+      <p:ext uri="{BB962C8B-B14F-4D97-AF65-F5344CB8AC3E}">
+        <p14:creationId xmlns:p14="http://schemas.microsoft.com/office/powerpoint/2010/main" val="2954507682"/>
+      </p:ext>
+    </p:extLst>
+  </p:cSld>
+  <p:clrMap bg1="lt1" tx1="dk1" bg2="lt2" tx2="dk2" accent1="accent1" accent2="accent2" accent3="accent3" accent4="accent4" accent5="accent5" accent6="accent6" hlink="hlink" folHlink="folHlink"/>
+  <p:notesStyle>
+    <a:lvl1pPr marL="0" algn="l" defTabSz="914400" rtl="0" eaLnBrk="1" latinLnBrk="0" hangingPunct="1">
+      <a:defRPr sz="1200" kern="1200">
+        <a:solidFill>
+          <a:schemeClr val="tx1"/>
+        </a:solidFill>
+        <a:latin typeface="+mn-lt"/>
+        <a:ea typeface="+mn-ea"/>
+        <a:cs typeface="+mn-cs"/>
+      </a:defRPr>
+    </a:lvl1pPr>
+    <a:lvl2pPr marL="457200" algn="l" defTabSz="914400" rtl="0" eaLnBrk="1" latinLnBrk="0" hangingPunct="1">
+      <a:defRPr sz="1200" kern="1200">
+        <a:solidFill>
+          <a:schemeClr val="tx1"/>
+        </a:solidFill>
+        <a:latin typeface="+mn-lt"/>
+        <a:ea typeface="+mn-ea"/>
+        <a:cs typeface="+mn-cs"/>
+      </a:defRPr>
+    </a:lvl2pPr>
+    <a:lvl3pPr marL="914400" algn="l" defTabSz="914400" rtl="0" eaLnBrk="1" latinLnBrk="0" hangingPunct="1">
+      <a:defRPr sz="1200" kern="1200">
+        <a:solidFill>
+          <a:schemeClr val="tx1"/>
+        </a:solidFill>
+        <a:latin typeface="+mn-lt"/>
+        <a:ea typeface="+mn-ea"/>
+        <a:cs typeface="+mn-cs"/>
+      </a:defRPr>
+    </a:lvl3pPr>
+    <a:lvl4pPr marL="1371600" algn="l" defTabSz="914400" rtl="0" eaLnBrk="1" latinLnBrk="0" hangingPunct="1">
+      <a:defRPr sz="1200" kern="1200">
+        <a:solidFill>
+          <a:schemeClr val="tx1"/>
+        </a:solidFill>
+        <a:latin typeface="+mn-lt"/>
+        <a:ea typeface="+mn-ea"/>
+        <a:cs typeface="+mn-cs"/>
+      </a:defRPr>
+    </a:lvl4pPr>
+    <a:lvl5pPr marL="1828800" algn="l" defTabSz="914400" rtl="0" eaLnBrk="1" latinLnBrk="0" hangingPunct="1">
+      <a:defRPr sz="1200" kern="1200">
+        <a:solidFill>
+          <a:schemeClr val="tx1"/>
+        </a:solidFill>
+        <a:latin typeface="+mn-lt"/>
+        <a:ea typeface="+mn-ea"/>
+        <a:cs typeface="+mn-cs"/>
+      </a:defRPr>
+    </a:lvl5pPr>
+    <a:lvl6pPr marL="2286000" algn="l" defTabSz="914400" rtl="0" eaLnBrk="1" latinLnBrk="0" hangingPunct="1">
+      <a:defRPr sz="1200" kern="1200">
+        <a:solidFill>
+          <a:schemeClr val="tx1"/>
+        </a:solidFill>
+        <a:latin typeface="+mn-lt"/>
+        <a:ea typeface="+mn-ea"/>
+        <a:cs typeface="+mn-cs"/>
+      </a:defRPr>
+    </a:lvl6pPr>
+    <a:lvl7pPr marL="2743200" algn="l" defTabSz="914400" rtl="0" eaLnBrk="1" latinLnBrk="0" hangingPunct="1">
+      <a:defRPr sz="1200" kern="1200">
+        <a:solidFill>
+          <a:schemeClr val="tx1"/>
+        </a:solidFill>
+        <a:latin typeface="+mn-lt"/>
+        <a:ea typeface="+mn-ea"/>
+        <a:cs typeface="+mn-cs"/>
+      </a:defRPr>
+    </a:lvl7pPr>
+    <a:lvl8pPr marL="3200400" algn="l" defTabSz="914400" rtl="0" eaLnBrk="1" latinLnBrk="0" hangingPunct="1">
+      <a:defRPr sz="1200" kern="1200">
+        <a:solidFill>
+          <a:schemeClr val="tx1"/>
+        </a:solidFill>
+        <a:latin typeface="+mn-lt"/>
+        <a:ea typeface="+mn-ea"/>
+        <a:cs typeface="+mn-cs"/>
+      </a:defRPr>
+    </a:lvl8pPr>
+    <a:lvl9pPr marL="3657600" algn="l" defTabSz="914400" rtl="0" eaLnBrk="1" latinLnBrk="0" hangingPunct="1">
+      <a:defRPr sz="1200" kern="1200">
+        <a:solidFill>
+          <a:schemeClr val="tx1"/>
+        </a:solidFill>
+        <a:latin typeface="+mn-lt"/>
+        <a:ea typeface="+mn-ea"/>
+        <a:cs typeface="+mn-cs"/>
+      </a:defRPr>
+    </a:lvl9pPr>
+  </p:notesStyle>
+</p:notesMaster>
+</file>
+
+<file path=ppt/notesSlides/notesSlide1.xml><?xml version="1.0" encoding="utf-8"?>
+<p:notes xmlns:a="http://schemas.openxmlformats.org/drawingml/2006/main" xmlns:r="http://schemas.openxmlformats.org/officeDocument/2006/relationships" xmlns:p="http://schemas.openxmlformats.org/presentationml/2006/main">
+  <p:cSld>
+    <p:spTree>
+      <p:nvGrpSpPr>
+        <p:cNvPr id="1" name=""/>
+        <p:cNvGrpSpPr/>
+        <p:nvPr/>
+      </p:nvGrpSpPr>
+      <p:grpSpPr>
+        <a:xfrm>
+          <a:off x="0" y="0"/>
+          <a:ext cx="0" cy="0"/>
+          <a:chOff x="0" y="0"/>
+          <a:chExt cx="0" cy="0"/>
+        </a:xfrm>
+      </p:grpSpPr>
+      <p:sp>
+        <p:nvSpPr>
+          <p:cNvPr id="2" name="Folienbildplatzhalter 1"/>
+          <p:cNvSpPr>
+            <a:spLocks noGrp="1" noRot="1" noChangeAspect="1"/>
+          </p:cNvSpPr>
+          <p:nvPr>
+            <p:ph type="sldImg"/>
+          </p:nvPr>
+        </p:nvSpPr>
+        <p:spPr/>
+      </p:sp>
+      <p:sp>
+        <p:nvSpPr>
+          <p:cNvPr id="3" name="Notizenplatzhalter 2"/>
+          <p:cNvSpPr>
+            <a:spLocks noGrp="1"/>
+          </p:cNvSpPr>
+          <p:nvPr>
+            <p:ph type="body" idx="1"/>
+          </p:nvPr>
+        </p:nvSpPr>
+        <p:spPr/>
+        <p:txBody>
+          <a:bodyPr/>
+          <a:lstStyle/>
+          <a:p>
+            <a:r>
+              <a:rPr lang="de-DE" dirty="0"/>
+              <a:t>Stand: Mittwoch 12:28</a:t>
+            </a:r>
+          </a:p>
+        </p:txBody>
+      </p:sp>
+      <p:sp>
+        <p:nvSpPr>
+          <p:cNvPr id="4" name="Foliennummernplatzhalter 3"/>
+          <p:cNvSpPr>
+            <a:spLocks noGrp="1"/>
+          </p:cNvSpPr>
+          <p:nvPr>
+            <p:ph type="sldNum" sz="quarter" idx="5"/>
+          </p:nvPr>
+        </p:nvSpPr>
+        <p:spPr/>
+        <p:txBody>
+          <a:bodyPr/>
+          <a:lstStyle/>
+          <a:p>
+            <a:fld id="{F9573A14-2FD9-4F88-9CDD-7A01E9A13A5F}" type="slidenum">
+              <a:rPr lang="de-DE" smtClean="0"/>
+              <a:t>4</a:t>
+            </a:fld>
+            <a:endParaRPr lang="de-DE"/>
+          </a:p>
+        </p:txBody>
+      </p:sp>
+    </p:spTree>
+    <p:extLst>
+      <p:ext uri="{BB962C8B-B14F-4D97-AF65-F5344CB8AC3E}">
+        <p14:creationId xmlns:p14="http://schemas.microsoft.com/office/powerpoint/2010/main" val="1956094864"/>
+      </p:ext>
+    </p:extLst>
+  </p:cSld>
+  <p:clrMapOvr>
+    <a:masterClrMapping/>
+  </p:clrMapOvr>
+</p:notes>
+</file>
+
+<file path=ppt/notesSlides/notesSlide2.xml><?xml version="1.0" encoding="utf-8"?>
+<p:notes xmlns:a="http://schemas.openxmlformats.org/drawingml/2006/main" xmlns:r="http://schemas.openxmlformats.org/officeDocument/2006/relationships" xmlns:p="http://schemas.openxmlformats.org/presentationml/2006/main">
+  <p:cSld>
+    <p:spTree>
+      <p:nvGrpSpPr>
+        <p:cNvPr id="1" name=""/>
+        <p:cNvGrpSpPr/>
+        <p:nvPr/>
+      </p:nvGrpSpPr>
+      <p:grpSpPr>
+        <a:xfrm>
+          <a:off x="0" y="0"/>
+          <a:ext cx="0" cy="0"/>
+          <a:chOff x="0" y="0"/>
+          <a:chExt cx="0" cy="0"/>
+        </a:xfrm>
+      </p:grpSpPr>
+      <p:sp>
+        <p:nvSpPr>
+          <p:cNvPr id="2" name="Folienbildplatzhalter 1"/>
+          <p:cNvSpPr>
+            <a:spLocks noGrp="1" noRot="1" noChangeAspect="1"/>
+          </p:cNvSpPr>
+          <p:nvPr>
+            <p:ph type="sldImg"/>
+          </p:nvPr>
+        </p:nvSpPr>
+        <p:spPr/>
+      </p:sp>
+      <p:sp>
+        <p:nvSpPr>
+          <p:cNvPr id="3" name="Notizenplatzhalter 2"/>
+          <p:cNvSpPr>
+            <a:spLocks noGrp="1"/>
+          </p:cNvSpPr>
+          <p:nvPr>
+            <p:ph type="body" idx="1"/>
+          </p:nvPr>
+        </p:nvSpPr>
+        <p:spPr/>
+        <p:txBody>
+          <a:bodyPr/>
+          <a:lstStyle/>
+          <a:p>
+            <a:pPr marL="0" marR="0" lvl="0" indent="0" algn="l" defTabSz="914400" rtl="0" eaLnBrk="1" fontAlgn="auto" latinLnBrk="0" hangingPunct="1">
+              <a:lnSpc>
+                <a:spcPct val="100000"/>
+              </a:lnSpc>
+              <a:spcBef>
+                <a:spcPts val="0"/>
+              </a:spcBef>
+              <a:spcAft>
+                <a:spcPts val="0"/>
+              </a:spcAft>
+              <a:buClrTx/>
+              <a:buSzTx/>
+              <a:buFontTx/>
+              <a:buNone/>
+              <a:tabLst/>
+              <a:defRPr/>
+            </a:pPr>
+            <a:r>
+              <a:rPr lang="de-DE" dirty="0"/>
+              <a:t>Stand: Mittwoch 12:28</a:t>
+            </a:r>
+          </a:p>
+          <a:p>
+            <a:endParaRPr lang="de-DE" dirty="0"/>
+          </a:p>
+        </p:txBody>
+      </p:sp>
+      <p:sp>
+        <p:nvSpPr>
+          <p:cNvPr id="4" name="Foliennummernplatzhalter 3"/>
+          <p:cNvSpPr>
+            <a:spLocks noGrp="1"/>
+          </p:cNvSpPr>
+          <p:nvPr>
+            <p:ph type="sldNum" sz="quarter" idx="5"/>
+          </p:nvPr>
+        </p:nvSpPr>
+        <p:spPr/>
+        <p:txBody>
+          <a:bodyPr/>
+          <a:lstStyle/>
+          <a:p>
+            <a:fld id="{F9573A14-2FD9-4F88-9CDD-7A01E9A13A5F}" type="slidenum">
+              <a:rPr lang="de-DE" smtClean="0"/>
+              <a:t>10</a:t>
+            </a:fld>
+            <a:endParaRPr lang="de-DE"/>
+          </a:p>
+        </p:txBody>
+      </p:sp>
+    </p:spTree>
+    <p:extLst>
+      <p:ext uri="{BB962C8B-B14F-4D97-AF65-F5344CB8AC3E}">
+        <p14:creationId xmlns:p14="http://schemas.microsoft.com/office/powerpoint/2010/main" val="2771667760"/>
+      </p:ext>
+    </p:extLst>
+  </p:cSld>
+  <p:clrMapOvr>
+    <a:masterClrMapping/>
+  </p:clrMapOvr>
+</p:notes>
+</file>
+
+<file path=ppt/notesSlides/notesSlide3.xml><?xml version="1.0" encoding="utf-8"?>
+<p:notes xmlns:a="http://schemas.openxmlformats.org/drawingml/2006/main" xmlns:r="http://schemas.openxmlformats.org/officeDocument/2006/relationships" xmlns:p="http://schemas.openxmlformats.org/presentationml/2006/main">
+  <p:cSld>
+    <p:spTree>
+      <p:nvGrpSpPr>
+        <p:cNvPr id="1" name=""/>
+        <p:cNvGrpSpPr/>
+        <p:nvPr/>
+      </p:nvGrpSpPr>
+      <p:grpSpPr>
+        <a:xfrm>
+          <a:off x="0" y="0"/>
+          <a:ext cx="0" cy="0"/>
+          <a:chOff x="0" y="0"/>
+          <a:chExt cx="0" cy="0"/>
+        </a:xfrm>
+      </p:grpSpPr>
+      <p:sp>
+        <p:nvSpPr>
+          <p:cNvPr id="2" name="Folienbildplatzhalter 1"/>
+          <p:cNvSpPr>
+            <a:spLocks noGrp="1" noRot="1" noChangeAspect="1"/>
+          </p:cNvSpPr>
+          <p:nvPr>
+            <p:ph type="sldImg"/>
+          </p:nvPr>
+        </p:nvSpPr>
+        <p:spPr/>
+      </p:sp>
+      <p:sp>
+        <p:nvSpPr>
+          <p:cNvPr id="3" name="Notizenplatzhalter 2"/>
+          <p:cNvSpPr>
+            <a:spLocks noGrp="1"/>
+          </p:cNvSpPr>
+          <p:nvPr>
+            <p:ph type="body" idx="1"/>
+          </p:nvPr>
+        </p:nvSpPr>
+        <p:spPr/>
+        <p:txBody>
+          <a:bodyPr/>
+          <a:lstStyle/>
+          <a:p>
+            <a:pPr marL="0" marR="0" lvl="0" indent="0" algn="l" defTabSz="914400" rtl="0" eaLnBrk="1" fontAlgn="auto" latinLnBrk="0" hangingPunct="1">
+              <a:lnSpc>
+                <a:spcPct val="100000"/>
+              </a:lnSpc>
+              <a:spcBef>
+                <a:spcPts val="0"/>
+              </a:spcBef>
+              <a:spcAft>
+                <a:spcPts val="0"/>
+              </a:spcAft>
+              <a:buClrTx/>
+              <a:buSzTx/>
+              <a:buFontTx/>
+              <a:buNone/>
+              <a:tabLst/>
+              <a:defRPr/>
+            </a:pPr>
+            <a:r>
+              <a:rPr lang="de-DE" dirty="0"/>
+              <a:t>Stand: Mittwoch 12:28</a:t>
+            </a:r>
+          </a:p>
+          <a:p>
+            <a:endParaRPr lang="de-DE" dirty="0"/>
+          </a:p>
+        </p:txBody>
+      </p:sp>
+      <p:sp>
+        <p:nvSpPr>
+          <p:cNvPr id="4" name="Foliennummernplatzhalter 3"/>
+          <p:cNvSpPr>
+            <a:spLocks noGrp="1"/>
+          </p:cNvSpPr>
+          <p:nvPr>
+            <p:ph type="sldNum" sz="quarter" idx="5"/>
+          </p:nvPr>
+        </p:nvSpPr>
+        <p:spPr/>
+        <p:txBody>
+          <a:bodyPr/>
+          <a:lstStyle/>
+          <a:p>
+            <a:fld id="{F9573A14-2FD9-4F88-9CDD-7A01E9A13A5F}" type="slidenum">
+              <a:rPr lang="de-DE" smtClean="0"/>
+              <a:t>11</a:t>
+            </a:fld>
+            <a:endParaRPr lang="de-DE"/>
+          </a:p>
+        </p:txBody>
+      </p:sp>
+    </p:spTree>
+    <p:extLst>
+      <p:ext uri="{BB962C8B-B14F-4D97-AF65-F5344CB8AC3E}">
+        <p14:creationId xmlns:p14="http://schemas.microsoft.com/office/powerpoint/2010/main" val="3750979307"/>
+      </p:ext>
+    </p:extLst>
+  </p:cSld>
+  <p:clrMapOvr>
+    <a:masterClrMapping/>
+  </p:clrMapOvr>
+</p:notes>
+</file>
+
+<file path=ppt/notesSlides/notesSlide4.xml><?xml version="1.0" encoding="utf-8"?>
+<p:notes xmlns:a="http://schemas.openxmlformats.org/drawingml/2006/main" xmlns:r="http://schemas.openxmlformats.org/officeDocument/2006/relationships" xmlns:p="http://schemas.openxmlformats.org/presentationml/2006/main">
+  <p:cSld>
+    <p:spTree>
+      <p:nvGrpSpPr>
+        <p:cNvPr id="1" name=""/>
+        <p:cNvGrpSpPr/>
+        <p:nvPr/>
+      </p:nvGrpSpPr>
+      <p:grpSpPr>
+        <a:xfrm>
+          <a:off x="0" y="0"/>
+          <a:ext cx="0" cy="0"/>
+          <a:chOff x="0" y="0"/>
+          <a:chExt cx="0" cy="0"/>
+        </a:xfrm>
+      </p:grpSpPr>
+      <p:sp>
+        <p:nvSpPr>
+          <p:cNvPr id="2" name="Folienbildplatzhalter 1"/>
+          <p:cNvSpPr>
+            <a:spLocks noGrp="1" noRot="1" noChangeAspect="1"/>
+          </p:cNvSpPr>
+          <p:nvPr>
+            <p:ph type="sldImg"/>
+          </p:nvPr>
+        </p:nvSpPr>
+        <p:spPr/>
+      </p:sp>
+      <p:sp>
+        <p:nvSpPr>
+          <p:cNvPr id="3" name="Notizenplatzhalter 2"/>
+          <p:cNvSpPr>
+            <a:spLocks noGrp="1"/>
+          </p:cNvSpPr>
+          <p:nvPr>
+            <p:ph type="body" idx="1"/>
+          </p:nvPr>
+        </p:nvSpPr>
+        <p:spPr/>
+        <p:txBody>
+          <a:bodyPr/>
+          <a:lstStyle/>
+          <a:p>
+            <a:pPr marL="0" marR="0" lvl="0" indent="0" algn="l" defTabSz="914400" rtl="0" eaLnBrk="1" fontAlgn="auto" latinLnBrk="0" hangingPunct="1">
+              <a:lnSpc>
+                <a:spcPct val="100000"/>
+              </a:lnSpc>
+              <a:spcBef>
+                <a:spcPts val="0"/>
+              </a:spcBef>
+              <a:spcAft>
+                <a:spcPts val="0"/>
+              </a:spcAft>
+              <a:buClrTx/>
+              <a:buSzTx/>
+              <a:buFontTx/>
+              <a:buNone/>
+              <a:tabLst/>
+              <a:defRPr/>
+            </a:pPr>
+            <a:r>
+              <a:rPr lang="de-DE"/>
+              <a:t>Stand: Mittwoch 12:28</a:t>
+            </a:r>
+          </a:p>
+          <a:p>
+            <a:endParaRPr lang="de-DE"/>
+          </a:p>
+        </p:txBody>
+      </p:sp>
+      <p:sp>
+        <p:nvSpPr>
+          <p:cNvPr id="4" name="Foliennummernplatzhalter 3"/>
+          <p:cNvSpPr>
+            <a:spLocks noGrp="1"/>
+          </p:cNvSpPr>
+          <p:nvPr>
+            <p:ph type="sldNum" sz="quarter" idx="5"/>
+          </p:nvPr>
+        </p:nvSpPr>
+        <p:spPr/>
+        <p:txBody>
+          <a:bodyPr/>
+          <a:lstStyle/>
+          <a:p>
+            <a:fld id="{F9573A14-2FD9-4F88-9CDD-7A01E9A13A5F}" type="slidenum">
+              <a:rPr lang="de-DE" smtClean="0"/>
+              <a:t>12</a:t>
+            </a:fld>
+            <a:endParaRPr lang="de-DE"/>
+          </a:p>
+        </p:txBody>
+      </p:sp>
+    </p:spTree>
+    <p:extLst>
+      <p:ext uri="{BB962C8B-B14F-4D97-AF65-F5344CB8AC3E}">
+        <p14:creationId xmlns:p14="http://schemas.microsoft.com/office/powerpoint/2010/main" val="3310110564"/>
+      </p:ext>
+    </p:extLst>
+  </p:cSld>
+  <p:clrMapOvr>
+    <a:masterClrMapping/>
+  </p:clrMapOvr>
+</p:notes>
 </file>
 
 <file path=ppt/slideLayouts/slideLayout1.xml><?xml version="1.0" encoding="utf-8"?>
@@ -3501,7 +4261,7 @@
           </p:nvPr>
         </p:nvPicPr>
         <p:blipFill>
-          <a:blip r:embed="rId2">
+          <a:blip r:embed="rId3">
             <a:extLst>
               <a:ext uri="{28A0092B-C50C-407E-A947-70E740481C1C}">
                 <a14:useLocalDpi xmlns:a14="http://schemas.microsoft.com/office/drawing/2010/main" val="0"/>
@@ -3604,7 +4364,7 @@
           </p:nvPr>
         </p:nvPicPr>
         <p:blipFill>
-          <a:blip r:embed="rId2">
+          <a:blip r:embed="rId3">
             <a:extLst>
               <a:ext uri="{28A0092B-C50C-407E-A947-70E740481C1C}">
                 <a14:useLocalDpi xmlns:a14="http://schemas.microsoft.com/office/drawing/2010/main" val="0"/>
@@ -3745,7 +4505,7 @@
           <p:nvPr/>
         </p:nvPicPr>
         <p:blipFill>
-          <a:blip r:embed="rId2">
+          <a:blip r:embed="rId3">
             <a:extLst>
               <a:ext uri="{28A0092B-C50C-407E-A947-70E740481C1C}">
                 <a14:useLocalDpi xmlns:a14="http://schemas.microsoft.com/office/drawing/2010/main" val="0"/>
@@ -4307,16 +5067,15 @@
           </p:nvPr>
         </p:nvPicPr>
         <p:blipFill>
-          <a:blip r:embed="rId2">
+          <a:blip r:embed="rId3">
             <a:extLst>
               <a:ext uri="{28A0092B-C50C-407E-A947-70E740481C1C}">
                 <a14:useLocalDpi xmlns:a14="http://schemas.microsoft.com/office/drawing/2010/main" val="0"/>
               </a:ext>
             </a:extLst>
           </a:blip>
-          <a:stretch>
-            <a:fillRect/>
-          </a:stretch>
+          <a:srcRect/>
+          <a:stretch/>
         </p:blipFill>
         <p:spPr>
           <a:xfrm>
@@ -5143,4 +5902,319 @@
     </a:ext>
   </a:extLst>
 </a:theme>
+</file>
+
+<file path=ppt/theme/theme2.xml><?xml version="1.0" encoding="utf-8"?>
+<a:theme xmlns:a="http://schemas.openxmlformats.org/drawingml/2006/main" name="Office">
+  <a:themeElements>
+    <a:clrScheme name="Office">
+      <a:dk1>
+        <a:sysClr val="windowText" lastClr="000000"/>
+      </a:dk1>
+      <a:lt1>
+        <a:sysClr val="window" lastClr="FFFFFF"/>
+      </a:lt1>
+      <a:dk2>
+        <a:srgbClr val="0E2841"/>
+      </a:dk2>
+      <a:lt2>
+        <a:srgbClr val="E8E8E8"/>
+      </a:lt2>
+      <a:accent1>
+        <a:srgbClr val="156082"/>
+      </a:accent1>
+      <a:accent2>
+        <a:srgbClr val="E97132"/>
+      </a:accent2>
+      <a:accent3>
+        <a:srgbClr val="196B24"/>
+      </a:accent3>
+      <a:accent4>
+        <a:srgbClr val="0F9ED5"/>
+      </a:accent4>
+      <a:accent5>
+        <a:srgbClr val="A02B93"/>
+      </a:accent5>
+      <a:accent6>
+        <a:srgbClr val="4EA72E"/>
+      </a:accent6>
+      <a:hlink>
+        <a:srgbClr val="467886"/>
+      </a:hlink>
+      <a:folHlink>
+        <a:srgbClr val="96607D"/>
+      </a:folHlink>
+    </a:clrScheme>
+    <a:fontScheme name="Office">
+      <a:majorFont>
+        <a:latin typeface="Aptos Display" panose="02110004020202020204"/>
+        <a:ea typeface=""/>
+        <a:cs typeface=""/>
+        <a:font script="Jpan" typeface="游ゴシック Light"/>
+        <a:font script="Hang" typeface="맑은 고딕"/>
+        <a:font script="Hans" typeface="等线 Light"/>
+        <a:font script="Hant" typeface="新細明體"/>
+        <a:font script="Arab" typeface="Times New Roman"/>
+        <a:font script="Hebr" typeface="Times New Roman"/>
+        <a:font script="Thai" typeface="Angsana New"/>
+        <a:font script="Ethi" typeface="Nyala"/>
+        <a:font script="Beng" typeface="Vrinda"/>
+        <a:font script="Gujr" typeface="Shruti"/>
+        <a:font script="Khmr" typeface="MoolBoran"/>
+        <a:font script="Knda" typeface="Tunga"/>
+        <a:font script="Guru" typeface="Raavi"/>
+        <a:font script="Cans" typeface="Euphemia"/>
+        <a:font script="Cher" typeface="Plantagenet Cherokee"/>
+        <a:font script="Yiii" typeface="Microsoft Yi Baiti"/>
+        <a:font script="Tibt" typeface="Microsoft Himalaya"/>
+        <a:font script="Thaa" typeface="MV Boli"/>
+        <a:font script="Deva" typeface="Mangal"/>
+        <a:font script="Telu" typeface="Gautami"/>
+        <a:font script="Taml" typeface="Latha"/>
+        <a:font script="Syrc" typeface="Estrangelo Edessa"/>
+        <a:font script="Orya" typeface="Kalinga"/>
+        <a:font script="Mlym" typeface="Kartika"/>
+        <a:font script="Laoo" typeface="DokChampa"/>
+        <a:font script="Sinh" typeface="Iskoola Pota"/>
+        <a:font script="Mong" typeface="Mongolian Baiti"/>
+        <a:font script="Viet" typeface="Times New Roman"/>
+        <a:font script="Uigh" typeface="Microsoft Uighur"/>
+        <a:font script="Geor" typeface="Sylfaen"/>
+        <a:font script="Armn" typeface="Arial"/>
+        <a:font script="Bugi" typeface="Leelawadee UI"/>
+        <a:font script="Bopo" typeface="Microsoft JhengHei"/>
+        <a:font script="Java" typeface="Javanese Text"/>
+        <a:font script="Lisu" typeface="Segoe UI"/>
+        <a:font script="Mymr" typeface="Myanmar Text"/>
+        <a:font script="Nkoo" typeface="Ebrima"/>
+        <a:font script="Olck" typeface="Nirmala UI"/>
+        <a:font script="Osma" typeface="Ebrima"/>
+        <a:font script="Phag" typeface="Phagspa"/>
+        <a:font script="Syrn" typeface="Estrangelo Edessa"/>
+        <a:font script="Syrj" typeface="Estrangelo Edessa"/>
+        <a:font script="Syre" typeface="Estrangelo Edessa"/>
+        <a:font script="Sora" typeface="Nirmala UI"/>
+        <a:font script="Tale" typeface="Microsoft Tai Le"/>
+        <a:font script="Talu" typeface="Microsoft New Tai Lue"/>
+        <a:font script="Tfng" typeface="Ebrima"/>
+      </a:majorFont>
+      <a:minorFont>
+        <a:latin typeface="Aptos" panose="02110004020202020204"/>
+        <a:ea typeface=""/>
+        <a:cs typeface=""/>
+        <a:font script="Jpan" typeface="游ゴシック"/>
+        <a:font script="Hang" typeface="맑은 고딕"/>
+        <a:font script="Hans" typeface="等线"/>
+        <a:font script="Hant" typeface="新細明體"/>
+        <a:font script="Arab" typeface="Arial"/>
+        <a:font script="Hebr" typeface="Arial"/>
+        <a:font script="Thai" typeface="Cordia New"/>
+        <a:font script="Ethi" typeface="Nyala"/>
+        <a:font script="Beng" typeface="Vrinda"/>
+        <a:font script="Gujr" typeface="Shruti"/>
+        <a:font script="Khmr" typeface="DaunPenh"/>
+        <a:font script="Knda" typeface="Tunga"/>
+        <a:font script="Guru" typeface="Raavi"/>
+        <a:font script="Cans" typeface="Euphemia"/>
+        <a:font script="Cher" typeface="Plantagenet Cherokee"/>
+        <a:font script="Yiii" typeface="Microsoft Yi Baiti"/>
+        <a:font script="Tibt" typeface="Microsoft Himalaya"/>
+        <a:font script="Thaa" typeface="MV Boli"/>
+        <a:font script="Deva" typeface="Mangal"/>
+        <a:font script="Telu" typeface="Gautami"/>
+        <a:font script="Taml" typeface="Latha"/>
+        <a:font script="Syrc" typeface="Estrangelo Edessa"/>
+        <a:font script="Orya" typeface="Kalinga"/>
+        <a:font script="Mlym" typeface="Kartika"/>
+        <a:font script="Laoo" typeface="DokChampa"/>
+        <a:font script="Sinh" typeface="Iskoola Pota"/>
+        <a:font script="Mong" typeface="Mongolian Baiti"/>
+        <a:font script="Viet" typeface="Arial"/>
+        <a:font script="Uigh" typeface="Microsoft Uighur"/>
+        <a:font script="Geor" typeface="Sylfaen"/>
+        <a:font script="Armn" typeface="Arial"/>
+        <a:font script="Bugi" typeface="Leelawadee UI"/>
+        <a:font script="Bopo" typeface="Microsoft JhengHei"/>
+        <a:font script="Java" typeface="Javanese Text"/>
+        <a:font script="Lisu" typeface="Segoe UI"/>
+        <a:font script="Mymr" typeface="Myanmar Text"/>
+        <a:font script="Nkoo" typeface="Ebrima"/>
+        <a:font script="Olck" typeface="Nirmala UI"/>
+        <a:font script="Osma" typeface="Ebrima"/>
+        <a:font script="Phag" typeface="Phagspa"/>
+        <a:font script="Syrn" typeface="Estrangelo Edessa"/>
+        <a:font script="Syrj" typeface="Estrangelo Edessa"/>
+        <a:font script="Syre" typeface="Estrangelo Edessa"/>
+        <a:font script="Sora" typeface="Nirmala UI"/>
+        <a:font script="Tale" typeface="Microsoft Tai Le"/>
+        <a:font script="Talu" typeface="Microsoft New Tai Lue"/>
+        <a:font script="Tfng" typeface="Ebrima"/>
+      </a:minorFont>
+    </a:fontScheme>
+    <a:fmtScheme name="Office">
+      <a:fillStyleLst>
+        <a:solidFill>
+          <a:schemeClr val="phClr"/>
+        </a:solidFill>
+        <a:gradFill rotWithShape="1">
+          <a:gsLst>
+            <a:gs pos="0">
+              <a:schemeClr val="phClr">
+                <a:lumMod val="110000"/>
+                <a:satMod val="105000"/>
+                <a:tint val="67000"/>
+              </a:schemeClr>
+            </a:gs>
+            <a:gs pos="50000">
+              <a:schemeClr val="phClr">
+                <a:lumMod val="105000"/>
+                <a:satMod val="103000"/>
+                <a:tint val="73000"/>
+              </a:schemeClr>
+            </a:gs>
+            <a:gs pos="100000">
+              <a:schemeClr val="phClr">
+                <a:lumMod val="105000"/>
+                <a:satMod val="109000"/>
+                <a:tint val="81000"/>
+              </a:schemeClr>
+            </a:gs>
+          </a:gsLst>
+          <a:lin ang="5400000" scaled="0"/>
+        </a:gradFill>
+        <a:gradFill rotWithShape="1">
+          <a:gsLst>
+            <a:gs pos="0">
+              <a:schemeClr val="phClr">
+                <a:satMod val="103000"/>
+                <a:lumMod val="102000"/>
+                <a:tint val="94000"/>
+              </a:schemeClr>
+            </a:gs>
+            <a:gs pos="50000">
+              <a:schemeClr val="phClr">
+                <a:satMod val="110000"/>
+                <a:lumMod val="100000"/>
+                <a:shade val="100000"/>
+              </a:schemeClr>
+            </a:gs>
+            <a:gs pos="100000">
+              <a:schemeClr val="phClr">
+                <a:lumMod val="99000"/>
+                <a:satMod val="120000"/>
+                <a:shade val="78000"/>
+              </a:schemeClr>
+            </a:gs>
+          </a:gsLst>
+          <a:lin ang="5400000" scaled="0"/>
+        </a:gradFill>
+      </a:fillStyleLst>
+      <a:lnStyleLst>
+        <a:ln w="12700" cap="flat" cmpd="sng" algn="ctr">
+          <a:solidFill>
+            <a:schemeClr val="phClr"/>
+          </a:solidFill>
+          <a:prstDash val="solid"/>
+          <a:miter lim="800000"/>
+        </a:ln>
+        <a:ln w="19050" cap="flat" cmpd="sng" algn="ctr">
+          <a:solidFill>
+            <a:schemeClr val="phClr"/>
+          </a:solidFill>
+          <a:prstDash val="solid"/>
+          <a:miter lim="800000"/>
+        </a:ln>
+        <a:ln w="25400" cap="flat" cmpd="sng" algn="ctr">
+          <a:solidFill>
+            <a:schemeClr val="phClr"/>
+          </a:solidFill>
+          <a:prstDash val="solid"/>
+          <a:miter lim="800000"/>
+        </a:ln>
+      </a:lnStyleLst>
+      <a:effectStyleLst>
+        <a:effectStyle>
+          <a:effectLst/>
+        </a:effectStyle>
+        <a:effectStyle>
+          <a:effectLst/>
+        </a:effectStyle>
+        <a:effectStyle>
+          <a:effectLst>
+            <a:outerShdw blurRad="57150" dist="19050" dir="5400000" algn="ctr" rotWithShape="0">
+              <a:srgbClr val="000000">
+                <a:alpha val="63000"/>
+              </a:srgbClr>
+            </a:outerShdw>
+          </a:effectLst>
+        </a:effectStyle>
+      </a:effectStyleLst>
+      <a:bgFillStyleLst>
+        <a:solidFill>
+          <a:schemeClr val="phClr"/>
+        </a:solidFill>
+        <a:solidFill>
+          <a:schemeClr val="phClr">
+            <a:tint val="95000"/>
+            <a:satMod val="170000"/>
+          </a:schemeClr>
+        </a:solidFill>
+        <a:gradFill rotWithShape="1">
+          <a:gsLst>
+            <a:gs pos="0">
+              <a:schemeClr val="phClr">
+                <a:tint val="93000"/>
+                <a:satMod val="150000"/>
+                <a:shade val="98000"/>
+                <a:lumMod val="102000"/>
+              </a:schemeClr>
+            </a:gs>
+            <a:gs pos="50000">
+              <a:schemeClr val="phClr">
+                <a:tint val="98000"/>
+                <a:satMod val="130000"/>
+                <a:shade val="90000"/>
+                <a:lumMod val="103000"/>
+              </a:schemeClr>
+            </a:gs>
+            <a:gs pos="100000">
+              <a:schemeClr val="phClr">
+                <a:shade val="63000"/>
+                <a:satMod val="120000"/>
+              </a:schemeClr>
+            </a:gs>
+          </a:gsLst>
+          <a:lin ang="5400000" scaled="0"/>
+        </a:gradFill>
+      </a:bgFillStyleLst>
+    </a:fmtScheme>
+  </a:themeElements>
+  <a:objectDefaults>
+    <a:lnDef>
+      <a:spPr/>
+      <a:bodyPr/>
+      <a:lstStyle/>
+      <a:style>
+        <a:lnRef idx="2">
+          <a:schemeClr val="accent1"/>
+        </a:lnRef>
+        <a:fillRef idx="0">
+          <a:schemeClr val="accent1"/>
+        </a:fillRef>
+        <a:effectRef idx="1">
+          <a:schemeClr val="accent1"/>
+        </a:effectRef>
+        <a:fontRef idx="minor">
+          <a:schemeClr val="tx1"/>
+        </a:fontRef>
+      </a:style>
+    </a:lnDef>
+  </a:objectDefaults>
+  <a:extraClrSchemeLst/>
+  <a:extLst>
+    <a:ext uri="{05A4C25C-085E-4340-85A3-A5531E510DB2}">
+      <thm15:themeFamily xmlns:thm15="http://schemas.microsoft.com/office/thememl/2012/main" name="Office Theme" id="{2E142A2C-CD16-42D6-873A-C26D2A0506FA}" vid="{1BDDFF52-6CD6-40A5-AB3C-68EB2F1E4D0A}"/>
+    </a:ext>
+  </a:extLst>
+</a:theme>
 </file>
--- a/Präsentation/Präsentation.pptx
+++ b/Präsentation/Präsentation.pptx
@@ -733,7 +733,7 @@
             </a:pPr>
             <a:r>
               <a:rPr lang="de-DE" dirty="0"/>
-              <a:t>Stand: Mittwoch 12:28</a:t>
+              <a:t>Stand: Mittwoch 17:10</a:t>
             </a:r>
           </a:p>
           <a:p>
@@ -839,12 +839,12 @@
               <a:defRPr/>
             </a:pPr>
             <a:r>
-              <a:rPr lang="de-DE"/>
-              <a:t>Stand: Mittwoch 12:28</a:t>
-            </a:r>
-          </a:p>
-          <a:p>
-            <a:endParaRPr lang="de-DE"/>
+              <a:rPr lang="de-DE" dirty="0"/>
+              <a:t>Stand: Mittwoch 17:11</a:t>
+            </a:r>
+          </a:p>
+          <a:p>
+            <a:endParaRPr lang="de-DE" dirty="0"/>
           </a:p>
         </p:txBody>
       </p:sp>

--- a/Präsentation/Präsentation.pptx
+++ b/Präsentation/Präsentation.pptx
@@ -209,7 +209,7 @@
           <a:p>
             <a:fld id="{7644AF23-4141-471D-8F47-D0D465B8A2CC}" type="datetimeFigureOut">
               <a:rPr lang="de-DE" smtClean="0"/>
-              <a:t>26.08.2026</a:t>
+              <a:t>27.08.2026</a:t>
             </a:fld>
             <a:endParaRPr lang="de-DE"/>
           </a:p>
@@ -733,7 +733,7 @@
             </a:pPr>
             <a:r>
               <a:rPr lang="de-DE" dirty="0"/>
-              <a:t>Stand: Mittwoch 17:10</a:t>
+              <a:t>Stand: Donnerstag 10:33</a:t>
             </a:r>
           </a:p>
           <a:p>
@@ -840,7 +840,7 @@
             </a:pPr>
             <a:r>
               <a:rPr lang="de-DE" dirty="0"/>
-              <a:t>Stand: Mittwoch 17:11</a:t>
+              <a:t>Stand: Donnerstag 10:33</a:t>
             </a:r>
           </a:p>
           <a:p>
@@ -1031,7 +1031,7 @@
           <a:p>
             <a:fld id="{573F7FC6-07F6-421A-8FD9-92A0CA065868}" type="datetimeFigureOut">
               <a:rPr lang="de-DE" smtClean="0"/>
-              <a:t>26.08.2026</a:t>
+              <a:t>27.08.2026</a:t>
             </a:fld>
             <a:endParaRPr lang="de-DE"/>
           </a:p>
@@ -1229,7 +1229,7 @@
           <a:p>
             <a:fld id="{573F7FC6-07F6-421A-8FD9-92A0CA065868}" type="datetimeFigureOut">
               <a:rPr lang="de-DE" smtClean="0"/>
-              <a:t>26.08.2026</a:t>
+              <a:t>27.08.2026</a:t>
             </a:fld>
             <a:endParaRPr lang="de-DE"/>
           </a:p>
@@ -1437,7 +1437,7 @@
           <a:p>
             <a:fld id="{573F7FC6-07F6-421A-8FD9-92A0CA065868}" type="datetimeFigureOut">
               <a:rPr lang="de-DE" smtClean="0"/>
-              <a:t>26.08.2026</a:t>
+              <a:t>27.08.2026</a:t>
             </a:fld>
             <a:endParaRPr lang="de-DE"/>
           </a:p>
@@ -1635,7 +1635,7 @@
           <a:p>
             <a:fld id="{573F7FC6-07F6-421A-8FD9-92A0CA065868}" type="datetimeFigureOut">
               <a:rPr lang="de-DE" smtClean="0"/>
-              <a:t>26.08.2026</a:t>
+              <a:t>27.08.2026</a:t>
             </a:fld>
             <a:endParaRPr lang="de-DE"/>
           </a:p>
@@ -1910,7 +1910,7 @@
           <a:p>
             <a:fld id="{573F7FC6-07F6-421A-8FD9-92A0CA065868}" type="datetimeFigureOut">
               <a:rPr lang="de-DE" smtClean="0"/>
-              <a:t>26.08.2026</a:t>
+              <a:t>27.08.2026</a:t>
             </a:fld>
             <a:endParaRPr lang="de-DE"/>
           </a:p>
@@ -2175,7 +2175,7 @@
           <a:p>
             <a:fld id="{573F7FC6-07F6-421A-8FD9-92A0CA065868}" type="datetimeFigureOut">
               <a:rPr lang="de-DE" smtClean="0"/>
-              <a:t>26.08.2026</a:t>
+              <a:t>27.08.2026</a:t>
             </a:fld>
             <a:endParaRPr lang="de-DE"/>
           </a:p>
@@ -2587,7 +2587,7 @@
           <a:p>
             <a:fld id="{573F7FC6-07F6-421A-8FD9-92A0CA065868}" type="datetimeFigureOut">
               <a:rPr lang="de-DE" smtClean="0"/>
-              <a:t>26.08.2026</a:t>
+              <a:t>27.08.2026</a:t>
             </a:fld>
             <a:endParaRPr lang="de-DE"/>
           </a:p>
@@ -2728,7 +2728,7 @@
           <a:p>
             <a:fld id="{573F7FC6-07F6-421A-8FD9-92A0CA065868}" type="datetimeFigureOut">
               <a:rPr lang="de-DE" smtClean="0"/>
-              <a:t>26.08.2026</a:t>
+              <a:t>27.08.2026</a:t>
             </a:fld>
             <a:endParaRPr lang="de-DE"/>
           </a:p>
@@ -2841,7 +2841,7 @@
           <a:p>
             <a:fld id="{573F7FC6-07F6-421A-8FD9-92A0CA065868}" type="datetimeFigureOut">
               <a:rPr lang="de-DE" smtClean="0"/>
-              <a:t>26.08.2026</a:t>
+              <a:t>27.08.2026</a:t>
             </a:fld>
             <a:endParaRPr lang="de-DE"/>
           </a:p>
@@ -3152,7 +3152,7 @@
           <a:p>
             <a:fld id="{573F7FC6-07F6-421A-8FD9-92A0CA065868}" type="datetimeFigureOut">
               <a:rPr lang="de-DE" smtClean="0"/>
-              <a:t>26.08.2026</a:t>
+              <a:t>27.08.2026</a:t>
             </a:fld>
             <a:endParaRPr lang="de-DE"/>
           </a:p>
@@ -3440,7 +3440,7 @@
           <a:p>
             <a:fld id="{573F7FC6-07F6-421A-8FD9-92A0CA065868}" type="datetimeFigureOut">
               <a:rPr lang="de-DE" smtClean="0"/>
-              <a:t>26.08.2026</a:t>
+              <a:t>27.08.2026</a:t>
             </a:fld>
             <a:endParaRPr lang="de-DE"/>
           </a:p>
@@ -3681,7 +3681,7 @@
           <a:p>
             <a:fld id="{573F7FC6-07F6-421A-8FD9-92A0CA065868}" type="datetimeFigureOut">
               <a:rPr lang="de-DE" smtClean="0"/>
-              <a:t>26.08.2026</a:t>
+              <a:t>27.08.2026</a:t>
             </a:fld>
             <a:endParaRPr lang="de-DE"/>
           </a:p>

--- a/Präsentation/Präsentation.pptx
+++ b/Präsentation/Präsentation.pptx
@@ -733,7 +733,7 @@
             </a:pPr>
             <a:r>
               <a:rPr lang="de-DE" dirty="0"/>
-              <a:t>Stand: Donnerstag 10:33</a:t>
+              <a:t>Stand: Donnerstag 15:15</a:t>
             </a:r>
           </a:p>
           <a:p>
@@ -840,7 +840,7 @@
             </a:pPr>
             <a:r>
               <a:rPr lang="de-DE" dirty="0"/>
-              <a:t>Stand: Donnerstag 10:33</a:t>
+              <a:t>Stand: Donnerstag 15:15</a:t>
             </a:r>
           </a:p>
           <a:p>

--- a/Präsentation/Präsentation.pptx
+++ b/Präsentation/Präsentation.pptx
@@ -5,22 +5,23 @@
     <p:sldMasterId id="2147483648" r:id="rId1"/>
   </p:sldMasterIdLst>
   <p:notesMasterIdLst>
-    <p:notesMasterId r:id="rId15"/>
+    <p:notesMasterId r:id="rId16"/>
   </p:notesMasterIdLst>
   <p:sldIdLst>
     <p:sldId id="256" r:id="rId2"/>
     <p:sldId id="257" r:id="rId3"/>
     <p:sldId id="263" r:id="rId4"/>
     <p:sldId id="258" r:id="rId5"/>
-    <p:sldId id="259" r:id="rId6"/>
-    <p:sldId id="260" r:id="rId7"/>
-    <p:sldId id="261" r:id="rId8"/>
-    <p:sldId id="262" r:id="rId9"/>
-    <p:sldId id="264" r:id="rId10"/>
-    <p:sldId id="265" r:id="rId11"/>
-    <p:sldId id="266" r:id="rId12"/>
-    <p:sldId id="267" r:id="rId13"/>
-    <p:sldId id="268" r:id="rId14"/>
+    <p:sldId id="269" r:id="rId6"/>
+    <p:sldId id="259" r:id="rId7"/>
+    <p:sldId id="260" r:id="rId8"/>
+    <p:sldId id="261" r:id="rId9"/>
+    <p:sldId id="262" r:id="rId10"/>
+    <p:sldId id="264" r:id="rId11"/>
+    <p:sldId id="265" r:id="rId12"/>
+    <p:sldId id="266" r:id="rId13"/>
+    <p:sldId id="267" r:id="rId14"/>
+    <p:sldId id="268" r:id="rId15"/>
   </p:sldIdLst>
   <p:sldSz cx="12192000" cy="6858000"/>
   <p:notesSz cx="6858000" cy="9144000"/>
@@ -209,7 +210,7 @@
           <a:p>
             <a:fld id="{7644AF23-4141-471D-8F47-D0D465B8A2CC}" type="datetimeFigureOut">
               <a:rPr lang="de-DE" smtClean="0"/>
-              <a:t>27.08.2026</a:t>
+              <a:t>28.08.2026</a:t>
             </a:fld>
             <a:endParaRPr lang="de-DE"/>
           </a:p>
@@ -520,10 +521,7 @@
           <a:bodyPr/>
           <a:lstStyle/>
           <a:p>
-            <a:r>
-              <a:rPr lang="de-DE" dirty="0"/>
-              <a:t>Stand: Mittwoch 12:28</a:t>
-            </a:r>
+            <a:endParaRPr lang="de-DE" dirty="0"/>
           </a:p>
         </p:txBody>
       </p:sp>
@@ -568,7 +566,13 @@
   <p:cSld>
     <p:spTree>
       <p:nvGrpSpPr>
-        <p:cNvPr id="1" name=""/>
+        <p:cNvPr id="1" name="">
+          <a:extLst>
+            <a:ext uri="{FF2B5EF4-FFF2-40B4-BE49-F238E27FC236}">
+              <a16:creationId xmlns:a16="http://schemas.microsoft.com/office/drawing/2014/main" id="{FF1E2517-0AA0-56A9-E488-C6698DD8F0E5}"/>
+            </a:ext>
+          </a:extLst>
+        </p:cNvPr>
         <p:cNvGrpSpPr/>
         <p:nvPr/>
       </p:nvGrpSpPr>
@@ -582,7 +586,13 @@
       </p:grpSpPr>
       <p:sp>
         <p:nvSpPr>
-          <p:cNvPr id="2" name="Folienbildplatzhalter 1"/>
+          <p:cNvPr id="2" name="Folienbildplatzhalter 1">
+            <a:extLst>
+              <a:ext uri="{FF2B5EF4-FFF2-40B4-BE49-F238E27FC236}">
+                <a16:creationId xmlns:a16="http://schemas.microsoft.com/office/drawing/2014/main" id="{B53B7ED6-C3C9-B4CF-B4AC-38CC7E347F65}"/>
+              </a:ext>
+            </a:extLst>
+          </p:cNvPr>
           <p:cNvSpPr>
             <a:spLocks noGrp="1" noRot="1" noChangeAspect="1"/>
           </p:cNvSpPr>
@@ -594,7 +604,13 @@
       </p:sp>
       <p:sp>
         <p:nvSpPr>
-          <p:cNvPr id="3" name="Notizenplatzhalter 2"/>
+          <p:cNvPr id="3" name="Notizenplatzhalter 2">
+            <a:extLst>
+              <a:ext uri="{FF2B5EF4-FFF2-40B4-BE49-F238E27FC236}">
+                <a16:creationId xmlns:a16="http://schemas.microsoft.com/office/drawing/2014/main" id="{FA2D01A4-785D-5A7F-D2D7-BAFA05723B2D}"/>
+              </a:ext>
+            </a:extLst>
+          </p:cNvPr>
           <p:cNvSpPr>
             <a:spLocks noGrp="1"/>
           </p:cNvSpPr>
@@ -607,36 +623,19 @@
           <a:bodyPr/>
           <a:lstStyle/>
           <a:p>
-            <a:pPr marL="0" marR="0" lvl="0" indent="0" algn="l" defTabSz="914400" rtl="0" eaLnBrk="1" fontAlgn="auto" latinLnBrk="0" hangingPunct="1">
-              <a:lnSpc>
-                <a:spcPct val="100000"/>
-              </a:lnSpc>
-              <a:spcBef>
-                <a:spcPts val="0"/>
-              </a:spcBef>
-              <a:spcAft>
-                <a:spcPts val="0"/>
-              </a:spcAft>
-              <a:buClrTx/>
-              <a:buSzTx/>
-              <a:buFontTx/>
-              <a:buNone/>
-              <a:tabLst/>
-              <a:defRPr/>
-            </a:pPr>
-            <a:r>
-              <a:rPr lang="de-DE" dirty="0"/>
-              <a:t>Stand: Mittwoch 12:28</a:t>
-            </a:r>
-          </a:p>
-          <a:p>
             <a:endParaRPr lang="de-DE" dirty="0"/>
           </a:p>
         </p:txBody>
       </p:sp>
       <p:sp>
         <p:nvSpPr>
-          <p:cNvPr id="4" name="Foliennummernplatzhalter 3"/>
+          <p:cNvPr id="4" name="Foliennummernplatzhalter 3">
+            <a:extLst>
+              <a:ext uri="{FF2B5EF4-FFF2-40B4-BE49-F238E27FC236}">
+                <a16:creationId xmlns:a16="http://schemas.microsoft.com/office/drawing/2014/main" id="{14BFE99A-A6B2-B4AD-EBE7-A09FAA5D9F9E}"/>
+              </a:ext>
+            </a:extLst>
+          </p:cNvPr>
           <p:cNvSpPr>
             <a:spLocks noGrp="1"/>
           </p:cNvSpPr>
@@ -651,7 +650,7 @@
           <a:p>
             <a:fld id="{F9573A14-2FD9-4F88-9CDD-7A01E9A13A5F}" type="slidenum">
               <a:rPr lang="de-DE" smtClean="0"/>
-              <a:t>10</a:t>
+              <a:t>5</a:t>
             </a:fld>
             <a:endParaRPr lang="de-DE"/>
           </a:p>
@@ -660,7 +659,7 @@
     </p:spTree>
     <p:extLst>
       <p:ext uri="{BB962C8B-B14F-4D97-AF65-F5344CB8AC3E}">
-        <p14:creationId xmlns:p14="http://schemas.microsoft.com/office/powerpoint/2010/main" val="2771667760"/>
+        <p14:creationId xmlns:p14="http://schemas.microsoft.com/office/powerpoint/2010/main" val="885257632"/>
       </p:ext>
     </p:extLst>
   </p:cSld>
@@ -714,29 +713,6 @@
           <a:bodyPr/>
           <a:lstStyle/>
           <a:p>
-            <a:pPr marL="0" marR="0" lvl="0" indent="0" algn="l" defTabSz="914400" rtl="0" eaLnBrk="1" fontAlgn="auto" latinLnBrk="0" hangingPunct="1">
-              <a:lnSpc>
-                <a:spcPct val="100000"/>
-              </a:lnSpc>
-              <a:spcBef>
-                <a:spcPts val="0"/>
-              </a:spcBef>
-              <a:spcAft>
-                <a:spcPts val="0"/>
-              </a:spcAft>
-              <a:buClrTx/>
-              <a:buSzTx/>
-              <a:buFontTx/>
-              <a:buNone/>
-              <a:tabLst/>
-              <a:defRPr/>
-            </a:pPr>
-            <a:r>
-              <a:rPr lang="de-DE" dirty="0"/>
-              <a:t>Stand: Donnerstag 15:15</a:t>
-            </a:r>
-          </a:p>
-          <a:p>
             <a:endParaRPr lang="de-DE" dirty="0"/>
           </a:p>
         </p:txBody>
@@ -767,7 +743,7 @@
     </p:spTree>
     <p:extLst>
       <p:ext uri="{BB962C8B-B14F-4D97-AF65-F5344CB8AC3E}">
-        <p14:creationId xmlns:p14="http://schemas.microsoft.com/office/powerpoint/2010/main" val="3750979307"/>
+        <p14:creationId xmlns:p14="http://schemas.microsoft.com/office/powerpoint/2010/main" val="2771667760"/>
       </p:ext>
     </p:extLst>
   </p:cSld>
@@ -821,29 +797,6 @@
           <a:bodyPr/>
           <a:lstStyle/>
           <a:p>
-            <a:pPr marL="0" marR="0" lvl="0" indent="0" algn="l" defTabSz="914400" rtl="0" eaLnBrk="1" fontAlgn="auto" latinLnBrk="0" hangingPunct="1">
-              <a:lnSpc>
-                <a:spcPct val="100000"/>
-              </a:lnSpc>
-              <a:spcBef>
-                <a:spcPts val="0"/>
-              </a:spcBef>
-              <a:spcAft>
-                <a:spcPts val="0"/>
-              </a:spcAft>
-              <a:buClrTx/>
-              <a:buSzTx/>
-              <a:buFontTx/>
-              <a:buNone/>
-              <a:tabLst/>
-              <a:defRPr/>
-            </a:pPr>
-            <a:r>
-              <a:rPr lang="de-DE" dirty="0"/>
-              <a:t>Stand: Donnerstag 15:15</a:t>
-            </a:r>
-          </a:p>
-          <a:p>
             <a:endParaRPr lang="de-DE" dirty="0"/>
           </a:p>
         </p:txBody>
@@ -866,6 +819,90 @@
             <a:fld id="{F9573A14-2FD9-4F88-9CDD-7A01E9A13A5F}" type="slidenum">
               <a:rPr lang="de-DE" smtClean="0"/>
               <a:t>12</a:t>
+            </a:fld>
+            <a:endParaRPr lang="de-DE"/>
+          </a:p>
+        </p:txBody>
+      </p:sp>
+    </p:spTree>
+    <p:extLst>
+      <p:ext uri="{BB962C8B-B14F-4D97-AF65-F5344CB8AC3E}">
+        <p14:creationId xmlns:p14="http://schemas.microsoft.com/office/powerpoint/2010/main" val="3750979307"/>
+      </p:ext>
+    </p:extLst>
+  </p:cSld>
+  <p:clrMapOvr>
+    <a:masterClrMapping/>
+  </p:clrMapOvr>
+</p:notes>
+</file>
+
+<file path=ppt/notesSlides/notesSlide5.xml><?xml version="1.0" encoding="utf-8"?>
+<p:notes xmlns:a="http://schemas.openxmlformats.org/drawingml/2006/main" xmlns:r="http://schemas.openxmlformats.org/officeDocument/2006/relationships" xmlns:p="http://schemas.openxmlformats.org/presentationml/2006/main">
+  <p:cSld>
+    <p:spTree>
+      <p:nvGrpSpPr>
+        <p:cNvPr id="1" name=""/>
+        <p:cNvGrpSpPr/>
+        <p:nvPr/>
+      </p:nvGrpSpPr>
+      <p:grpSpPr>
+        <a:xfrm>
+          <a:off x="0" y="0"/>
+          <a:ext cx="0" cy="0"/>
+          <a:chOff x="0" y="0"/>
+          <a:chExt cx="0" cy="0"/>
+        </a:xfrm>
+      </p:grpSpPr>
+      <p:sp>
+        <p:nvSpPr>
+          <p:cNvPr id="2" name="Folienbildplatzhalter 1"/>
+          <p:cNvSpPr>
+            <a:spLocks noGrp="1" noRot="1" noChangeAspect="1"/>
+          </p:cNvSpPr>
+          <p:nvPr>
+            <p:ph type="sldImg"/>
+          </p:nvPr>
+        </p:nvSpPr>
+        <p:spPr/>
+      </p:sp>
+      <p:sp>
+        <p:nvSpPr>
+          <p:cNvPr id="3" name="Notizenplatzhalter 2"/>
+          <p:cNvSpPr>
+            <a:spLocks noGrp="1"/>
+          </p:cNvSpPr>
+          <p:nvPr>
+            <p:ph type="body" idx="1"/>
+          </p:nvPr>
+        </p:nvSpPr>
+        <p:spPr/>
+        <p:txBody>
+          <a:bodyPr/>
+          <a:lstStyle/>
+          <a:p>
+            <a:endParaRPr lang="de-DE" dirty="0"/>
+          </a:p>
+        </p:txBody>
+      </p:sp>
+      <p:sp>
+        <p:nvSpPr>
+          <p:cNvPr id="4" name="Foliennummernplatzhalter 3"/>
+          <p:cNvSpPr>
+            <a:spLocks noGrp="1"/>
+          </p:cNvSpPr>
+          <p:nvPr>
+            <p:ph type="sldNum" sz="quarter" idx="5"/>
+          </p:nvPr>
+        </p:nvSpPr>
+        <p:spPr/>
+        <p:txBody>
+          <a:bodyPr/>
+          <a:lstStyle/>
+          <a:p>
+            <a:fld id="{F9573A14-2FD9-4F88-9CDD-7A01E9A13A5F}" type="slidenum">
+              <a:rPr lang="de-DE" smtClean="0"/>
+              <a:t>13</a:t>
             </a:fld>
             <a:endParaRPr lang="de-DE"/>
           </a:p>
@@ -1031,7 +1068,7 @@
           <a:p>
             <a:fld id="{573F7FC6-07F6-421A-8FD9-92A0CA065868}" type="datetimeFigureOut">
               <a:rPr lang="de-DE" smtClean="0"/>
-              <a:t>27.08.2026</a:t>
+              <a:t>28.08.2026</a:t>
             </a:fld>
             <a:endParaRPr lang="de-DE"/>
           </a:p>
@@ -1229,7 +1266,7 @@
           <a:p>
             <a:fld id="{573F7FC6-07F6-421A-8FD9-92A0CA065868}" type="datetimeFigureOut">
               <a:rPr lang="de-DE" smtClean="0"/>
-              <a:t>27.08.2026</a:t>
+              <a:t>28.08.2026</a:t>
             </a:fld>
             <a:endParaRPr lang="de-DE"/>
           </a:p>
@@ -1437,7 +1474,7 @@
           <a:p>
             <a:fld id="{573F7FC6-07F6-421A-8FD9-92A0CA065868}" type="datetimeFigureOut">
               <a:rPr lang="de-DE" smtClean="0"/>
-              <a:t>27.08.2026</a:t>
+              <a:t>28.08.2026</a:t>
             </a:fld>
             <a:endParaRPr lang="de-DE"/>
           </a:p>
@@ -1635,7 +1672,7 @@
           <a:p>
             <a:fld id="{573F7FC6-07F6-421A-8FD9-92A0CA065868}" type="datetimeFigureOut">
               <a:rPr lang="de-DE" smtClean="0"/>
-              <a:t>27.08.2026</a:t>
+              <a:t>28.08.2026</a:t>
             </a:fld>
             <a:endParaRPr lang="de-DE"/>
           </a:p>
@@ -1910,7 +1947,7 @@
           <a:p>
             <a:fld id="{573F7FC6-07F6-421A-8FD9-92A0CA065868}" type="datetimeFigureOut">
               <a:rPr lang="de-DE" smtClean="0"/>
-              <a:t>27.08.2026</a:t>
+              <a:t>28.08.2026</a:t>
             </a:fld>
             <a:endParaRPr lang="de-DE"/>
           </a:p>
@@ -2175,7 +2212,7 @@
           <a:p>
             <a:fld id="{573F7FC6-07F6-421A-8FD9-92A0CA065868}" type="datetimeFigureOut">
               <a:rPr lang="de-DE" smtClean="0"/>
-              <a:t>27.08.2026</a:t>
+              <a:t>28.08.2026</a:t>
             </a:fld>
             <a:endParaRPr lang="de-DE"/>
           </a:p>
@@ -2587,7 +2624,7 @@
           <a:p>
             <a:fld id="{573F7FC6-07F6-421A-8FD9-92A0CA065868}" type="datetimeFigureOut">
               <a:rPr lang="de-DE" smtClean="0"/>
-              <a:t>27.08.2026</a:t>
+              <a:t>28.08.2026</a:t>
             </a:fld>
             <a:endParaRPr lang="de-DE"/>
           </a:p>
@@ -2728,7 +2765,7 @@
           <a:p>
             <a:fld id="{573F7FC6-07F6-421A-8FD9-92A0CA065868}" type="datetimeFigureOut">
               <a:rPr lang="de-DE" smtClean="0"/>
-              <a:t>27.08.2026</a:t>
+              <a:t>28.08.2026</a:t>
             </a:fld>
             <a:endParaRPr lang="de-DE"/>
           </a:p>
@@ -2841,7 +2878,7 @@
           <a:p>
             <a:fld id="{573F7FC6-07F6-421A-8FD9-92A0CA065868}" type="datetimeFigureOut">
               <a:rPr lang="de-DE" smtClean="0"/>
-              <a:t>27.08.2026</a:t>
+              <a:t>28.08.2026</a:t>
             </a:fld>
             <a:endParaRPr lang="de-DE"/>
           </a:p>
@@ -3152,7 +3189,7 @@
           <a:p>
             <a:fld id="{573F7FC6-07F6-421A-8FD9-92A0CA065868}" type="datetimeFigureOut">
               <a:rPr lang="de-DE" smtClean="0"/>
-              <a:t>27.08.2026</a:t>
+              <a:t>28.08.2026</a:t>
             </a:fld>
             <a:endParaRPr lang="de-DE"/>
           </a:p>
@@ -3440,7 +3477,7 @@
           <a:p>
             <a:fld id="{573F7FC6-07F6-421A-8FD9-92A0CA065868}" type="datetimeFigureOut">
               <a:rPr lang="de-DE" smtClean="0"/>
-              <a:t>27.08.2026</a:t>
+              <a:t>28.08.2026</a:t>
             </a:fld>
             <a:endParaRPr lang="de-DE"/>
           </a:p>
@@ -3681,7 +3718,7 @@
           <a:p>
             <a:fld id="{573F7FC6-07F6-421A-8FD9-92A0CA065868}" type="datetimeFigureOut">
               <a:rPr lang="de-DE" smtClean="0"/>
-              <a:t>27.08.2026</a:t>
+              <a:t>28.08.2026</a:t>
             </a:fld>
             <a:endParaRPr lang="de-DE"/>
           </a:p>
@@ -4217,6 +4254,163 @@
       </p:grpSpPr>
       <p:sp>
         <p:nvSpPr>
+          <p:cNvPr id="4" name="Titel 3">
+            <a:extLst>
+              <a:ext uri="{FF2B5EF4-FFF2-40B4-BE49-F238E27FC236}">
+                <a16:creationId xmlns:a16="http://schemas.microsoft.com/office/drawing/2014/main" id="{7FBC5EB2-8E38-A6FF-3747-7C0FBA075449}"/>
+              </a:ext>
+            </a:extLst>
+          </p:cNvPr>
+          <p:cNvSpPr>
+            <a:spLocks noGrp="1"/>
+          </p:cNvSpPr>
+          <p:nvPr>
+            <p:ph type="title"/>
+          </p:nvPr>
+        </p:nvSpPr>
+        <p:spPr/>
+        <p:txBody>
+          <a:bodyPr/>
+          <a:lstStyle/>
+          <a:p>
+            <a:r>
+              <a:rPr lang="de-DE" dirty="0"/>
+              <a:t>DWH-Fragen</a:t>
+            </a:r>
+          </a:p>
+        </p:txBody>
+      </p:sp>
+      <p:sp>
+        <p:nvSpPr>
+          <p:cNvPr id="5" name="Inhaltsplatzhalter 4">
+            <a:extLst>
+              <a:ext uri="{FF2B5EF4-FFF2-40B4-BE49-F238E27FC236}">
+                <a16:creationId xmlns:a16="http://schemas.microsoft.com/office/drawing/2014/main" id="{CE1C7ED1-A131-55DE-7840-35E53E3E2D37}"/>
+              </a:ext>
+            </a:extLst>
+          </p:cNvPr>
+          <p:cNvSpPr>
+            <a:spLocks noGrp="1"/>
+          </p:cNvSpPr>
+          <p:nvPr>
+            <p:ph idx="1"/>
+          </p:nvPr>
+        </p:nvSpPr>
+        <p:spPr/>
+        <p:txBody>
+          <a:bodyPr>
+            <a:normAutofit fontScale="92500" lnSpcReduction="10000"/>
+          </a:bodyPr>
+          <a:lstStyle/>
+          <a:p>
+            <a:pPr marL="514350" lvl="0" indent="-514350">
+              <a:buFont typeface="+mj-lt"/>
+              <a:buAutoNum type="arabicPeriod"/>
+            </a:pPr>
+            <a:r>
+              <a:rPr lang="de-DE" dirty="0"/>
+              <a:t>Welche Filialen haben den größten/kleinsten Umsatz? </a:t>
+            </a:r>
+            <a:r>
+              <a:rPr lang="de-DE" i="1" dirty="0"/>
+              <a:t>(Verkäufe/Stunde, Kategorisierung der Filialen)</a:t>
+            </a:r>
+            <a:endParaRPr lang="de-DE" dirty="0"/>
+          </a:p>
+          <a:p>
+            <a:pPr marL="514350" lvl="0" indent="-514350">
+              <a:buFont typeface="+mj-lt"/>
+              <a:buAutoNum type="arabicPeriod"/>
+            </a:pPr>
+            <a:r>
+              <a:rPr lang="de-DE" dirty="0"/>
+              <a:t>Welche Produkte haben die größte/kleinste Marge? </a:t>
+            </a:r>
+            <a:r>
+              <a:rPr lang="de-DE" i="1" dirty="0"/>
+              <a:t>(Produktpreis, Kosten der Zutaten, Energieverbrauch, Herstellungsdauer)</a:t>
+            </a:r>
+            <a:endParaRPr lang="de-DE" dirty="0"/>
+          </a:p>
+          <a:p>
+            <a:pPr marL="514350" lvl="0" indent="-514350">
+              <a:buFont typeface="+mj-lt"/>
+              <a:buAutoNum type="arabicPeriod"/>
+            </a:pPr>
+            <a:r>
+              <a:rPr lang="de-DE" dirty="0"/>
+              <a:t>Welche Produkte haben in der Herstellung den größten/kleinsten Energieverbrauch? </a:t>
+            </a:r>
+            <a:r>
+              <a:rPr lang="de-DE" i="1" dirty="0"/>
+              <a:t>(Backdauer, Kühlung der Zutaten)</a:t>
+            </a:r>
+            <a:endParaRPr lang="de-DE" dirty="0"/>
+          </a:p>
+          <a:p>
+            <a:pPr marL="514350" lvl="0" indent="-514350">
+              <a:buFont typeface="+mj-lt"/>
+              <a:buAutoNum type="arabicPeriod"/>
+            </a:pPr>
+            <a:r>
+              <a:rPr lang="de-DE" dirty="0"/>
+              <a:t>Zu welchen Tageszeiten wird welche Produktkategorie an welchem Standort am meisten gekauft? (Verkäufe)</a:t>
+            </a:r>
+          </a:p>
+          <a:p>
+            <a:pPr marL="514350" lvl="0" indent="-514350">
+              <a:buFont typeface="+mj-lt"/>
+              <a:buAutoNum type="arabicPeriod"/>
+            </a:pPr>
+            <a:r>
+              <a:rPr lang="de-DE" dirty="0"/>
+              <a:t>Welche Produkte werden am meisten/am wenigsten verkauft?</a:t>
+            </a:r>
+          </a:p>
+          <a:p>
+            <a:pPr marL="514350" indent="-514350">
+              <a:buFont typeface="+mj-lt"/>
+              <a:buAutoNum type="arabicPeriod"/>
+            </a:pPr>
+            <a:r>
+              <a:rPr lang="de-DE" dirty="0"/>
+              <a:t>Welcher Verkäufer hat den größten durchschnittlichen Umsatz pro Verkauf?</a:t>
+            </a:r>
+          </a:p>
+        </p:txBody>
+      </p:sp>
+    </p:spTree>
+    <p:extLst>
+      <p:ext uri="{BB962C8B-B14F-4D97-AF65-F5344CB8AC3E}">
+        <p14:creationId xmlns:p14="http://schemas.microsoft.com/office/powerpoint/2010/main" val="237497836"/>
+      </p:ext>
+    </p:extLst>
+  </p:cSld>
+  <p:clrMapOvr>
+    <a:masterClrMapping/>
+  </p:clrMapOvr>
+</p:sld>
+</file>
+
+<file path=ppt/slides/slide11.xml><?xml version="1.0" encoding="utf-8"?>
+<p:sld xmlns:a="http://schemas.openxmlformats.org/drawingml/2006/main" xmlns:r="http://schemas.openxmlformats.org/officeDocument/2006/relationships" xmlns:p="http://schemas.openxmlformats.org/presentationml/2006/main">
+  <p:cSld>
+    <p:spTree>
+      <p:nvGrpSpPr>
+        <p:cNvPr id="1" name=""/>
+        <p:cNvGrpSpPr/>
+        <p:nvPr/>
+      </p:nvGrpSpPr>
+      <p:grpSpPr>
+        <a:xfrm>
+          <a:off x="0" y="0"/>
+          <a:ext cx="0" cy="0"/>
+          <a:chOff x="0" y="0"/>
+          <a:chExt cx="0" cy="0"/>
+        </a:xfrm>
+      </p:grpSpPr>
+      <p:sp>
+        <p:nvSpPr>
           <p:cNvPr id="2" name="Titel 1">
             <a:extLst>
               <a:ext uri="{FF2B5EF4-FFF2-40B4-BE49-F238E27FC236}">
@@ -4295,7 +4489,7 @@
 </p:sld>
 </file>
 
-<file path=ppt/slides/slide11.xml><?xml version="1.0" encoding="utf-8"?>
+<file path=ppt/slides/slide12.xml><?xml version="1.0" encoding="utf-8"?>
 <p:sld xmlns:a="http://schemas.openxmlformats.org/drawingml/2006/main" xmlns:r="http://schemas.openxmlformats.org/officeDocument/2006/relationships" xmlns:p="http://schemas.openxmlformats.org/presentationml/2006/main">
   <p:cSld>
     <p:spTree>
@@ -4397,7 +4591,7 @@
 </p:sld>
 </file>
 
-<file path=ppt/slides/slide12.xml><?xml version="1.0" encoding="utf-8"?>
+<file path=ppt/slides/slide13.xml><?xml version="1.0" encoding="utf-8"?>
 <p:sld xmlns:a="http://schemas.openxmlformats.org/drawingml/2006/main" xmlns:r="http://schemas.openxmlformats.org/officeDocument/2006/relationships" xmlns:p="http://schemas.openxmlformats.org/presentationml/2006/main">
   <p:cSld>
     <p:spTree>
@@ -4702,7 +4896,7 @@
 </p:sld>
 </file>
 
-<file path=ppt/slides/slide13.xml><?xml version="1.0" encoding="utf-8"?>
+<file path=ppt/slides/slide14.xml><?xml version="1.0" encoding="utf-8"?>
 <p:sld xmlns:a="http://schemas.openxmlformats.org/drawingml/2006/main" xmlns:r="http://schemas.openxmlformats.org/officeDocument/2006/relationships" xmlns:p="http://schemas.openxmlformats.org/presentationml/2006/main">
   <p:cSld>
     <p:spTree>
@@ -5105,7 +5299,13 @@
   <p:cSld>
     <p:spTree>
       <p:nvGrpSpPr>
-        <p:cNvPr id="1" name=""/>
+        <p:cNvPr id="1" name="">
+          <a:extLst>
+            <a:ext uri="{FF2B5EF4-FFF2-40B4-BE49-F238E27FC236}">
+              <a16:creationId xmlns:a16="http://schemas.microsoft.com/office/drawing/2014/main" id="{6E4BD715-3676-935E-38EB-BD2C743112A2}"/>
+            </a:ext>
+          </a:extLst>
+        </p:cNvPr>
         <p:cNvGrpSpPr/>
         <p:nvPr/>
       </p:nvGrpSpPr>
@@ -5122,7 +5322,7 @@
           <p:cNvPr id="2" name="Titel 1">
             <a:extLst>
               <a:ext uri="{FF2B5EF4-FFF2-40B4-BE49-F238E27FC236}">
-                <a16:creationId xmlns:a16="http://schemas.microsoft.com/office/drawing/2014/main" id="{2847A2DD-B513-9CAE-097B-46D56B639D2B}"/>
+                <a16:creationId xmlns:a16="http://schemas.microsoft.com/office/drawing/2014/main" id="{E2831E0B-A35D-6CE2-1C12-0FA63ECD3FF9}"/>
               </a:ext>
             </a:extLst>
           </p:cNvPr>
@@ -5140,40 +5340,87 @@
           <a:p>
             <a:r>
               <a:rPr lang="de-DE" dirty="0"/>
-              <a:t>Relationales Schema</a:t>
-            </a:r>
-          </a:p>
-        </p:txBody>
-      </p:sp>
-      <p:sp>
-        <p:nvSpPr>
-          <p:cNvPr id="3" name="Inhaltsplatzhalter 2">
-            <a:extLst>
-              <a:ext uri="{FF2B5EF4-FFF2-40B4-BE49-F238E27FC236}">
-                <a16:creationId xmlns:a16="http://schemas.microsoft.com/office/drawing/2014/main" id="{637DD96A-1D7C-AE1B-9BBA-C416AC28B2AF}"/>
-              </a:ext>
-            </a:extLst>
-          </p:cNvPr>
-          <p:cNvSpPr>
-            <a:spLocks noGrp="1"/>
-          </p:cNvSpPr>
+              <a:t>ER-Modell</a:t>
+            </a:r>
+          </a:p>
+        </p:txBody>
+      </p:sp>
+      <p:pic>
+        <p:nvPicPr>
+          <p:cNvPr id="5" name="Inhaltsplatzhalter 4">
+            <a:extLst>
+              <a:ext uri="{FF2B5EF4-FFF2-40B4-BE49-F238E27FC236}">
+                <a16:creationId xmlns:a16="http://schemas.microsoft.com/office/drawing/2014/main" id="{65546AFA-8C5C-113E-4730-2C14968D07F3}"/>
+              </a:ext>
+            </a:extLst>
+          </p:cNvPr>
+          <p:cNvPicPr>
+            <a:picLocks noGrp="1" noChangeAspect="1"/>
+          </p:cNvPicPr>
           <p:nvPr>
             <p:ph idx="1"/>
           </p:nvPr>
-        </p:nvSpPr>
-        <p:spPr/>
-        <p:txBody>
-          <a:bodyPr/>
-          <a:lstStyle/>
-          <a:p>
-            <a:endParaRPr lang="de-DE"/>
+        </p:nvPicPr>
+        <p:blipFill>
+          <a:blip r:embed="rId3">
+            <a:extLst>
+              <a:ext uri="{28A0092B-C50C-407E-A947-70E740481C1C}">
+                <a14:useLocalDpi xmlns:a14="http://schemas.microsoft.com/office/drawing/2010/main" val="0"/>
+              </a:ext>
+            </a:extLst>
+          </a:blip>
+          <a:srcRect/>
+          <a:stretch/>
+        </p:blipFill>
+        <p:spPr>
+          <a:xfrm>
+            <a:off x="3493971" y="28692"/>
+            <a:ext cx="8698029" cy="6767165"/>
+          </a:xfrm>
+          <a:prstGeom prst="rect">
+            <a:avLst/>
+          </a:prstGeom>
+        </p:spPr>
+      </p:pic>
+      <p:sp>
+        <p:nvSpPr>
+          <p:cNvPr id="3" name="Textfeld 2">
+            <a:extLst>
+              <a:ext uri="{FF2B5EF4-FFF2-40B4-BE49-F238E27FC236}">
+                <a16:creationId xmlns:a16="http://schemas.microsoft.com/office/drawing/2014/main" id="{53AB9A28-53A6-C7A7-B0BB-770F490B08B3}"/>
+              </a:ext>
+            </a:extLst>
+          </p:cNvPr>
+          <p:cNvSpPr txBox="1"/>
+          <p:nvPr/>
+        </p:nvSpPr>
+        <p:spPr>
+          <a:xfrm>
+            <a:off x="838200" y="1657789"/>
+            <a:ext cx="2609497" cy="369332"/>
+          </a:xfrm>
+          <a:prstGeom prst="rect">
+            <a:avLst/>
+          </a:prstGeom>
+          <a:noFill/>
+        </p:spPr>
+        <p:txBody>
+          <a:bodyPr wrap="none" rtlCol="0">
+            <a:spAutoFit/>
+          </a:bodyPr>
+          <a:lstStyle/>
+          <a:p>
+            <a:r>
+              <a:rPr lang="de-DE" dirty="0"/>
+              <a:t>Mit Datenquellsystemen</a:t>
+            </a:r>
           </a:p>
         </p:txBody>
       </p:sp>
     </p:spTree>
     <p:extLst>
       <p:ext uri="{BB962C8B-B14F-4D97-AF65-F5344CB8AC3E}">
-        <p14:creationId xmlns:p14="http://schemas.microsoft.com/office/powerpoint/2010/main" val="3813430610"/>
+        <p14:creationId xmlns:p14="http://schemas.microsoft.com/office/powerpoint/2010/main" val="4280927225"/>
       </p:ext>
     </p:extLst>
   </p:cSld>
@@ -5205,7 +5452,7 @@
           <p:cNvPr id="2" name="Titel 1">
             <a:extLst>
               <a:ext uri="{FF2B5EF4-FFF2-40B4-BE49-F238E27FC236}">
-                <a16:creationId xmlns:a16="http://schemas.microsoft.com/office/drawing/2014/main" id="{C03FD591-FEFE-C790-E324-95CC3715A429}"/>
+                <a16:creationId xmlns:a16="http://schemas.microsoft.com/office/drawing/2014/main" id="{2847A2DD-B513-9CAE-097B-46D56B639D2B}"/>
               </a:ext>
             </a:extLst>
           </p:cNvPr>
@@ -5223,7 +5470,7 @@
           <a:p>
             <a:r>
               <a:rPr lang="de-DE" dirty="0"/>
-              <a:t>Normalform-Überprüfung</a:t>
+              <a:t>Relationales Schema</a:t>
             </a:r>
           </a:p>
         </p:txBody>
@@ -5233,7 +5480,7 @@
           <p:cNvPr id="3" name="Inhaltsplatzhalter 2">
             <a:extLst>
               <a:ext uri="{FF2B5EF4-FFF2-40B4-BE49-F238E27FC236}">
-                <a16:creationId xmlns:a16="http://schemas.microsoft.com/office/drawing/2014/main" id="{5967946A-B62B-A3C9-3EA7-AD8272504AA7}"/>
+                <a16:creationId xmlns:a16="http://schemas.microsoft.com/office/drawing/2014/main" id="{637DD96A-1D7C-AE1B-9BBA-C416AC28B2AF}"/>
               </a:ext>
             </a:extLst>
           </p:cNvPr>
@@ -5256,7 +5503,7 @@
     </p:spTree>
     <p:extLst>
       <p:ext uri="{BB962C8B-B14F-4D97-AF65-F5344CB8AC3E}">
-        <p14:creationId xmlns:p14="http://schemas.microsoft.com/office/powerpoint/2010/main" val="1059657918"/>
+        <p14:creationId xmlns:p14="http://schemas.microsoft.com/office/powerpoint/2010/main" val="3813430610"/>
       </p:ext>
     </p:extLst>
   </p:cSld>
@@ -5288,7 +5535,7 @@
           <p:cNvPr id="2" name="Titel 1">
             <a:extLst>
               <a:ext uri="{FF2B5EF4-FFF2-40B4-BE49-F238E27FC236}">
-                <a16:creationId xmlns:a16="http://schemas.microsoft.com/office/drawing/2014/main" id="{50205810-A1A2-AAB5-2E5A-B46F5FB3BEE9}"/>
+                <a16:creationId xmlns:a16="http://schemas.microsoft.com/office/drawing/2014/main" id="{C03FD591-FEFE-C790-E324-95CC3715A429}"/>
               </a:ext>
             </a:extLst>
           </p:cNvPr>
@@ -5306,7 +5553,7 @@
           <a:p>
             <a:r>
               <a:rPr lang="de-DE" dirty="0"/>
-              <a:t>Speicherplatzberechnung</a:t>
+              <a:t>Normalform-Überprüfung</a:t>
             </a:r>
           </a:p>
         </p:txBody>
@@ -5316,7 +5563,7 @@
           <p:cNvPr id="3" name="Inhaltsplatzhalter 2">
             <a:extLst>
               <a:ext uri="{FF2B5EF4-FFF2-40B4-BE49-F238E27FC236}">
-                <a16:creationId xmlns:a16="http://schemas.microsoft.com/office/drawing/2014/main" id="{AB6C21D1-2921-2860-E730-7DB0FD765F5E}"/>
+                <a16:creationId xmlns:a16="http://schemas.microsoft.com/office/drawing/2014/main" id="{5967946A-B62B-A3C9-3EA7-AD8272504AA7}"/>
               </a:ext>
             </a:extLst>
           </p:cNvPr>
@@ -5339,7 +5586,7 @@
     </p:spTree>
     <p:extLst>
       <p:ext uri="{BB962C8B-B14F-4D97-AF65-F5344CB8AC3E}">
-        <p14:creationId xmlns:p14="http://schemas.microsoft.com/office/powerpoint/2010/main" val="86204701"/>
+        <p14:creationId xmlns:p14="http://schemas.microsoft.com/office/powerpoint/2010/main" val="1059657918"/>
       </p:ext>
     </p:extLst>
   </p:cSld>
@@ -5368,10 +5615,10 @@
       </p:grpSpPr>
       <p:sp>
         <p:nvSpPr>
-          <p:cNvPr id="4" name="Titel 3">
-            <a:extLst>
-              <a:ext uri="{FF2B5EF4-FFF2-40B4-BE49-F238E27FC236}">
-                <a16:creationId xmlns:a16="http://schemas.microsoft.com/office/drawing/2014/main" id="{D8BBB4D9-AB0A-37B6-B9D7-67AEE8951BA2}"/>
+          <p:cNvPr id="2" name="Titel 1">
+            <a:extLst>
+              <a:ext uri="{FF2B5EF4-FFF2-40B4-BE49-F238E27FC236}">
+                <a16:creationId xmlns:a16="http://schemas.microsoft.com/office/drawing/2014/main" id="{50205810-A1A2-AAB5-2E5A-B46F5FB3BEE9}"/>
               </a:ext>
             </a:extLst>
           </p:cNvPr>
@@ -5389,25 +5636,25 @@
           <a:p>
             <a:r>
               <a:rPr lang="de-DE" dirty="0"/>
-              <a:t>Data Warehouse</a:t>
-            </a:r>
-          </a:p>
-        </p:txBody>
-      </p:sp>
-      <p:sp>
-        <p:nvSpPr>
-          <p:cNvPr id="5" name="Textplatzhalter 4">
-            <a:extLst>
-              <a:ext uri="{FF2B5EF4-FFF2-40B4-BE49-F238E27FC236}">
-                <a16:creationId xmlns:a16="http://schemas.microsoft.com/office/drawing/2014/main" id="{DDD8E57D-6B19-DF39-2489-BEAA298E6F36}"/>
-              </a:ext>
-            </a:extLst>
-          </p:cNvPr>
-          <p:cNvSpPr>
-            <a:spLocks noGrp="1"/>
-          </p:cNvSpPr>
-          <p:nvPr>
-            <p:ph type="body" idx="1"/>
+              <a:t>Speicherplatzberechnung</a:t>
+            </a:r>
+          </a:p>
+        </p:txBody>
+      </p:sp>
+      <p:sp>
+        <p:nvSpPr>
+          <p:cNvPr id="3" name="Inhaltsplatzhalter 2">
+            <a:extLst>
+              <a:ext uri="{FF2B5EF4-FFF2-40B4-BE49-F238E27FC236}">
+                <a16:creationId xmlns:a16="http://schemas.microsoft.com/office/drawing/2014/main" id="{AB6C21D1-2921-2860-E730-7DB0FD765F5E}"/>
+              </a:ext>
+            </a:extLst>
+          </p:cNvPr>
+          <p:cNvSpPr>
+            <a:spLocks noGrp="1"/>
+          </p:cNvSpPr>
+          <p:nvPr>
+            <p:ph idx="1"/>
           </p:nvPr>
         </p:nvSpPr>
         <p:spPr/>
@@ -5422,7 +5669,7 @@
     </p:spTree>
     <p:extLst>
       <p:ext uri="{BB962C8B-B14F-4D97-AF65-F5344CB8AC3E}">
-        <p14:creationId xmlns:p14="http://schemas.microsoft.com/office/powerpoint/2010/main" val="2824883227"/>
+        <p14:creationId xmlns:p14="http://schemas.microsoft.com/office/powerpoint/2010/main" val="86204701"/>
       </p:ext>
     </p:extLst>
   </p:cSld>
@@ -5454,7 +5701,7 @@
           <p:cNvPr id="4" name="Titel 3">
             <a:extLst>
               <a:ext uri="{FF2B5EF4-FFF2-40B4-BE49-F238E27FC236}">
-                <a16:creationId xmlns:a16="http://schemas.microsoft.com/office/drawing/2014/main" id="{7FBC5EB2-8E38-A6FF-3747-7C0FBA075449}"/>
+                <a16:creationId xmlns:a16="http://schemas.microsoft.com/office/drawing/2014/main" id="{D8BBB4D9-AB0A-37B6-B9D7-67AEE8951BA2}"/>
               </a:ext>
             </a:extLst>
           </p:cNvPr>
@@ -5472,114 +5719,40 @@
           <a:p>
             <a:r>
               <a:rPr lang="de-DE" dirty="0"/>
-              <a:t>DWH-Fragen</a:t>
-            </a:r>
-          </a:p>
-        </p:txBody>
-      </p:sp>
-      <p:sp>
-        <p:nvSpPr>
-          <p:cNvPr id="5" name="Inhaltsplatzhalter 4">
-            <a:extLst>
-              <a:ext uri="{FF2B5EF4-FFF2-40B4-BE49-F238E27FC236}">
-                <a16:creationId xmlns:a16="http://schemas.microsoft.com/office/drawing/2014/main" id="{CE1C7ED1-A131-55DE-7840-35E53E3E2D37}"/>
-              </a:ext>
-            </a:extLst>
-          </p:cNvPr>
-          <p:cNvSpPr>
-            <a:spLocks noGrp="1"/>
-          </p:cNvSpPr>
-          <p:nvPr>
-            <p:ph idx="1"/>
-          </p:nvPr>
-        </p:nvSpPr>
-        <p:spPr/>
-        <p:txBody>
-          <a:bodyPr>
-            <a:normAutofit fontScale="92500" lnSpcReduction="10000"/>
-          </a:bodyPr>
-          <a:lstStyle/>
-          <a:p>
-            <a:pPr marL="514350" lvl="0" indent="-514350">
-              <a:buFont typeface="+mj-lt"/>
-              <a:buAutoNum type="arabicPeriod"/>
-            </a:pPr>
-            <a:r>
-              <a:rPr lang="de-DE" dirty="0"/>
-              <a:t>Welche Filialen haben den größten/kleinsten Umsatz? </a:t>
-            </a:r>
-            <a:r>
-              <a:rPr lang="de-DE" i="1" dirty="0"/>
-              <a:t>(Verkäufe/Stunde, Kategorisierung der Filialen)</a:t>
-            </a:r>
-            <a:endParaRPr lang="de-DE" dirty="0"/>
-          </a:p>
-          <a:p>
-            <a:pPr marL="514350" lvl="0" indent="-514350">
-              <a:buFont typeface="+mj-lt"/>
-              <a:buAutoNum type="arabicPeriod"/>
-            </a:pPr>
-            <a:r>
-              <a:rPr lang="de-DE" dirty="0"/>
-              <a:t>Welche Produkte haben die größte/kleinste Marge? </a:t>
-            </a:r>
-            <a:r>
-              <a:rPr lang="de-DE" i="1" dirty="0"/>
-              <a:t>(Produktpreis, Kosten der Zutaten, Energieverbrauch, Herstellungsdauer)</a:t>
-            </a:r>
-            <a:endParaRPr lang="de-DE" dirty="0"/>
-          </a:p>
-          <a:p>
-            <a:pPr marL="514350" lvl="0" indent="-514350">
-              <a:buFont typeface="+mj-lt"/>
-              <a:buAutoNum type="arabicPeriod"/>
-            </a:pPr>
-            <a:r>
-              <a:rPr lang="de-DE" dirty="0"/>
-              <a:t>Welche Produkte haben in der Herstellung den größten/kleinsten Energieverbrauch? </a:t>
-            </a:r>
-            <a:r>
-              <a:rPr lang="de-DE" i="1" dirty="0"/>
-              <a:t>(Backdauer, Kühlung der Zutaten)</a:t>
-            </a:r>
-            <a:endParaRPr lang="de-DE" dirty="0"/>
-          </a:p>
-          <a:p>
-            <a:pPr marL="514350" lvl="0" indent="-514350">
-              <a:buFont typeface="+mj-lt"/>
-              <a:buAutoNum type="arabicPeriod"/>
-            </a:pPr>
-            <a:r>
-              <a:rPr lang="de-DE" dirty="0"/>
-              <a:t>Zu welchen Tageszeiten wird welche Produktkategorie an welchem Standort am meisten gekauft? (Verkäufe)</a:t>
-            </a:r>
-          </a:p>
-          <a:p>
-            <a:pPr marL="514350" lvl="0" indent="-514350">
-              <a:buFont typeface="+mj-lt"/>
-              <a:buAutoNum type="arabicPeriod"/>
-            </a:pPr>
-            <a:r>
-              <a:rPr lang="de-DE" dirty="0"/>
-              <a:t>Welche Produkte werden am meisten/am wenigsten verkauft?</a:t>
-            </a:r>
-          </a:p>
-          <a:p>
-            <a:pPr marL="514350" indent="-514350">
-              <a:buFont typeface="+mj-lt"/>
-              <a:buAutoNum type="arabicPeriod"/>
-            </a:pPr>
-            <a:r>
-              <a:rPr lang="de-DE" dirty="0"/>
-              <a:t>Welcher Verkäufer hat den größten durchschnittlichen Umsatz pro Verkauf?</a:t>
-            </a:r>
+              <a:t>Data Warehouse</a:t>
+            </a:r>
+          </a:p>
+        </p:txBody>
+      </p:sp>
+      <p:sp>
+        <p:nvSpPr>
+          <p:cNvPr id="5" name="Textplatzhalter 4">
+            <a:extLst>
+              <a:ext uri="{FF2B5EF4-FFF2-40B4-BE49-F238E27FC236}">
+                <a16:creationId xmlns:a16="http://schemas.microsoft.com/office/drawing/2014/main" id="{DDD8E57D-6B19-DF39-2489-BEAA298E6F36}"/>
+              </a:ext>
+            </a:extLst>
+          </p:cNvPr>
+          <p:cNvSpPr>
+            <a:spLocks noGrp="1"/>
+          </p:cNvSpPr>
+          <p:nvPr>
+            <p:ph type="body" idx="1"/>
+          </p:nvPr>
+        </p:nvSpPr>
+        <p:spPr/>
+        <p:txBody>
+          <a:bodyPr/>
+          <a:lstStyle/>
+          <a:p>
+            <a:endParaRPr lang="de-DE"/>
           </a:p>
         </p:txBody>
       </p:sp>
     </p:spTree>
     <p:extLst>
       <p:ext uri="{BB962C8B-B14F-4D97-AF65-F5344CB8AC3E}">
-        <p14:creationId xmlns:p14="http://schemas.microsoft.com/office/powerpoint/2010/main" val="237497836"/>
+        <p14:creationId xmlns:p14="http://schemas.microsoft.com/office/powerpoint/2010/main" val="2824883227"/>
       </p:ext>
     </p:extLst>
   </p:cSld>

--- a/Präsentation/Präsentation.pptx
+++ b/Präsentation/Präsentation.pptx
@@ -5,7 +5,7 @@
     <p:sldMasterId id="2147483648" r:id="rId1"/>
   </p:sldMasterIdLst>
   <p:notesMasterIdLst>
-    <p:notesMasterId r:id="rId16"/>
+    <p:notesMasterId r:id="rId14"/>
   </p:notesMasterIdLst>
   <p:sldIdLst>
     <p:sldId id="256" r:id="rId2"/>
@@ -13,15 +13,13 @@
     <p:sldId id="263" r:id="rId4"/>
     <p:sldId id="258" r:id="rId5"/>
     <p:sldId id="269" r:id="rId6"/>
-    <p:sldId id="259" r:id="rId7"/>
-    <p:sldId id="260" r:id="rId8"/>
-    <p:sldId id="261" r:id="rId9"/>
-    <p:sldId id="262" r:id="rId10"/>
-    <p:sldId id="264" r:id="rId11"/>
-    <p:sldId id="265" r:id="rId12"/>
-    <p:sldId id="266" r:id="rId13"/>
-    <p:sldId id="267" r:id="rId14"/>
-    <p:sldId id="268" r:id="rId15"/>
+    <p:sldId id="262" r:id="rId7"/>
+    <p:sldId id="264" r:id="rId8"/>
+    <p:sldId id="265" r:id="rId9"/>
+    <p:sldId id="266" r:id="rId10"/>
+    <p:sldId id="267" r:id="rId11"/>
+    <p:sldId id="268" r:id="rId12"/>
+    <p:sldId id="270" r:id="rId13"/>
   </p:sldIdLst>
   <p:sldSz cx="12192000" cy="6858000"/>
   <p:notesSz cx="6858000" cy="9144000"/>
@@ -734,7 +732,7 @@
           <a:p>
             <a:fld id="{F9573A14-2FD9-4F88-9CDD-7A01E9A13A5F}" type="slidenum">
               <a:rPr lang="de-DE" smtClean="0"/>
-              <a:t>11</a:t>
+              <a:t>8</a:t>
             </a:fld>
             <a:endParaRPr lang="de-DE"/>
           </a:p>
@@ -818,7 +816,7 @@
           <a:p>
             <a:fld id="{F9573A14-2FD9-4F88-9CDD-7A01E9A13A5F}" type="slidenum">
               <a:rPr lang="de-DE" smtClean="0"/>
-              <a:t>12</a:t>
+              <a:t>9</a:t>
             </a:fld>
             <a:endParaRPr lang="de-DE"/>
           </a:p>
@@ -902,7 +900,7 @@
           <a:p>
             <a:fld id="{F9573A14-2FD9-4F88-9CDD-7A01E9A13A5F}" type="slidenum">
               <a:rPr lang="de-DE" smtClean="0"/>
-              <a:t>13</a:t>
+              <a:t>10</a:t>
             </a:fld>
             <a:endParaRPr lang="de-DE"/>
           </a:p>
@@ -4240,7 +4238,13 @@
   <p:cSld>
     <p:spTree>
       <p:nvGrpSpPr>
-        <p:cNvPr id="1" name=""/>
+        <p:cNvPr id="1" name="">
+          <a:extLst>
+            <a:ext uri="{FF2B5EF4-FFF2-40B4-BE49-F238E27FC236}">
+              <a16:creationId xmlns:a16="http://schemas.microsoft.com/office/drawing/2014/main" id="{B0A518B4-6F6D-629A-78BB-C72612DF9CCA}"/>
+            </a:ext>
+          </a:extLst>
+        </p:cNvPr>
         <p:cNvGrpSpPr/>
         <p:nvPr/>
       </p:nvGrpSpPr>
@@ -4254,10 +4258,10 @@
       </p:grpSpPr>
       <p:sp>
         <p:nvSpPr>
-          <p:cNvPr id="4" name="Titel 3">
-            <a:extLst>
-              <a:ext uri="{FF2B5EF4-FFF2-40B4-BE49-F238E27FC236}">
-                <a16:creationId xmlns:a16="http://schemas.microsoft.com/office/drawing/2014/main" id="{7FBC5EB2-8E38-A6FF-3747-7C0FBA075449}"/>
+          <p:cNvPr id="2" name="Titel 1">
+            <a:extLst>
+              <a:ext uri="{FF2B5EF4-FFF2-40B4-BE49-F238E27FC236}">
+                <a16:creationId xmlns:a16="http://schemas.microsoft.com/office/drawing/2014/main" id="{381B224B-06D3-B13F-1F18-6E1D0094E5FF}"/>
               </a:ext>
             </a:extLst>
           </p:cNvPr>
@@ -4275,106 +4279,248 @@
           <a:p>
             <a:r>
               <a:rPr lang="de-DE" dirty="0"/>
-              <a:t>DWH-Fragen</a:t>
-            </a:r>
-          </a:p>
-        </p:txBody>
-      </p:sp>
-      <p:sp>
-        <p:nvSpPr>
-          <p:cNvPr id="5" name="Inhaltsplatzhalter 4">
-            <a:extLst>
-              <a:ext uri="{FF2B5EF4-FFF2-40B4-BE49-F238E27FC236}">
-                <a16:creationId xmlns:a16="http://schemas.microsoft.com/office/drawing/2014/main" id="{CE1C7ED1-A131-55DE-7840-35E53E3E2D37}"/>
-              </a:ext>
-            </a:extLst>
-          </p:cNvPr>
-          <p:cNvSpPr>
-            <a:spLocks noGrp="1"/>
-          </p:cNvSpPr>
-          <p:nvPr>
-            <p:ph idx="1"/>
-          </p:nvPr>
-        </p:nvSpPr>
-        <p:spPr/>
-        <p:txBody>
-          <a:bodyPr>
-            <a:normAutofit fontScale="92500" lnSpcReduction="10000"/>
+              <a:t>Logisches Modell</a:t>
+            </a:r>
+            <a:br>
+              <a:rPr lang="de-DE" dirty="0"/>
+            </a:br>
+            <a:r>
+              <a:rPr lang="de-DE" dirty="0"/>
+              <a:t>Galaxy Schema</a:t>
+            </a:r>
+          </a:p>
+        </p:txBody>
+      </p:sp>
+      <p:sp>
+        <p:nvSpPr>
+          <p:cNvPr id="3" name="Textfeld 2">
+            <a:extLst>
+              <a:ext uri="{FF2B5EF4-FFF2-40B4-BE49-F238E27FC236}">
+                <a16:creationId xmlns:a16="http://schemas.microsoft.com/office/drawing/2014/main" id="{91E45CDD-F47D-7F96-C9A6-A43E20426182}"/>
+              </a:ext>
+            </a:extLst>
+          </p:cNvPr>
+          <p:cNvSpPr txBox="1"/>
+          <p:nvPr/>
+        </p:nvSpPr>
+        <p:spPr>
+          <a:xfrm>
+            <a:off x="353969" y="1898140"/>
+            <a:ext cx="1685077" cy="523220"/>
+          </a:xfrm>
+          <a:prstGeom prst="rect">
+            <a:avLst/>
+          </a:prstGeom>
+          <a:noFill/>
+        </p:spPr>
+        <p:txBody>
+          <a:bodyPr wrap="none" rtlCol="0">
+            <a:spAutoFit/>
           </a:bodyPr>
           <a:lstStyle/>
           <a:p>
-            <a:pPr marL="514350" lvl="0" indent="-514350">
-              <a:buFont typeface="+mj-lt"/>
-              <a:buAutoNum type="arabicPeriod"/>
-            </a:pPr>
-            <a:r>
-              <a:rPr lang="de-DE" dirty="0"/>
-              <a:t>Welche Filialen haben den größten/kleinsten Umsatz? </a:t>
-            </a:r>
-            <a:r>
-              <a:rPr lang="de-DE" i="1" dirty="0"/>
-              <a:t>(Verkäufe/Stunde, Kategorisierung der Filialen)</a:t>
-            </a:r>
-            <a:endParaRPr lang="de-DE" dirty="0"/>
-          </a:p>
-          <a:p>
-            <a:pPr marL="514350" lvl="0" indent="-514350">
-              <a:buFont typeface="+mj-lt"/>
-              <a:buAutoNum type="arabicPeriod"/>
-            </a:pPr>
-            <a:r>
-              <a:rPr lang="de-DE" dirty="0"/>
-              <a:t>Welche Produkte haben die größte/kleinste Marge? </a:t>
-            </a:r>
-            <a:r>
-              <a:rPr lang="de-DE" i="1" dirty="0"/>
-              <a:t>(Produktpreis, Kosten der Zutaten, Energieverbrauch, Herstellungsdauer)</a:t>
-            </a:r>
-            <a:endParaRPr lang="de-DE" dirty="0"/>
-          </a:p>
-          <a:p>
-            <a:pPr marL="514350" lvl="0" indent="-514350">
-              <a:buFont typeface="+mj-lt"/>
-              <a:buAutoNum type="arabicPeriod"/>
-            </a:pPr>
-            <a:r>
-              <a:rPr lang="de-DE" dirty="0"/>
-              <a:t>Welche Produkte haben in der Herstellung den größten/kleinsten Energieverbrauch? </a:t>
-            </a:r>
-            <a:r>
-              <a:rPr lang="de-DE" i="1" dirty="0"/>
-              <a:t>(Backdauer, Kühlung der Zutaten)</a:t>
-            </a:r>
-            <a:endParaRPr lang="de-DE" dirty="0"/>
-          </a:p>
-          <a:p>
-            <a:pPr marL="514350" lvl="0" indent="-514350">
-              <a:buFont typeface="+mj-lt"/>
-              <a:buAutoNum type="arabicPeriod"/>
-            </a:pPr>
-            <a:r>
-              <a:rPr lang="de-DE" dirty="0"/>
-              <a:t>Zu welchen Tageszeiten wird welche Produktkategorie an welchem Standort am meisten gekauft? (Verkäufe)</a:t>
-            </a:r>
-          </a:p>
-          <a:p>
-            <a:pPr marL="514350" lvl="0" indent="-514350">
-              <a:buFont typeface="+mj-lt"/>
-              <a:buAutoNum type="arabicPeriod"/>
-            </a:pPr>
-            <a:r>
-              <a:rPr lang="de-DE" dirty="0"/>
-              <a:t>Welche Produkte werden am meisten/am wenigsten verkauft?</a:t>
-            </a:r>
-          </a:p>
-          <a:p>
-            <a:pPr marL="514350" indent="-514350">
-              <a:buFont typeface="+mj-lt"/>
-              <a:buAutoNum type="arabicPeriod"/>
-            </a:pPr>
-            <a:r>
-              <a:rPr lang="de-DE" dirty="0"/>
-              <a:t>Welcher Verkäufer hat den größten durchschnittlichen Umsatz pro Verkauf?</a:t>
+            <a:r>
+              <a:rPr lang="de-DE" sz="2800" b="1" dirty="0"/>
+              <a:t>Mit SCDs</a:t>
+            </a:r>
+          </a:p>
+        </p:txBody>
+      </p:sp>
+      <p:pic>
+        <p:nvPicPr>
+          <p:cNvPr id="6" name="Grafik 5">
+            <a:extLst>
+              <a:ext uri="{FF2B5EF4-FFF2-40B4-BE49-F238E27FC236}">
+                <a16:creationId xmlns:a16="http://schemas.microsoft.com/office/drawing/2014/main" id="{0F138F20-0FD1-EAF0-ECB1-C944E3841B38}"/>
+              </a:ext>
+            </a:extLst>
+          </p:cNvPr>
+          <p:cNvPicPr>
+            <a:picLocks noChangeAspect="1"/>
+          </p:cNvPicPr>
+          <p:nvPr/>
+        </p:nvPicPr>
+        <p:blipFill>
+          <a:blip r:embed="rId3">
+            <a:extLst>
+              <a:ext uri="{28A0092B-C50C-407E-A947-70E740481C1C}">
+                <a14:useLocalDpi xmlns:a14="http://schemas.microsoft.com/office/drawing/2010/main" val="0"/>
+              </a:ext>
+            </a:extLst>
+          </a:blip>
+          <a:srcRect/>
+          <a:stretch/>
+        </p:blipFill>
+        <p:spPr>
+          <a:xfrm>
+            <a:off x="5641957" y="0"/>
+            <a:ext cx="4623435" cy="6858000"/>
+          </a:xfrm>
+          <a:prstGeom prst="rect">
+            <a:avLst/>
+          </a:prstGeom>
+        </p:spPr>
+      </p:pic>
+      <p:sp>
+        <p:nvSpPr>
+          <p:cNvPr id="9" name="Textfeld 8">
+            <a:extLst>
+              <a:ext uri="{FF2B5EF4-FFF2-40B4-BE49-F238E27FC236}">
+                <a16:creationId xmlns:a16="http://schemas.microsoft.com/office/drawing/2014/main" id="{7F4D9F21-EE0C-77EE-09C3-536CCB745FD0}"/>
+              </a:ext>
+            </a:extLst>
+          </p:cNvPr>
+          <p:cNvSpPr txBox="1"/>
+          <p:nvPr/>
+        </p:nvSpPr>
+        <p:spPr>
+          <a:xfrm>
+            <a:off x="239669" y="2960009"/>
+            <a:ext cx="3840026" cy="523220"/>
+          </a:xfrm>
+          <a:prstGeom prst="rect">
+            <a:avLst/>
+          </a:prstGeom>
+          <a:noFill/>
+        </p:spPr>
+        <p:txBody>
+          <a:bodyPr wrap="none" rtlCol="0">
+            <a:spAutoFit/>
+          </a:bodyPr>
+          <a:lstStyle/>
+          <a:p>
+            <a:r>
+              <a:rPr lang="de-DE" sz="1400" dirty="0"/>
+              <a:t>SCD0: Attribute werden automatisch generiert, </a:t>
+            </a:r>
+          </a:p>
+          <a:p>
+            <a:r>
+              <a:rPr lang="de-DE" sz="1400" dirty="0"/>
+              <a:t>daher keine Änderung notwendig</a:t>
+            </a:r>
+          </a:p>
+        </p:txBody>
+      </p:sp>
+      <p:sp>
+        <p:nvSpPr>
+          <p:cNvPr id="5" name="Textfeld 4">
+            <a:extLst>
+              <a:ext uri="{FF2B5EF4-FFF2-40B4-BE49-F238E27FC236}">
+                <a16:creationId xmlns:a16="http://schemas.microsoft.com/office/drawing/2014/main" id="{98AB6B8C-56F1-28E8-201C-1EA535B163C3}"/>
+              </a:ext>
+            </a:extLst>
+          </p:cNvPr>
+          <p:cNvSpPr txBox="1"/>
+          <p:nvPr/>
+        </p:nvSpPr>
+        <p:spPr>
+          <a:xfrm>
+            <a:off x="8997739" y="658574"/>
+            <a:ext cx="2900265" cy="738664"/>
+          </a:xfrm>
+          <a:prstGeom prst="rect">
+            <a:avLst/>
+          </a:prstGeom>
+          <a:noFill/>
+        </p:spPr>
+        <p:txBody>
+          <a:bodyPr wrap="square" rtlCol="0">
+            <a:spAutoFit/>
+          </a:bodyPr>
+          <a:lstStyle/>
+          <a:p>
+            <a:r>
+              <a:rPr lang="de-DE" sz="1400" dirty="0"/>
+              <a:t>SCD1: Es können Namensänderungen auftreten,</a:t>
+            </a:r>
+          </a:p>
+          <a:p>
+            <a:r>
+              <a:rPr lang="de-DE" sz="1400" dirty="0"/>
+              <a:t>Historisierung aber nicht relevant</a:t>
+            </a:r>
+          </a:p>
+        </p:txBody>
+      </p:sp>
+      <p:sp>
+        <p:nvSpPr>
+          <p:cNvPr id="8" name="Textfeld 7">
+            <a:extLst>
+              <a:ext uri="{FF2B5EF4-FFF2-40B4-BE49-F238E27FC236}">
+                <a16:creationId xmlns:a16="http://schemas.microsoft.com/office/drawing/2014/main" id="{BE82647E-DA08-904C-9686-78B17E1E2BF3}"/>
+              </a:ext>
+            </a:extLst>
+          </p:cNvPr>
+          <p:cNvSpPr txBox="1"/>
+          <p:nvPr/>
+        </p:nvSpPr>
+        <p:spPr>
+          <a:xfrm>
+            <a:off x="4820813" y="2742565"/>
+            <a:ext cx="2000611" cy="1384995"/>
+          </a:xfrm>
+          <a:prstGeom prst="rect">
+            <a:avLst/>
+          </a:prstGeom>
+          <a:noFill/>
+        </p:spPr>
+        <p:txBody>
+          <a:bodyPr wrap="square" rtlCol="0">
+            <a:spAutoFit/>
+          </a:bodyPr>
+          <a:lstStyle/>
+          <a:p>
+            <a:r>
+              <a:rPr lang="de-DE" sz="1400" dirty="0"/>
+              <a:t>SCD3: Der Filialname kann sich ändern, eher seltener Vorgang,</a:t>
+            </a:r>
+          </a:p>
+          <a:p>
+            <a:r>
+              <a:rPr lang="de-DE" sz="1400" dirty="0"/>
+              <a:t>Informationen über alten Namen trotzdem wichtig</a:t>
+            </a:r>
+          </a:p>
+        </p:txBody>
+      </p:sp>
+      <p:sp>
+        <p:nvSpPr>
+          <p:cNvPr id="11" name="Textfeld 10">
+            <a:extLst>
+              <a:ext uri="{FF2B5EF4-FFF2-40B4-BE49-F238E27FC236}">
+                <a16:creationId xmlns:a16="http://schemas.microsoft.com/office/drawing/2014/main" id="{97E9B84A-AE4B-9768-2853-76649DB47F25}"/>
+              </a:ext>
+            </a:extLst>
+          </p:cNvPr>
+          <p:cNvSpPr txBox="1"/>
+          <p:nvPr/>
+        </p:nvSpPr>
+        <p:spPr>
+          <a:xfrm>
+            <a:off x="5051249" y="5726779"/>
+            <a:ext cx="3068623" cy="954107"/>
+          </a:xfrm>
+          <a:prstGeom prst="rect">
+            <a:avLst/>
+          </a:prstGeom>
+          <a:noFill/>
+        </p:spPr>
+        <p:txBody>
+          <a:bodyPr wrap="square" rtlCol="0">
+            <a:spAutoFit/>
+          </a:bodyPr>
+          <a:lstStyle/>
+          <a:p>
+            <a:r>
+              <a:rPr lang="de-DE" sz="1400" dirty="0"/>
+              <a:t>SCD4: Produktattribute können sich aufgrund von Inflation etc. oft ändern,</a:t>
+            </a:r>
+          </a:p>
+          <a:p>
+            <a:r>
+              <a:rPr lang="de-DE" sz="1400" dirty="0"/>
+              <a:t>Historisierung ist für die Analyse sehr wichtig</a:t>
             </a:r>
           </a:p>
         </p:txBody>
@@ -4382,7 +4528,7 @@
     </p:spTree>
     <p:extLst>
       <p:ext uri="{BB962C8B-B14F-4D97-AF65-F5344CB8AC3E}">
-        <p14:creationId xmlns:p14="http://schemas.microsoft.com/office/powerpoint/2010/main" val="237497836"/>
+        <p14:creationId xmlns:p14="http://schemas.microsoft.com/office/powerpoint/2010/main" val="1190778878"/>
       </p:ext>
     </p:extLst>
   </p:cSld>
@@ -4414,7 +4560,7 @@
           <p:cNvPr id="2" name="Titel 1">
             <a:extLst>
               <a:ext uri="{FF2B5EF4-FFF2-40B4-BE49-F238E27FC236}">
-                <a16:creationId xmlns:a16="http://schemas.microsoft.com/office/drawing/2014/main" id="{325C50AD-AB12-3666-A634-324EE9A12F09}"/>
+                <a16:creationId xmlns:a16="http://schemas.microsoft.com/office/drawing/2014/main" id="{D7C2311D-E75B-2973-3E6F-0EB0FACB9F26}"/>
               </a:ext>
             </a:extLst>
           </p:cNvPr>
@@ -4431,55 +4577,261 @@
           <a:lstStyle/>
           <a:p>
             <a:r>
-              <a:rPr lang="de-DE" dirty="0" err="1"/>
-              <a:t>mER</a:t>
-            </a:r>
-            <a:endParaRPr lang="de-DE" dirty="0"/>
-          </a:p>
-        </p:txBody>
-      </p:sp>
-      <p:pic>
-        <p:nvPicPr>
-          <p:cNvPr id="5" name="Inhaltsplatzhalter 4">
-            <a:extLst>
-              <a:ext uri="{FF2B5EF4-FFF2-40B4-BE49-F238E27FC236}">
-                <a16:creationId xmlns:a16="http://schemas.microsoft.com/office/drawing/2014/main" id="{C599200D-D61C-1F8B-D3A1-5E8901654166}"/>
-              </a:ext>
-            </a:extLst>
-          </p:cNvPr>
-          <p:cNvPicPr>
-            <a:picLocks noGrp="1" noChangeAspect="1"/>
-          </p:cNvPicPr>
-          <p:nvPr>
-            <p:ph idx="1"/>
-          </p:nvPr>
-        </p:nvPicPr>
-        <p:blipFill>
-          <a:blip r:embed="rId3">
-            <a:extLst>
-              <a:ext uri="{28A0092B-C50C-407E-A947-70E740481C1C}">
-                <a14:useLocalDpi xmlns:a14="http://schemas.microsoft.com/office/drawing/2010/main" val="0"/>
-              </a:ext>
-            </a:extLst>
-          </a:blip>
-          <a:stretch>
-            <a:fillRect/>
-          </a:stretch>
-        </p:blipFill>
+              <a:rPr lang="de-DE" dirty="0"/>
+              <a:t>ETL – Schedule</a:t>
+            </a:r>
+          </a:p>
+        </p:txBody>
+      </p:sp>
+      <p:sp>
+        <p:nvSpPr>
+          <p:cNvPr id="4" name="Textfeld 3">
+            <a:extLst>
+              <a:ext uri="{FF2B5EF4-FFF2-40B4-BE49-F238E27FC236}">
+                <a16:creationId xmlns:a16="http://schemas.microsoft.com/office/drawing/2014/main" id="{C36A1A73-D613-125C-5B7B-46985C53CDA6}"/>
+              </a:ext>
+            </a:extLst>
+          </p:cNvPr>
+          <p:cNvSpPr txBox="1"/>
+          <p:nvPr/>
+        </p:nvSpPr>
         <p:spPr>
           <a:xfrm>
-            <a:off x="2617794" y="365125"/>
-            <a:ext cx="8736006" cy="5942782"/>
+            <a:off x="838200" y="1690688"/>
+            <a:ext cx="2259658" cy="369332"/>
           </a:xfrm>
           <a:prstGeom prst="rect">
             <a:avLst/>
           </a:prstGeom>
+          <a:noFill/>
         </p:spPr>
-      </p:pic>
+        <p:txBody>
+          <a:bodyPr wrap="none" rtlCol="0">
+            <a:spAutoFit/>
+          </a:bodyPr>
+          <a:lstStyle/>
+          <a:p>
+            <a:r>
+              <a:rPr lang="de-DE" u="sng" dirty="0"/>
+              <a:t>Dimension Verkäufer</a:t>
+            </a:r>
+          </a:p>
+        </p:txBody>
+      </p:sp>
+      <p:sp>
+        <p:nvSpPr>
+          <p:cNvPr id="6" name="Textfeld 5">
+            <a:extLst>
+              <a:ext uri="{FF2B5EF4-FFF2-40B4-BE49-F238E27FC236}">
+                <a16:creationId xmlns:a16="http://schemas.microsoft.com/office/drawing/2014/main" id="{17EF025E-B37F-0B25-14A6-A9D9F1278848}"/>
+              </a:ext>
+            </a:extLst>
+          </p:cNvPr>
+          <p:cNvSpPr txBox="1"/>
+          <p:nvPr/>
+        </p:nvSpPr>
+        <p:spPr>
+          <a:xfrm>
+            <a:off x="838200" y="2859858"/>
+            <a:ext cx="2944589" cy="369332"/>
+          </a:xfrm>
+          <a:prstGeom prst="rect">
+            <a:avLst/>
+          </a:prstGeom>
+          <a:noFill/>
+        </p:spPr>
+        <p:txBody>
+          <a:bodyPr wrap="none" rtlCol="0">
+            <a:spAutoFit/>
+          </a:bodyPr>
+          <a:lstStyle/>
+          <a:p>
+            <a:r>
+              <a:rPr lang="de-DE" u="sng" dirty="0"/>
+              <a:t>Dimension Verkaufsvorgang</a:t>
+            </a:r>
+          </a:p>
+        </p:txBody>
+      </p:sp>
+      <p:sp>
+        <p:nvSpPr>
+          <p:cNvPr id="8" name="Textfeld 7">
+            <a:extLst>
+              <a:ext uri="{FF2B5EF4-FFF2-40B4-BE49-F238E27FC236}">
+                <a16:creationId xmlns:a16="http://schemas.microsoft.com/office/drawing/2014/main" id="{9B3F62D3-5C4A-293E-DDC9-86D6DE180307}"/>
+              </a:ext>
+            </a:extLst>
+          </p:cNvPr>
+          <p:cNvSpPr txBox="1"/>
+          <p:nvPr/>
+        </p:nvSpPr>
+        <p:spPr>
+          <a:xfrm>
+            <a:off x="8763000" y="1506022"/>
+            <a:ext cx="1990545" cy="369332"/>
+          </a:xfrm>
+          <a:prstGeom prst="rect">
+            <a:avLst/>
+          </a:prstGeom>
+          <a:noFill/>
+        </p:spPr>
+        <p:txBody>
+          <a:bodyPr wrap="none" rtlCol="0">
+            <a:spAutoFit/>
+          </a:bodyPr>
+          <a:lstStyle/>
+          <a:p>
+            <a:r>
+              <a:rPr lang="de-DE" u="sng" dirty="0"/>
+              <a:t>Dimension Datum</a:t>
+            </a:r>
+          </a:p>
+        </p:txBody>
+      </p:sp>
+      <p:sp>
+        <p:nvSpPr>
+          <p:cNvPr id="10" name="Textfeld 9">
+            <a:extLst>
+              <a:ext uri="{FF2B5EF4-FFF2-40B4-BE49-F238E27FC236}">
+                <a16:creationId xmlns:a16="http://schemas.microsoft.com/office/drawing/2014/main" id="{D8D8EC8A-04C8-94DC-BC27-AB08E6F9504B}"/>
+              </a:ext>
+            </a:extLst>
+          </p:cNvPr>
+          <p:cNvSpPr txBox="1"/>
+          <p:nvPr/>
+        </p:nvSpPr>
+        <p:spPr>
+          <a:xfrm>
+            <a:off x="6312955" y="1069722"/>
+            <a:ext cx="1680268" cy="369332"/>
+          </a:xfrm>
+          <a:prstGeom prst="rect">
+            <a:avLst/>
+          </a:prstGeom>
+          <a:noFill/>
+        </p:spPr>
+        <p:txBody>
+          <a:bodyPr wrap="none" rtlCol="0">
+            <a:spAutoFit/>
+          </a:bodyPr>
+          <a:lstStyle/>
+          <a:p>
+            <a:r>
+              <a:rPr lang="de-DE" u="sng" dirty="0"/>
+              <a:t>Dimension Zeit</a:t>
+            </a:r>
+          </a:p>
+        </p:txBody>
+      </p:sp>
+      <p:sp>
+        <p:nvSpPr>
+          <p:cNvPr id="12" name="Textfeld 11">
+            <a:extLst>
+              <a:ext uri="{FF2B5EF4-FFF2-40B4-BE49-F238E27FC236}">
+                <a16:creationId xmlns:a16="http://schemas.microsoft.com/office/drawing/2014/main" id="{3DE37009-6E01-95A7-908C-6E3CB738357C}"/>
+              </a:ext>
+            </a:extLst>
+          </p:cNvPr>
+          <p:cNvSpPr txBox="1"/>
+          <p:nvPr/>
+        </p:nvSpPr>
+        <p:spPr>
+          <a:xfrm>
+            <a:off x="6108739" y="3244334"/>
+            <a:ext cx="1901226" cy="369332"/>
+          </a:xfrm>
+          <a:prstGeom prst="rect">
+            <a:avLst/>
+          </a:prstGeom>
+          <a:noFill/>
+        </p:spPr>
+        <p:txBody>
+          <a:bodyPr wrap="none" rtlCol="0">
+            <a:spAutoFit/>
+          </a:bodyPr>
+          <a:lstStyle/>
+          <a:p>
+            <a:r>
+              <a:rPr lang="de-DE" u="sng" dirty="0"/>
+              <a:t>Dimension Filiale</a:t>
+            </a:r>
+          </a:p>
+        </p:txBody>
+      </p:sp>
+      <p:sp>
+        <p:nvSpPr>
+          <p:cNvPr id="14" name="Textfeld 13">
+            <a:extLst>
+              <a:ext uri="{FF2B5EF4-FFF2-40B4-BE49-F238E27FC236}">
+                <a16:creationId xmlns:a16="http://schemas.microsoft.com/office/drawing/2014/main" id="{90F2C1CE-776F-E6F4-BA3D-39ABFEA8CCA9}"/>
+              </a:ext>
+            </a:extLst>
+          </p:cNvPr>
+          <p:cNvSpPr txBox="1"/>
+          <p:nvPr/>
+        </p:nvSpPr>
+        <p:spPr>
+          <a:xfrm>
+            <a:off x="1411224" y="4104299"/>
+            <a:ext cx="2085379" cy="369332"/>
+          </a:xfrm>
+          <a:prstGeom prst="rect">
+            <a:avLst/>
+          </a:prstGeom>
+          <a:noFill/>
+        </p:spPr>
+        <p:txBody>
+          <a:bodyPr wrap="none" rtlCol="0">
+            <a:spAutoFit/>
+          </a:bodyPr>
+          <a:lstStyle/>
+          <a:p>
+            <a:r>
+              <a:rPr lang="de-DE" u="sng" dirty="0"/>
+              <a:t>Dimension Produkt</a:t>
+            </a:r>
+          </a:p>
+        </p:txBody>
+      </p:sp>
+      <p:sp>
+        <p:nvSpPr>
+          <p:cNvPr id="16" name="Textfeld 15">
+            <a:extLst>
+              <a:ext uri="{FF2B5EF4-FFF2-40B4-BE49-F238E27FC236}">
+                <a16:creationId xmlns:a16="http://schemas.microsoft.com/office/drawing/2014/main" id="{8B669590-7EE9-E0EE-1719-D3F02D7D75F5}"/>
+              </a:ext>
+            </a:extLst>
+          </p:cNvPr>
+          <p:cNvSpPr txBox="1"/>
+          <p:nvPr/>
+        </p:nvSpPr>
+        <p:spPr>
+          <a:xfrm>
+            <a:off x="6169699" y="1378389"/>
+            <a:ext cx="2593301" cy="738664"/>
+          </a:xfrm>
+          <a:prstGeom prst="rect">
+            <a:avLst/>
+          </a:prstGeom>
+          <a:noFill/>
+        </p:spPr>
+        <p:txBody>
+          <a:bodyPr wrap="square" rtlCol="0">
+            <a:spAutoFit/>
+          </a:bodyPr>
+          <a:lstStyle/>
+          <a:p>
+            <a:r>
+              <a:rPr lang="de-DE" sz="1400" dirty="0"/>
+              <a:t>Wird vollständig zu Beginn angelegt und ändert sich dann nicht mehr</a:t>
+            </a:r>
+          </a:p>
+        </p:txBody>
+      </p:sp>
     </p:spTree>
     <p:extLst>
       <p:ext uri="{BB962C8B-B14F-4D97-AF65-F5344CB8AC3E}">
-        <p14:creationId xmlns:p14="http://schemas.microsoft.com/office/powerpoint/2010/main" val="427920151"/>
+        <p14:creationId xmlns:p14="http://schemas.microsoft.com/office/powerpoint/2010/main" val="4178603353"/>
       </p:ext>
     </p:extLst>
   </p:cSld>
@@ -4511,7 +4863,7 @@
           <p:cNvPr id="2" name="Titel 1">
             <a:extLst>
               <a:ext uri="{FF2B5EF4-FFF2-40B4-BE49-F238E27FC236}">
-                <a16:creationId xmlns:a16="http://schemas.microsoft.com/office/drawing/2014/main" id="{3904CDF3-4527-70B2-FABB-909DC6BA3CF1}"/>
+                <a16:creationId xmlns:a16="http://schemas.microsoft.com/office/drawing/2014/main" id="{F3530890-A338-17B9-45E2-17100BB72C32}"/>
               </a:ext>
             </a:extLst>
           </p:cNvPr>
@@ -4529,450 +4881,40 @@
           <a:p>
             <a:r>
               <a:rPr lang="de-DE" dirty="0"/>
-              <a:t>Logisches Modell</a:t>
-            </a:r>
-            <a:br>
-              <a:rPr lang="de-DE" dirty="0"/>
-            </a:br>
-            <a:r>
-              <a:rPr lang="de-DE" dirty="0"/>
-              <a:t>Galaxy Schema</a:t>
-            </a:r>
-          </a:p>
-        </p:txBody>
-      </p:sp>
-      <p:pic>
-        <p:nvPicPr>
-          <p:cNvPr id="5" name="Inhaltsplatzhalter 4">
-            <a:extLst>
-              <a:ext uri="{FF2B5EF4-FFF2-40B4-BE49-F238E27FC236}">
-                <a16:creationId xmlns:a16="http://schemas.microsoft.com/office/drawing/2014/main" id="{525D996C-32F6-0F32-53F9-94DC195EDD2E}"/>
-              </a:ext>
-            </a:extLst>
-          </p:cNvPr>
-          <p:cNvPicPr>
-            <a:picLocks noGrp="1" noChangeAspect="1"/>
-          </p:cNvPicPr>
+              <a:t>Highlights, Probleme und Ratschläge</a:t>
+            </a:r>
+          </a:p>
+        </p:txBody>
+      </p:sp>
+      <p:sp>
+        <p:nvSpPr>
+          <p:cNvPr id="3" name="Inhaltsplatzhalter 2">
+            <a:extLst>
+              <a:ext uri="{FF2B5EF4-FFF2-40B4-BE49-F238E27FC236}">
+                <a16:creationId xmlns:a16="http://schemas.microsoft.com/office/drawing/2014/main" id="{B40B26C1-8FAA-BDD3-23E1-57BAD8C574AC}"/>
+              </a:ext>
+            </a:extLst>
+          </p:cNvPr>
+          <p:cNvSpPr>
+            <a:spLocks noGrp="1"/>
+          </p:cNvSpPr>
           <p:nvPr>
             <p:ph idx="1"/>
           </p:nvPr>
-        </p:nvPicPr>
-        <p:blipFill>
-          <a:blip r:embed="rId3">
-            <a:extLst>
-              <a:ext uri="{28A0092B-C50C-407E-A947-70E740481C1C}">
-                <a14:useLocalDpi xmlns:a14="http://schemas.microsoft.com/office/drawing/2010/main" val="0"/>
-              </a:ext>
-            </a:extLst>
-          </a:blip>
-          <a:srcRect/>
-          <a:stretch/>
-        </p:blipFill>
-        <p:spPr>
-          <a:xfrm>
-            <a:off x="5155932" y="0"/>
-            <a:ext cx="5941996" cy="6727898"/>
-          </a:xfrm>
-          <a:prstGeom prst="rect">
-            <a:avLst/>
-          </a:prstGeom>
-        </p:spPr>
-      </p:pic>
+        </p:nvSpPr>
+        <p:spPr/>
+        <p:txBody>
+          <a:bodyPr/>
+          <a:lstStyle/>
+          <a:p>
+            <a:endParaRPr lang="de-DE"/>
+          </a:p>
+        </p:txBody>
+      </p:sp>
     </p:spTree>
     <p:extLst>
       <p:ext uri="{BB962C8B-B14F-4D97-AF65-F5344CB8AC3E}">
-        <p14:creationId xmlns:p14="http://schemas.microsoft.com/office/powerpoint/2010/main" val="763179585"/>
-      </p:ext>
-    </p:extLst>
-  </p:cSld>
-  <p:clrMapOvr>
-    <a:masterClrMapping/>
-  </p:clrMapOvr>
-</p:sld>
-</file>
-
-<file path=ppt/slides/slide13.xml><?xml version="1.0" encoding="utf-8"?>
-<p:sld xmlns:a="http://schemas.openxmlformats.org/drawingml/2006/main" xmlns:r="http://schemas.openxmlformats.org/officeDocument/2006/relationships" xmlns:p="http://schemas.openxmlformats.org/presentationml/2006/main">
-  <p:cSld>
-    <p:spTree>
-      <p:nvGrpSpPr>
-        <p:cNvPr id="1" name="">
-          <a:extLst>
-            <a:ext uri="{FF2B5EF4-FFF2-40B4-BE49-F238E27FC236}">
-              <a16:creationId xmlns:a16="http://schemas.microsoft.com/office/drawing/2014/main" id="{B0A518B4-6F6D-629A-78BB-C72612DF9CCA}"/>
-            </a:ext>
-          </a:extLst>
-        </p:cNvPr>
-        <p:cNvGrpSpPr/>
-        <p:nvPr/>
-      </p:nvGrpSpPr>
-      <p:grpSpPr>
-        <a:xfrm>
-          <a:off x="0" y="0"/>
-          <a:ext cx="0" cy="0"/>
-          <a:chOff x="0" y="0"/>
-          <a:chExt cx="0" cy="0"/>
-        </a:xfrm>
-      </p:grpSpPr>
-      <p:sp>
-        <p:nvSpPr>
-          <p:cNvPr id="2" name="Titel 1">
-            <a:extLst>
-              <a:ext uri="{FF2B5EF4-FFF2-40B4-BE49-F238E27FC236}">
-                <a16:creationId xmlns:a16="http://schemas.microsoft.com/office/drawing/2014/main" id="{381B224B-06D3-B13F-1F18-6E1D0094E5FF}"/>
-              </a:ext>
-            </a:extLst>
-          </p:cNvPr>
-          <p:cNvSpPr>
-            <a:spLocks noGrp="1"/>
-          </p:cNvSpPr>
-          <p:nvPr>
-            <p:ph type="title"/>
-          </p:nvPr>
-        </p:nvSpPr>
-        <p:spPr/>
-        <p:txBody>
-          <a:bodyPr/>
-          <a:lstStyle/>
-          <a:p>
-            <a:r>
-              <a:rPr lang="de-DE" dirty="0"/>
-              <a:t>Logisches Modell</a:t>
-            </a:r>
-            <a:br>
-              <a:rPr lang="de-DE" dirty="0"/>
-            </a:br>
-            <a:r>
-              <a:rPr lang="de-DE" dirty="0"/>
-              <a:t>Galaxy Schema</a:t>
-            </a:r>
-          </a:p>
-        </p:txBody>
-      </p:sp>
-      <p:sp>
-        <p:nvSpPr>
-          <p:cNvPr id="3" name="Textfeld 2">
-            <a:extLst>
-              <a:ext uri="{FF2B5EF4-FFF2-40B4-BE49-F238E27FC236}">
-                <a16:creationId xmlns:a16="http://schemas.microsoft.com/office/drawing/2014/main" id="{91E45CDD-F47D-7F96-C9A6-A43E20426182}"/>
-              </a:ext>
-            </a:extLst>
-          </p:cNvPr>
-          <p:cNvSpPr txBox="1"/>
-          <p:nvPr/>
-        </p:nvSpPr>
-        <p:spPr>
-          <a:xfrm>
-            <a:off x="353969" y="1898140"/>
-            <a:ext cx="1685077" cy="523220"/>
-          </a:xfrm>
-          <a:prstGeom prst="rect">
-            <a:avLst/>
-          </a:prstGeom>
-          <a:noFill/>
-        </p:spPr>
-        <p:txBody>
-          <a:bodyPr wrap="none" rtlCol="0">
-            <a:spAutoFit/>
-          </a:bodyPr>
-          <a:lstStyle/>
-          <a:p>
-            <a:r>
-              <a:rPr lang="de-DE" sz="2800" b="1" dirty="0"/>
-              <a:t>Mit SCDs</a:t>
-            </a:r>
-          </a:p>
-        </p:txBody>
-      </p:sp>
-      <p:pic>
-        <p:nvPicPr>
-          <p:cNvPr id="6" name="Grafik 5">
-            <a:extLst>
-              <a:ext uri="{FF2B5EF4-FFF2-40B4-BE49-F238E27FC236}">
-                <a16:creationId xmlns:a16="http://schemas.microsoft.com/office/drawing/2014/main" id="{0F138F20-0FD1-EAF0-ECB1-C944E3841B38}"/>
-              </a:ext>
-            </a:extLst>
-          </p:cNvPr>
-          <p:cNvPicPr>
-            <a:picLocks noChangeAspect="1"/>
-          </p:cNvPicPr>
-          <p:nvPr/>
-        </p:nvPicPr>
-        <p:blipFill>
-          <a:blip r:embed="rId3">
-            <a:extLst>
-              <a:ext uri="{28A0092B-C50C-407E-A947-70E740481C1C}">
-                <a14:useLocalDpi xmlns:a14="http://schemas.microsoft.com/office/drawing/2010/main" val="0"/>
-              </a:ext>
-            </a:extLst>
-          </a:blip>
-          <a:srcRect/>
-          <a:stretch/>
-        </p:blipFill>
-        <p:spPr>
-          <a:xfrm>
-            <a:off x="5641957" y="0"/>
-            <a:ext cx="4623435" cy="6858000"/>
-          </a:xfrm>
-          <a:prstGeom prst="rect">
-            <a:avLst/>
-          </a:prstGeom>
-        </p:spPr>
-      </p:pic>
-      <p:sp>
-        <p:nvSpPr>
-          <p:cNvPr id="9" name="Textfeld 8">
-            <a:extLst>
-              <a:ext uri="{FF2B5EF4-FFF2-40B4-BE49-F238E27FC236}">
-                <a16:creationId xmlns:a16="http://schemas.microsoft.com/office/drawing/2014/main" id="{7F4D9F21-EE0C-77EE-09C3-536CCB745FD0}"/>
-              </a:ext>
-            </a:extLst>
-          </p:cNvPr>
-          <p:cNvSpPr txBox="1"/>
-          <p:nvPr/>
-        </p:nvSpPr>
-        <p:spPr>
-          <a:xfrm>
-            <a:off x="239669" y="2960009"/>
-            <a:ext cx="3840026" cy="523220"/>
-          </a:xfrm>
-          <a:prstGeom prst="rect">
-            <a:avLst/>
-          </a:prstGeom>
-          <a:noFill/>
-        </p:spPr>
-        <p:txBody>
-          <a:bodyPr wrap="none" rtlCol="0">
-            <a:spAutoFit/>
-          </a:bodyPr>
-          <a:lstStyle/>
-          <a:p>
-            <a:r>
-              <a:rPr lang="de-DE" sz="1400" dirty="0"/>
-              <a:t>SCD0: Attribute werden automatisch generiert, </a:t>
-            </a:r>
-          </a:p>
-          <a:p>
-            <a:r>
-              <a:rPr lang="de-DE" sz="1400" dirty="0"/>
-              <a:t>daher keine Änderung notwendig</a:t>
-            </a:r>
-          </a:p>
-        </p:txBody>
-      </p:sp>
-      <p:sp>
-        <p:nvSpPr>
-          <p:cNvPr id="5" name="Textfeld 4">
-            <a:extLst>
-              <a:ext uri="{FF2B5EF4-FFF2-40B4-BE49-F238E27FC236}">
-                <a16:creationId xmlns:a16="http://schemas.microsoft.com/office/drawing/2014/main" id="{98AB6B8C-56F1-28E8-201C-1EA535B163C3}"/>
-              </a:ext>
-            </a:extLst>
-          </p:cNvPr>
-          <p:cNvSpPr txBox="1"/>
-          <p:nvPr/>
-        </p:nvSpPr>
-        <p:spPr>
-          <a:xfrm>
-            <a:off x="8997739" y="658574"/>
-            <a:ext cx="2900265" cy="738664"/>
-          </a:xfrm>
-          <a:prstGeom prst="rect">
-            <a:avLst/>
-          </a:prstGeom>
-          <a:noFill/>
-        </p:spPr>
-        <p:txBody>
-          <a:bodyPr wrap="square" rtlCol="0">
-            <a:spAutoFit/>
-          </a:bodyPr>
-          <a:lstStyle/>
-          <a:p>
-            <a:r>
-              <a:rPr lang="de-DE" sz="1400" dirty="0"/>
-              <a:t>SCD1: Es können Namensänderungen auftreten,</a:t>
-            </a:r>
-          </a:p>
-          <a:p>
-            <a:r>
-              <a:rPr lang="de-DE" sz="1400" dirty="0"/>
-              <a:t>Historisierung aber nicht relevant</a:t>
-            </a:r>
-          </a:p>
-        </p:txBody>
-      </p:sp>
-      <p:sp>
-        <p:nvSpPr>
-          <p:cNvPr id="8" name="Textfeld 7">
-            <a:extLst>
-              <a:ext uri="{FF2B5EF4-FFF2-40B4-BE49-F238E27FC236}">
-                <a16:creationId xmlns:a16="http://schemas.microsoft.com/office/drawing/2014/main" id="{BE82647E-DA08-904C-9686-78B17E1E2BF3}"/>
-              </a:ext>
-            </a:extLst>
-          </p:cNvPr>
-          <p:cNvSpPr txBox="1"/>
-          <p:nvPr/>
-        </p:nvSpPr>
-        <p:spPr>
-          <a:xfrm>
-            <a:off x="4820813" y="2742565"/>
-            <a:ext cx="2000611" cy="1384995"/>
-          </a:xfrm>
-          <a:prstGeom prst="rect">
-            <a:avLst/>
-          </a:prstGeom>
-          <a:noFill/>
-        </p:spPr>
-        <p:txBody>
-          <a:bodyPr wrap="square" rtlCol="0">
-            <a:spAutoFit/>
-          </a:bodyPr>
-          <a:lstStyle/>
-          <a:p>
-            <a:r>
-              <a:rPr lang="de-DE" sz="1400" dirty="0"/>
-              <a:t>SCD3: Der Filialname kann sich ändern, eher seltener Vorgang,</a:t>
-            </a:r>
-          </a:p>
-          <a:p>
-            <a:r>
-              <a:rPr lang="de-DE" sz="1400" dirty="0"/>
-              <a:t>Informationen über alten Namen trotzdem wichtig</a:t>
-            </a:r>
-          </a:p>
-        </p:txBody>
-      </p:sp>
-      <p:sp>
-        <p:nvSpPr>
-          <p:cNvPr id="11" name="Textfeld 10">
-            <a:extLst>
-              <a:ext uri="{FF2B5EF4-FFF2-40B4-BE49-F238E27FC236}">
-                <a16:creationId xmlns:a16="http://schemas.microsoft.com/office/drawing/2014/main" id="{97E9B84A-AE4B-9768-2853-76649DB47F25}"/>
-              </a:ext>
-            </a:extLst>
-          </p:cNvPr>
-          <p:cNvSpPr txBox="1"/>
-          <p:nvPr/>
-        </p:nvSpPr>
-        <p:spPr>
-          <a:xfrm>
-            <a:off x="5051249" y="5726779"/>
-            <a:ext cx="3068623" cy="954107"/>
-          </a:xfrm>
-          <a:prstGeom prst="rect">
-            <a:avLst/>
-          </a:prstGeom>
-          <a:noFill/>
-        </p:spPr>
-        <p:txBody>
-          <a:bodyPr wrap="square" rtlCol="0">
-            <a:spAutoFit/>
-          </a:bodyPr>
-          <a:lstStyle/>
-          <a:p>
-            <a:r>
-              <a:rPr lang="de-DE" sz="1400" dirty="0"/>
-              <a:t>SCD4: Produktattribute können sich aufgrund von Inflation etc. oft ändern,</a:t>
-            </a:r>
-          </a:p>
-          <a:p>
-            <a:r>
-              <a:rPr lang="de-DE" sz="1400" dirty="0"/>
-              <a:t>Historisierung ist für die Analyse sehr wichtig</a:t>
-            </a:r>
-          </a:p>
-        </p:txBody>
-      </p:sp>
-    </p:spTree>
-    <p:extLst>
-      <p:ext uri="{BB962C8B-B14F-4D97-AF65-F5344CB8AC3E}">
-        <p14:creationId xmlns:p14="http://schemas.microsoft.com/office/powerpoint/2010/main" val="1190778878"/>
-      </p:ext>
-    </p:extLst>
-  </p:cSld>
-  <p:clrMapOvr>
-    <a:masterClrMapping/>
-  </p:clrMapOvr>
-</p:sld>
-</file>
-
-<file path=ppt/slides/slide14.xml><?xml version="1.0" encoding="utf-8"?>
-<p:sld xmlns:a="http://schemas.openxmlformats.org/drawingml/2006/main" xmlns:r="http://schemas.openxmlformats.org/officeDocument/2006/relationships" xmlns:p="http://schemas.openxmlformats.org/presentationml/2006/main">
-  <p:cSld>
-    <p:spTree>
-      <p:nvGrpSpPr>
-        <p:cNvPr id="1" name=""/>
-        <p:cNvGrpSpPr/>
-        <p:nvPr/>
-      </p:nvGrpSpPr>
-      <p:grpSpPr>
-        <a:xfrm>
-          <a:off x="0" y="0"/>
-          <a:ext cx="0" cy="0"/>
-          <a:chOff x="0" y="0"/>
-          <a:chExt cx="0" cy="0"/>
-        </a:xfrm>
-      </p:grpSpPr>
-      <p:sp>
-        <p:nvSpPr>
-          <p:cNvPr id="2" name="Titel 1">
-            <a:extLst>
-              <a:ext uri="{FF2B5EF4-FFF2-40B4-BE49-F238E27FC236}">
-                <a16:creationId xmlns:a16="http://schemas.microsoft.com/office/drawing/2014/main" id="{D7C2311D-E75B-2973-3E6F-0EB0FACB9F26}"/>
-              </a:ext>
-            </a:extLst>
-          </p:cNvPr>
-          <p:cNvSpPr>
-            <a:spLocks noGrp="1"/>
-          </p:cNvSpPr>
-          <p:nvPr>
-            <p:ph type="title"/>
-          </p:nvPr>
-        </p:nvSpPr>
-        <p:spPr/>
-        <p:txBody>
-          <a:bodyPr/>
-          <a:lstStyle/>
-          <a:p>
-            <a:r>
-              <a:rPr lang="de-DE" dirty="0"/>
-              <a:t>ETL – Mapping Tabelle</a:t>
-            </a:r>
-          </a:p>
-        </p:txBody>
-      </p:sp>
-      <p:sp>
-        <p:nvSpPr>
-          <p:cNvPr id="3" name="Inhaltsplatzhalter 2">
-            <a:extLst>
-              <a:ext uri="{FF2B5EF4-FFF2-40B4-BE49-F238E27FC236}">
-                <a16:creationId xmlns:a16="http://schemas.microsoft.com/office/drawing/2014/main" id="{6C270558-67B5-2E63-161E-DB5D3489FD15}"/>
-              </a:ext>
-            </a:extLst>
-          </p:cNvPr>
-          <p:cNvSpPr>
-            <a:spLocks noGrp="1"/>
-          </p:cNvSpPr>
-          <p:nvPr>
-            <p:ph idx="1"/>
-          </p:nvPr>
-        </p:nvSpPr>
-        <p:spPr/>
-        <p:txBody>
-          <a:bodyPr/>
-          <a:lstStyle/>
-          <a:p>
-            <a:r>
-              <a:rPr lang="de-DE" dirty="0"/>
-              <a:t>Wesentliche Erkenntnisse:</a:t>
-            </a:r>
-          </a:p>
-        </p:txBody>
-      </p:sp>
-    </p:spTree>
-    <p:extLst>
-      <p:ext uri="{BB962C8B-B14F-4D97-AF65-F5344CB8AC3E}">
-        <p14:creationId xmlns:p14="http://schemas.microsoft.com/office/powerpoint/2010/main" val="4178603353"/>
+        <p14:creationId xmlns:p14="http://schemas.microsoft.com/office/powerpoint/2010/main" val="2784786867"/>
       </p:ext>
     </p:extLst>
   </p:cSld>
@@ -5449,10 +5391,10 @@
       </p:grpSpPr>
       <p:sp>
         <p:nvSpPr>
-          <p:cNvPr id="2" name="Titel 1">
-            <a:extLst>
-              <a:ext uri="{FF2B5EF4-FFF2-40B4-BE49-F238E27FC236}">
-                <a16:creationId xmlns:a16="http://schemas.microsoft.com/office/drawing/2014/main" id="{2847A2DD-B513-9CAE-097B-46D56B639D2B}"/>
+          <p:cNvPr id="4" name="Titel 3">
+            <a:extLst>
+              <a:ext uri="{FF2B5EF4-FFF2-40B4-BE49-F238E27FC236}">
+                <a16:creationId xmlns:a16="http://schemas.microsoft.com/office/drawing/2014/main" id="{D8BBB4D9-AB0A-37B6-B9D7-67AEE8951BA2}"/>
               </a:ext>
             </a:extLst>
           </p:cNvPr>
@@ -5470,25 +5412,25 @@
           <a:p>
             <a:r>
               <a:rPr lang="de-DE" dirty="0"/>
-              <a:t>Relationales Schema</a:t>
-            </a:r>
-          </a:p>
-        </p:txBody>
-      </p:sp>
-      <p:sp>
-        <p:nvSpPr>
-          <p:cNvPr id="3" name="Inhaltsplatzhalter 2">
-            <a:extLst>
-              <a:ext uri="{FF2B5EF4-FFF2-40B4-BE49-F238E27FC236}">
-                <a16:creationId xmlns:a16="http://schemas.microsoft.com/office/drawing/2014/main" id="{637DD96A-1D7C-AE1B-9BBA-C416AC28B2AF}"/>
-              </a:ext>
-            </a:extLst>
-          </p:cNvPr>
-          <p:cNvSpPr>
-            <a:spLocks noGrp="1"/>
-          </p:cNvSpPr>
-          <p:nvPr>
-            <p:ph idx="1"/>
+              <a:t>Data Warehouse</a:t>
+            </a:r>
+          </a:p>
+        </p:txBody>
+      </p:sp>
+      <p:sp>
+        <p:nvSpPr>
+          <p:cNvPr id="5" name="Textplatzhalter 4">
+            <a:extLst>
+              <a:ext uri="{FF2B5EF4-FFF2-40B4-BE49-F238E27FC236}">
+                <a16:creationId xmlns:a16="http://schemas.microsoft.com/office/drawing/2014/main" id="{DDD8E57D-6B19-DF39-2489-BEAA298E6F36}"/>
+              </a:ext>
+            </a:extLst>
+          </p:cNvPr>
+          <p:cNvSpPr>
+            <a:spLocks noGrp="1"/>
+          </p:cNvSpPr>
+          <p:nvPr>
+            <p:ph type="body" idx="1"/>
           </p:nvPr>
         </p:nvSpPr>
         <p:spPr/>
@@ -5503,7 +5445,7 @@
     </p:spTree>
     <p:extLst>
       <p:ext uri="{BB962C8B-B14F-4D97-AF65-F5344CB8AC3E}">
-        <p14:creationId xmlns:p14="http://schemas.microsoft.com/office/powerpoint/2010/main" val="3813430610"/>
+        <p14:creationId xmlns:p14="http://schemas.microsoft.com/office/powerpoint/2010/main" val="2824883227"/>
       </p:ext>
     </p:extLst>
   </p:cSld>
@@ -5532,10 +5474,10 @@
       </p:grpSpPr>
       <p:sp>
         <p:nvSpPr>
-          <p:cNvPr id="2" name="Titel 1">
-            <a:extLst>
-              <a:ext uri="{FF2B5EF4-FFF2-40B4-BE49-F238E27FC236}">
-                <a16:creationId xmlns:a16="http://schemas.microsoft.com/office/drawing/2014/main" id="{C03FD591-FEFE-C790-E324-95CC3715A429}"/>
+          <p:cNvPr id="4" name="Titel 3">
+            <a:extLst>
+              <a:ext uri="{FF2B5EF4-FFF2-40B4-BE49-F238E27FC236}">
+                <a16:creationId xmlns:a16="http://schemas.microsoft.com/office/drawing/2014/main" id="{7FBC5EB2-8E38-A6FF-3747-7C0FBA075449}"/>
               </a:ext>
             </a:extLst>
           </p:cNvPr>
@@ -5553,17 +5495,17 @@
           <a:p>
             <a:r>
               <a:rPr lang="de-DE" dirty="0"/>
-              <a:t>Normalform-Überprüfung</a:t>
-            </a:r>
-          </a:p>
-        </p:txBody>
-      </p:sp>
-      <p:sp>
-        <p:nvSpPr>
-          <p:cNvPr id="3" name="Inhaltsplatzhalter 2">
-            <a:extLst>
-              <a:ext uri="{FF2B5EF4-FFF2-40B4-BE49-F238E27FC236}">
-                <a16:creationId xmlns:a16="http://schemas.microsoft.com/office/drawing/2014/main" id="{5967946A-B62B-A3C9-3EA7-AD8272504AA7}"/>
+              <a:t>DWH-Fragen</a:t>
+            </a:r>
+          </a:p>
+        </p:txBody>
+      </p:sp>
+      <p:sp>
+        <p:nvSpPr>
+          <p:cNvPr id="5" name="Inhaltsplatzhalter 4">
+            <a:extLst>
+              <a:ext uri="{FF2B5EF4-FFF2-40B4-BE49-F238E27FC236}">
+                <a16:creationId xmlns:a16="http://schemas.microsoft.com/office/drawing/2014/main" id="{CE1C7ED1-A131-55DE-7840-35E53E3E2D37}"/>
               </a:ext>
             </a:extLst>
           </p:cNvPr>
@@ -5576,17 +5518,91 @@
         </p:nvSpPr>
         <p:spPr/>
         <p:txBody>
-          <a:bodyPr/>
-          <a:lstStyle/>
-          <a:p>
-            <a:endParaRPr lang="de-DE"/>
+          <a:bodyPr>
+            <a:normAutofit fontScale="92500" lnSpcReduction="10000"/>
+          </a:bodyPr>
+          <a:lstStyle/>
+          <a:p>
+            <a:pPr marL="514350" lvl="0" indent="-514350">
+              <a:buFont typeface="+mj-lt"/>
+              <a:buAutoNum type="arabicPeriod"/>
+            </a:pPr>
+            <a:r>
+              <a:rPr lang="de-DE" dirty="0"/>
+              <a:t>Welche Filialen haben den größten/kleinsten Umsatz? </a:t>
+            </a:r>
+            <a:r>
+              <a:rPr lang="de-DE" i="1" dirty="0"/>
+              <a:t>(Verkäufe/Stunde, Kategorisierung der Filialen)</a:t>
+            </a:r>
+            <a:endParaRPr lang="de-DE" dirty="0"/>
+          </a:p>
+          <a:p>
+            <a:pPr marL="514350" lvl="0" indent="-514350">
+              <a:buFont typeface="+mj-lt"/>
+              <a:buAutoNum type="arabicPeriod"/>
+            </a:pPr>
+            <a:r>
+              <a:rPr lang="de-DE" dirty="0"/>
+              <a:t>Welche Produkte haben die größte/kleinste Marge? </a:t>
+            </a:r>
+            <a:r>
+              <a:rPr lang="de-DE" i="1" dirty="0"/>
+              <a:t>(Produktpreis, Kosten der Zutaten, Energieverbrauch, Herstellungsdauer)</a:t>
+            </a:r>
+            <a:endParaRPr lang="de-DE" dirty="0"/>
+          </a:p>
+          <a:p>
+            <a:pPr marL="514350" lvl="0" indent="-514350">
+              <a:buFont typeface="+mj-lt"/>
+              <a:buAutoNum type="arabicPeriod"/>
+            </a:pPr>
+            <a:r>
+              <a:rPr lang="de-DE" dirty="0"/>
+              <a:t>Welche Produkte haben in der Herstellung den größten/kleinsten Energieverbrauch? </a:t>
+            </a:r>
+            <a:r>
+              <a:rPr lang="de-DE" i="1" dirty="0"/>
+              <a:t>(Backdauer, Kühlung der Zutaten)</a:t>
+            </a:r>
+            <a:endParaRPr lang="de-DE" dirty="0"/>
+          </a:p>
+          <a:p>
+            <a:pPr marL="514350" lvl="0" indent="-514350">
+              <a:buFont typeface="+mj-lt"/>
+              <a:buAutoNum type="arabicPeriod"/>
+            </a:pPr>
+            <a:r>
+              <a:rPr lang="de-DE" dirty="0"/>
+              <a:t>Zu welchen Tageszeiten wird welche Produktkategorie an welchem Standort am meisten gekauft? (Verkäufe)</a:t>
+            </a:r>
+          </a:p>
+          <a:p>
+            <a:pPr marL="514350" lvl="0" indent="-514350">
+              <a:buFont typeface="+mj-lt"/>
+              <a:buAutoNum type="arabicPeriod"/>
+            </a:pPr>
+            <a:r>
+              <a:rPr lang="de-DE" dirty="0"/>
+              <a:t>Welche Produkte werden am meisten/am wenigsten verkauft?</a:t>
+            </a:r>
+          </a:p>
+          <a:p>
+            <a:pPr marL="514350" indent="-514350">
+              <a:buFont typeface="+mj-lt"/>
+              <a:buAutoNum type="arabicPeriod"/>
+            </a:pPr>
+            <a:r>
+              <a:rPr lang="de-DE" dirty="0"/>
+              <a:t>Welcher Verkäufer hat den größten durchschnittlichen Umsatz pro Verkauf?</a:t>
+            </a:r>
           </a:p>
         </p:txBody>
       </p:sp>
     </p:spTree>
     <p:extLst>
       <p:ext uri="{BB962C8B-B14F-4D97-AF65-F5344CB8AC3E}">
-        <p14:creationId xmlns:p14="http://schemas.microsoft.com/office/powerpoint/2010/main" val="1059657918"/>
+        <p14:creationId xmlns:p14="http://schemas.microsoft.com/office/powerpoint/2010/main" val="237497836"/>
       </p:ext>
     </p:extLst>
   </p:cSld>
@@ -5618,7 +5634,7 @@
           <p:cNvPr id="2" name="Titel 1">
             <a:extLst>
               <a:ext uri="{FF2B5EF4-FFF2-40B4-BE49-F238E27FC236}">
-                <a16:creationId xmlns:a16="http://schemas.microsoft.com/office/drawing/2014/main" id="{50205810-A1A2-AAB5-2E5A-B46F5FB3BEE9}"/>
+                <a16:creationId xmlns:a16="http://schemas.microsoft.com/office/drawing/2014/main" id="{325C50AD-AB12-3666-A634-324EE9A12F09}"/>
               </a:ext>
             </a:extLst>
           </p:cNvPr>
@@ -5635,41 +5651,55 @@
           <a:lstStyle/>
           <a:p>
             <a:r>
-              <a:rPr lang="de-DE" dirty="0"/>
-              <a:t>Speicherplatzberechnung</a:t>
-            </a:r>
-          </a:p>
-        </p:txBody>
-      </p:sp>
-      <p:sp>
-        <p:nvSpPr>
-          <p:cNvPr id="3" name="Inhaltsplatzhalter 2">
-            <a:extLst>
-              <a:ext uri="{FF2B5EF4-FFF2-40B4-BE49-F238E27FC236}">
-                <a16:creationId xmlns:a16="http://schemas.microsoft.com/office/drawing/2014/main" id="{AB6C21D1-2921-2860-E730-7DB0FD765F5E}"/>
-              </a:ext>
-            </a:extLst>
-          </p:cNvPr>
-          <p:cNvSpPr>
-            <a:spLocks noGrp="1"/>
-          </p:cNvSpPr>
+              <a:rPr lang="de-DE" dirty="0" err="1"/>
+              <a:t>mER</a:t>
+            </a:r>
+            <a:endParaRPr lang="de-DE" dirty="0"/>
+          </a:p>
+        </p:txBody>
+      </p:sp>
+      <p:pic>
+        <p:nvPicPr>
+          <p:cNvPr id="5" name="Inhaltsplatzhalter 4">
+            <a:extLst>
+              <a:ext uri="{FF2B5EF4-FFF2-40B4-BE49-F238E27FC236}">
+                <a16:creationId xmlns:a16="http://schemas.microsoft.com/office/drawing/2014/main" id="{C599200D-D61C-1F8B-D3A1-5E8901654166}"/>
+              </a:ext>
+            </a:extLst>
+          </p:cNvPr>
+          <p:cNvPicPr>
+            <a:picLocks noGrp="1" noChangeAspect="1"/>
+          </p:cNvPicPr>
           <p:nvPr>
             <p:ph idx="1"/>
           </p:nvPr>
-        </p:nvSpPr>
-        <p:spPr/>
-        <p:txBody>
-          <a:bodyPr/>
-          <a:lstStyle/>
-          <a:p>
-            <a:endParaRPr lang="de-DE"/>
-          </a:p>
-        </p:txBody>
-      </p:sp>
+        </p:nvPicPr>
+        <p:blipFill>
+          <a:blip r:embed="rId3">
+            <a:extLst>
+              <a:ext uri="{28A0092B-C50C-407E-A947-70E740481C1C}">
+                <a14:useLocalDpi xmlns:a14="http://schemas.microsoft.com/office/drawing/2010/main" val="0"/>
+              </a:ext>
+            </a:extLst>
+          </a:blip>
+          <a:stretch>
+            <a:fillRect/>
+          </a:stretch>
+        </p:blipFill>
+        <p:spPr>
+          <a:xfrm>
+            <a:off x="2617794" y="365125"/>
+            <a:ext cx="8736006" cy="5942782"/>
+          </a:xfrm>
+          <a:prstGeom prst="rect">
+            <a:avLst/>
+          </a:prstGeom>
+        </p:spPr>
+      </p:pic>
     </p:spTree>
     <p:extLst>
       <p:ext uri="{BB962C8B-B14F-4D97-AF65-F5344CB8AC3E}">
-        <p14:creationId xmlns:p14="http://schemas.microsoft.com/office/powerpoint/2010/main" val="86204701"/>
+        <p14:creationId xmlns:p14="http://schemas.microsoft.com/office/powerpoint/2010/main" val="427920151"/>
       </p:ext>
     </p:extLst>
   </p:cSld>
@@ -5698,10 +5728,10 @@
       </p:grpSpPr>
       <p:sp>
         <p:nvSpPr>
-          <p:cNvPr id="4" name="Titel 3">
-            <a:extLst>
-              <a:ext uri="{FF2B5EF4-FFF2-40B4-BE49-F238E27FC236}">
-                <a16:creationId xmlns:a16="http://schemas.microsoft.com/office/drawing/2014/main" id="{D8BBB4D9-AB0A-37B6-B9D7-67AEE8951BA2}"/>
+          <p:cNvPr id="2" name="Titel 1">
+            <a:extLst>
+              <a:ext uri="{FF2B5EF4-FFF2-40B4-BE49-F238E27FC236}">
+                <a16:creationId xmlns:a16="http://schemas.microsoft.com/office/drawing/2014/main" id="{3904CDF3-4527-70B2-FABB-909DC6BA3CF1}"/>
               </a:ext>
             </a:extLst>
           </p:cNvPr>
@@ -5719,40 +5749,59 @@
           <a:p>
             <a:r>
               <a:rPr lang="de-DE" dirty="0"/>
-              <a:t>Data Warehouse</a:t>
-            </a:r>
-          </a:p>
-        </p:txBody>
-      </p:sp>
-      <p:sp>
-        <p:nvSpPr>
-          <p:cNvPr id="5" name="Textplatzhalter 4">
-            <a:extLst>
-              <a:ext uri="{FF2B5EF4-FFF2-40B4-BE49-F238E27FC236}">
-                <a16:creationId xmlns:a16="http://schemas.microsoft.com/office/drawing/2014/main" id="{DDD8E57D-6B19-DF39-2489-BEAA298E6F36}"/>
-              </a:ext>
-            </a:extLst>
-          </p:cNvPr>
-          <p:cNvSpPr>
-            <a:spLocks noGrp="1"/>
-          </p:cNvSpPr>
-          <p:nvPr>
-            <p:ph type="body" idx="1"/>
-          </p:nvPr>
-        </p:nvSpPr>
-        <p:spPr/>
-        <p:txBody>
-          <a:bodyPr/>
-          <a:lstStyle/>
-          <a:p>
-            <a:endParaRPr lang="de-DE"/>
-          </a:p>
-        </p:txBody>
-      </p:sp>
+              <a:t>Logisches Modell</a:t>
+            </a:r>
+            <a:br>
+              <a:rPr lang="de-DE" dirty="0"/>
+            </a:br>
+            <a:r>
+              <a:rPr lang="de-DE" dirty="0"/>
+              <a:t>Galaxy Schema</a:t>
+            </a:r>
+          </a:p>
+        </p:txBody>
+      </p:sp>
+      <p:pic>
+        <p:nvPicPr>
+          <p:cNvPr id="5" name="Inhaltsplatzhalter 4">
+            <a:extLst>
+              <a:ext uri="{FF2B5EF4-FFF2-40B4-BE49-F238E27FC236}">
+                <a16:creationId xmlns:a16="http://schemas.microsoft.com/office/drawing/2014/main" id="{525D996C-32F6-0F32-53F9-94DC195EDD2E}"/>
+              </a:ext>
+            </a:extLst>
+          </p:cNvPr>
+          <p:cNvPicPr>
+            <a:picLocks noGrp="1" noChangeAspect="1"/>
+          </p:cNvPicPr>
+          <p:nvPr>
+            <p:ph idx="1"/>
+          </p:nvPr>
+        </p:nvPicPr>
+        <p:blipFill>
+          <a:blip r:embed="rId3">
+            <a:extLst>
+              <a:ext uri="{28A0092B-C50C-407E-A947-70E740481C1C}">
+                <a14:useLocalDpi xmlns:a14="http://schemas.microsoft.com/office/drawing/2010/main" val="0"/>
+              </a:ext>
+            </a:extLst>
+          </a:blip>
+          <a:srcRect/>
+          <a:stretch/>
+        </p:blipFill>
+        <p:spPr>
+          <a:xfrm>
+            <a:off x="5155932" y="0"/>
+            <a:ext cx="5941996" cy="6727898"/>
+          </a:xfrm>
+          <a:prstGeom prst="rect">
+            <a:avLst/>
+          </a:prstGeom>
+        </p:spPr>
+      </p:pic>
     </p:spTree>
     <p:extLst>
       <p:ext uri="{BB962C8B-B14F-4D97-AF65-F5344CB8AC3E}">
-        <p14:creationId xmlns:p14="http://schemas.microsoft.com/office/powerpoint/2010/main" val="2824883227"/>
+        <p14:creationId xmlns:p14="http://schemas.microsoft.com/office/powerpoint/2010/main" val="763179585"/>
       </p:ext>
     </p:extLst>
   </p:cSld>

--- a/Präsentation/Präsentation.pptx
+++ b/Präsentation/Präsentation.pptx
@@ -5,21 +5,23 @@
     <p:sldMasterId id="2147483648" r:id="rId1"/>
   </p:sldMasterIdLst>
   <p:notesMasterIdLst>
-    <p:notesMasterId r:id="rId14"/>
+    <p:notesMasterId r:id="rId16"/>
   </p:notesMasterIdLst>
   <p:sldIdLst>
     <p:sldId id="256" r:id="rId2"/>
     <p:sldId id="257" r:id="rId3"/>
-    <p:sldId id="263" r:id="rId4"/>
-    <p:sldId id="258" r:id="rId5"/>
-    <p:sldId id="269" r:id="rId6"/>
-    <p:sldId id="262" r:id="rId7"/>
-    <p:sldId id="264" r:id="rId8"/>
-    <p:sldId id="265" r:id="rId9"/>
-    <p:sldId id="266" r:id="rId10"/>
-    <p:sldId id="267" r:id="rId11"/>
-    <p:sldId id="268" r:id="rId12"/>
-    <p:sldId id="270" r:id="rId13"/>
+    <p:sldId id="271" r:id="rId4"/>
+    <p:sldId id="263" r:id="rId5"/>
+    <p:sldId id="258" r:id="rId6"/>
+    <p:sldId id="269" r:id="rId7"/>
+    <p:sldId id="262" r:id="rId8"/>
+    <p:sldId id="264" r:id="rId9"/>
+    <p:sldId id="265" r:id="rId10"/>
+    <p:sldId id="266" r:id="rId11"/>
+    <p:sldId id="267" r:id="rId12"/>
+    <p:sldId id="272" r:id="rId13"/>
+    <p:sldId id="259" r:id="rId14"/>
+    <p:sldId id="273" r:id="rId15"/>
   </p:sldIdLst>
   <p:sldSz cx="12192000" cy="6858000"/>
   <p:notesSz cx="6858000" cy="9144000"/>
@@ -540,7 +542,7 @@
           <a:p>
             <a:fld id="{F9573A14-2FD9-4F88-9CDD-7A01E9A13A5F}" type="slidenum">
               <a:rPr lang="de-DE" smtClean="0"/>
-              <a:t>4</a:t>
+              <a:t>5</a:t>
             </a:fld>
             <a:endParaRPr lang="de-DE"/>
           </a:p>
@@ -648,7 +650,7 @@
           <a:p>
             <a:fld id="{F9573A14-2FD9-4F88-9CDD-7A01E9A13A5F}" type="slidenum">
               <a:rPr lang="de-DE" smtClean="0"/>
-              <a:t>5</a:t>
+              <a:t>6</a:t>
             </a:fld>
             <a:endParaRPr lang="de-DE"/>
           </a:p>
@@ -732,7 +734,7 @@
           <a:p>
             <a:fld id="{F9573A14-2FD9-4F88-9CDD-7A01E9A13A5F}" type="slidenum">
               <a:rPr lang="de-DE" smtClean="0"/>
-              <a:t>8</a:t>
+              <a:t>9</a:t>
             </a:fld>
             <a:endParaRPr lang="de-DE"/>
           </a:p>
@@ -816,7 +818,7 @@
           <a:p>
             <a:fld id="{F9573A14-2FD9-4F88-9CDD-7A01E9A13A5F}" type="slidenum">
               <a:rPr lang="de-DE" smtClean="0"/>
-              <a:t>9</a:t>
+              <a:t>10</a:t>
             </a:fld>
             <a:endParaRPr lang="de-DE"/>
           </a:p>
@@ -900,7 +902,7 @@
           <a:p>
             <a:fld id="{F9573A14-2FD9-4F88-9CDD-7A01E9A13A5F}" type="slidenum">
               <a:rPr lang="de-DE" smtClean="0"/>
-              <a:t>10</a:t>
+              <a:t>11</a:t>
             </a:fld>
             <a:endParaRPr lang="de-DE"/>
           </a:p>
@@ -1064,7 +1066,7 @@
           <a:bodyPr/>
           <a:lstStyle/>
           <a:p>
-            <a:fld id="{573F7FC6-07F6-421A-8FD9-92A0CA065868}" type="datetimeFigureOut">
+            <a:fld id="{C1A3F57E-A23B-4EC8-88D9-9CE4544A9387}" type="datetime1">
               <a:rPr lang="de-DE" smtClean="0"/>
               <a:t>28.08.2026</a:t>
             </a:fld>
@@ -1262,7 +1264,7 @@
           <a:bodyPr/>
           <a:lstStyle/>
           <a:p>
-            <a:fld id="{573F7FC6-07F6-421A-8FD9-92A0CA065868}" type="datetimeFigureOut">
+            <a:fld id="{824B91BD-ED9E-476A-A06E-908727E2A80D}" type="datetime1">
               <a:rPr lang="de-DE" smtClean="0"/>
               <a:t>28.08.2026</a:t>
             </a:fld>
@@ -1470,7 +1472,7 @@
           <a:bodyPr/>
           <a:lstStyle/>
           <a:p>
-            <a:fld id="{573F7FC6-07F6-421A-8FD9-92A0CA065868}" type="datetimeFigureOut">
+            <a:fld id="{A2368254-BA55-4C05-9E38-B4E4C7EF4282}" type="datetime1">
               <a:rPr lang="de-DE" smtClean="0"/>
               <a:t>28.08.2026</a:t>
             </a:fld>
@@ -1668,7 +1670,7 @@
           <a:bodyPr/>
           <a:lstStyle/>
           <a:p>
-            <a:fld id="{573F7FC6-07F6-421A-8FD9-92A0CA065868}" type="datetimeFigureOut">
+            <a:fld id="{B0CEBB07-AD68-489C-B529-2D0B1E705053}" type="datetime1">
               <a:rPr lang="de-DE" smtClean="0"/>
               <a:t>28.08.2026</a:t>
             </a:fld>
@@ -1943,7 +1945,7 @@
           <a:bodyPr/>
           <a:lstStyle/>
           <a:p>
-            <a:fld id="{573F7FC6-07F6-421A-8FD9-92A0CA065868}" type="datetimeFigureOut">
+            <a:fld id="{7DB52F10-6C69-4AAE-81EC-2781BEEF3A65}" type="datetime1">
               <a:rPr lang="de-DE" smtClean="0"/>
               <a:t>28.08.2026</a:t>
             </a:fld>
@@ -2208,7 +2210,7 @@
           <a:bodyPr/>
           <a:lstStyle/>
           <a:p>
-            <a:fld id="{573F7FC6-07F6-421A-8FD9-92A0CA065868}" type="datetimeFigureOut">
+            <a:fld id="{6E66611E-C695-4752-B4BD-9595157E0337}" type="datetime1">
               <a:rPr lang="de-DE" smtClean="0"/>
               <a:t>28.08.2026</a:t>
             </a:fld>
@@ -2620,7 +2622,7 @@
           <a:bodyPr/>
           <a:lstStyle/>
           <a:p>
-            <a:fld id="{573F7FC6-07F6-421A-8FD9-92A0CA065868}" type="datetimeFigureOut">
+            <a:fld id="{987C429F-FC24-4716-974B-CE9C0EAFA166}" type="datetime1">
               <a:rPr lang="de-DE" smtClean="0"/>
               <a:t>28.08.2026</a:t>
             </a:fld>
@@ -2761,7 +2763,7 @@
           <a:bodyPr/>
           <a:lstStyle/>
           <a:p>
-            <a:fld id="{573F7FC6-07F6-421A-8FD9-92A0CA065868}" type="datetimeFigureOut">
+            <a:fld id="{40B40AFE-9AA2-4476-89EB-CDA779656E53}" type="datetime1">
               <a:rPr lang="de-DE" smtClean="0"/>
               <a:t>28.08.2026</a:t>
             </a:fld>
@@ -2874,7 +2876,7 @@
           <a:bodyPr/>
           <a:lstStyle/>
           <a:p>
-            <a:fld id="{573F7FC6-07F6-421A-8FD9-92A0CA065868}" type="datetimeFigureOut">
+            <a:fld id="{47EA7A66-BBC4-441E-AEBF-96947E37D3D7}" type="datetime1">
               <a:rPr lang="de-DE" smtClean="0"/>
               <a:t>28.08.2026</a:t>
             </a:fld>
@@ -3185,7 +3187,7 @@
           <a:bodyPr/>
           <a:lstStyle/>
           <a:p>
-            <a:fld id="{573F7FC6-07F6-421A-8FD9-92A0CA065868}" type="datetimeFigureOut">
+            <a:fld id="{5A01070B-0523-431D-A9BC-029A56E07888}" type="datetime1">
               <a:rPr lang="de-DE" smtClean="0"/>
               <a:t>28.08.2026</a:t>
             </a:fld>
@@ -3473,7 +3475,7 @@
           <a:bodyPr/>
           <a:lstStyle/>
           <a:p>
-            <a:fld id="{573F7FC6-07F6-421A-8FD9-92A0CA065868}" type="datetimeFigureOut">
+            <a:fld id="{F9CE15D7-613E-4402-96C5-C2CA2C92752D}" type="datetime1">
               <a:rPr lang="de-DE" smtClean="0"/>
               <a:t>28.08.2026</a:t>
             </a:fld>
@@ -3714,7 +3716,7 @@
             </a:lvl1pPr>
           </a:lstStyle>
           <a:p>
-            <a:fld id="{573F7FC6-07F6-421A-8FD9-92A0CA065868}" type="datetimeFigureOut">
+            <a:fld id="{ECC87FF6-5757-40EA-9A79-81DCEBA8D2C6}" type="datetime1">
               <a:rPr lang="de-DE" smtClean="0"/>
               <a:t>28.08.2026</a:t>
             </a:fld>
@@ -3833,6 +3835,7 @@
     <p:sldLayoutId id="2147483658" r:id="rId10"/>
     <p:sldLayoutId id="2147483659" r:id="rId11"/>
   </p:sldLayoutIdLst>
+  <p:hf hdr="0" ftr="0" dt="0"/>
   <p:txStyles>
     <p:titleStyle>
       <a:lvl1pPr algn="l" defTabSz="914400" rtl="0" eaLnBrk="1" latinLnBrk="0" hangingPunct="1">
@@ -4220,6 +4223,35 @@
           </a:p>
         </p:txBody>
       </p:sp>
+      <p:sp>
+        <p:nvSpPr>
+          <p:cNvPr id="4" name="Foliennummernplatzhalter 3">
+            <a:extLst>
+              <a:ext uri="{FF2B5EF4-FFF2-40B4-BE49-F238E27FC236}">
+                <a16:creationId xmlns:a16="http://schemas.microsoft.com/office/drawing/2014/main" id="{FCBB7D3D-A589-62AC-63E4-B858CFAB6090}"/>
+              </a:ext>
+            </a:extLst>
+          </p:cNvPr>
+          <p:cNvSpPr>
+            <a:spLocks noGrp="1"/>
+          </p:cNvSpPr>
+          <p:nvPr>
+            <p:ph type="sldNum" sz="quarter" idx="12"/>
+          </p:nvPr>
+        </p:nvSpPr>
+        <p:spPr/>
+        <p:txBody>
+          <a:bodyPr/>
+          <a:lstStyle/>
+          <a:p>
+            <a:fld id="{9B251280-DAE6-4033-B7F4-5E0D817A0287}" type="slidenum">
+              <a:rPr lang="de-DE" smtClean="0"/>
+              <a:t>1</a:t>
+            </a:fld>
+            <a:endParaRPr lang="de-DE"/>
+          </a:p>
+        </p:txBody>
+      </p:sp>
     </p:spTree>
     <p:extLst>
       <p:ext uri="{BB962C8B-B14F-4D97-AF65-F5344CB8AC3E}">
@@ -4234,6 +4266,137 @@
 </file>
 
 <file path=ppt/slides/slide10.xml><?xml version="1.0" encoding="utf-8"?>
+<p:sld xmlns:a="http://schemas.openxmlformats.org/drawingml/2006/main" xmlns:r="http://schemas.openxmlformats.org/officeDocument/2006/relationships" xmlns:p="http://schemas.openxmlformats.org/presentationml/2006/main">
+  <p:cSld>
+    <p:spTree>
+      <p:nvGrpSpPr>
+        <p:cNvPr id="1" name=""/>
+        <p:cNvGrpSpPr/>
+        <p:nvPr/>
+      </p:nvGrpSpPr>
+      <p:grpSpPr>
+        <a:xfrm>
+          <a:off x="0" y="0"/>
+          <a:ext cx="0" cy="0"/>
+          <a:chOff x="0" y="0"/>
+          <a:chExt cx="0" cy="0"/>
+        </a:xfrm>
+      </p:grpSpPr>
+      <p:sp>
+        <p:nvSpPr>
+          <p:cNvPr id="2" name="Titel 1">
+            <a:extLst>
+              <a:ext uri="{FF2B5EF4-FFF2-40B4-BE49-F238E27FC236}">
+                <a16:creationId xmlns:a16="http://schemas.microsoft.com/office/drawing/2014/main" id="{3904CDF3-4527-70B2-FABB-909DC6BA3CF1}"/>
+              </a:ext>
+            </a:extLst>
+          </p:cNvPr>
+          <p:cNvSpPr>
+            <a:spLocks noGrp="1"/>
+          </p:cNvSpPr>
+          <p:nvPr>
+            <p:ph type="title"/>
+          </p:nvPr>
+        </p:nvSpPr>
+        <p:spPr/>
+        <p:txBody>
+          <a:bodyPr/>
+          <a:lstStyle/>
+          <a:p>
+            <a:r>
+              <a:rPr lang="de-DE" dirty="0"/>
+              <a:t>Logisches Modell</a:t>
+            </a:r>
+            <a:br>
+              <a:rPr lang="de-DE" dirty="0"/>
+            </a:br>
+            <a:r>
+              <a:rPr lang="de-DE" dirty="0"/>
+              <a:t>Galaxy Schema</a:t>
+            </a:r>
+          </a:p>
+        </p:txBody>
+      </p:sp>
+      <p:pic>
+        <p:nvPicPr>
+          <p:cNvPr id="5" name="Inhaltsplatzhalter 4">
+            <a:extLst>
+              <a:ext uri="{FF2B5EF4-FFF2-40B4-BE49-F238E27FC236}">
+                <a16:creationId xmlns:a16="http://schemas.microsoft.com/office/drawing/2014/main" id="{525D996C-32F6-0F32-53F9-94DC195EDD2E}"/>
+              </a:ext>
+            </a:extLst>
+          </p:cNvPr>
+          <p:cNvPicPr>
+            <a:picLocks noGrp="1" noChangeAspect="1"/>
+          </p:cNvPicPr>
+          <p:nvPr>
+            <p:ph idx="1"/>
+          </p:nvPr>
+        </p:nvPicPr>
+        <p:blipFill>
+          <a:blip r:embed="rId3">
+            <a:extLst>
+              <a:ext uri="{28A0092B-C50C-407E-A947-70E740481C1C}">
+                <a14:useLocalDpi xmlns:a14="http://schemas.microsoft.com/office/drawing/2010/main" val="0"/>
+              </a:ext>
+            </a:extLst>
+          </a:blip>
+          <a:srcRect/>
+          <a:stretch/>
+        </p:blipFill>
+        <p:spPr>
+          <a:xfrm>
+            <a:off x="5155932" y="0"/>
+            <a:ext cx="5941996" cy="6727898"/>
+          </a:xfrm>
+          <a:prstGeom prst="rect">
+            <a:avLst/>
+          </a:prstGeom>
+        </p:spPr>
+      </p:pic>
+      <p:sp>
+        <p:nvSpPr>
+          <p:cNvPr id="3" name="Foliennummernplatzhalter 2">
+            <a:extLst>
+              <a:ext uri="{FF2B5EF4-FFF2-40B4-BE49-F238E27FC236}">
+                <a16:creationId xmlns:a16="http://schemas.microsoft.com/office/drawing/2014/main" id="{55D28807-0791-1730-E2DC-1922A31E9FFD}"/>
+              </a:ext>
+            </a:extLst>
+          </p:cNvPr>
+          <p:cNvSpPr>
+            <a:spLocks noGrp="1"/>
+          </p:cNvSpPr>
+          <p:nvPr>
+            <p:ph type="sldNum" sz="quarter" idx="12"/>
+          </p:nvPr>
+        </p:nvSpPr>
+        <p:spPr/>
+        <p:txBody>
+          <a:bodyPr/>
+          <a:lstStyle/>
+          <a:p>
+            <a:fld id="{9B251280-DAE6-4033-B7F4-5E0D817A0287}" type="slidenum">
+              <a:rPr lang="de-DE" smtClean="0"/>
+              <a:t>10</a:t>
+            </a:fld>
+            <a:endParaRPr lang="de-DE"/>
+          </a:p>
+        </p:txBody>
+      </p:sp>
+    </p:spTree>
+    <p:extLst>
+      <p:ext uri="{BB962C8B-B14F-4D97-AF65-F5344CB8AC3E}">
+        <p14:creationId xmlns:p14="http://schemas.microsoft.com/office/powerpoint/2010/main" val="763179585"/>
+      </p:ext>
+    </p:extLst>
+  </p:cSld>
+  <p:clrMapOvr>
+    <a:masterClrMapping/>
+  </p:clrMapOvr>
+</p:sld>
+</file>
+
+<file path=ppt/slides/slide11.xml><?xml version="1.0" encoding="utf-8"?>
 <p:sld xmlns:a="http://schemas.openxmlformats.org/drawingml/2006/main" xmlns:r="http://schemas.openxmlformats.org/officeDocument/2006/relationships" xmlns:p="http://schemas.openxmlformats.org/presentationml/2006/main">
   <p:cSld>
     <p:spTree>
@@ -4525,313 +4688,39 @@
           </a:p>
         </p:txBody>
       </p:sp>
+      <p:sp>
+        <p:nvSpPr>
+          <p:cNvPr id="4" name="Foliennummernplatzhalter 3">
+            <a:extLst>
+              <a:ext uri="{FF2B5EF4-FFF2-40B4-BE49-F238E27FC236}">
+                <a16:creationId xmlns:a16="http://schemas.microsoft.com/office/drawing/2014/main" id="{5109B500-DD44-7DC8-0793-1FAF4FBF468C}"/>
+              </a:ext>
+            </a:extLst>
+          </p:cNvPr>
+          <p:cNvSpPr>
+            <a:spLocks noGrp="1"/>
+          </p:cNvSpPr>
+          <p:nvPr>
+            <p:ph type="sldNum" sz="quarter" idx="12"/>
+          </p:nvPr>
+        </p:nvSpPr>
+        <p:spPr/>
+        <p:txBody>
+          <a:bodyPr/>
+          <a:lstStyle/>
+          <a:p>
+            <a:fld id="{9B251280-DAE6-4033-B7F4-5E0D817A0287}" type="slidenum">
+              <a:rPr lang="de-DE" smtClean="0"/>
+              <a:t>11</a:t>
+            </a:fld>
+            <a:endParaRPr lang="de-DE"/>
+          </a:p>
+        </p:txBody>
+      </p:sp>
     </p:spTree>
     <p:extLst>
       <p:ext uri="{BB962C8B-B14F-4D97-AF65-F5344CB8AC3E}">
         <p14:creationId xmlns:p14="http://schemas.microsoft.com/office/powerpoint/2010/main" val="1190778878"/>
-      </p:ext>
-    </p:extLst>
-  </p:cSld>
-  <p:clrMapOvr>
-    <a:masterClrMapping/>
-  </p:clrMapOvr>
-</p:sld>
-</file>
-
-<file path=ppt/slides/slide11.xml><?xml version="1.0" encoding="utf-8"?>
-<p:sld xmlns:a="http://schemas.openxmlformats.org/drawingml/2006/main" xmlns:r="http://schemas.openxmlformats.org/officeDocument/2006/relationships" xmlns:p="http://schemas.openxmlformats.org/presentationml/2006/main">
-  <p:cSld>
-    <p:spTree>
-      <p:nvGrpSpPr>
-        <p:cNvPr id="1" name=""/>
-        <p:cNvGrpSpPr/>
-        <p:nvPr/>
-      </p:nvGrpSpPr>
-      <p:grpSpPr>
-        <a:xfrm>
-          <a:off x="0" y="0"/>
-          <a:ext cx="0" cy="0"/>
-          <a:chOff x="0" y="0"/>
-          <a:chExt cx="0" cy="0"/>
-        </a:xfrm>
-      </p:grpSpPr>
-      <p:sp>
-        <p:nvSpPr>
-          <p:cNvPr id="2" name="Titel 1">
-            <a:extLst>
-              <a:ext uri="{FF2B5EF4-FFF2-40B4-BE49-F238E27FC236}">
-                <a16:creationId xmlns:a16="http://schemas.microsoft.com/office/drawing/2014/main" id="{D7C2311D-E75B-2973-3E6F-0EB0FACB9F26}"/>
-              </a:ext>
-            </a:extLst>
-          </p:cNvPr>
-          <p:cNvSpPr>
-            <a:spLocks noGrp="1"/>
-          </p:cNvSpPr>
-          <p:nvPr>
-            <p:ph type="title"/>
-          </p:nvPr>
-        </p:nvSpPr>
-        <p:spPr/>
-        <p:txBody>
-          <a:bodyPr/>
-          <a:lstStyle/>
-          <a:p>
-            <a:r>
-              <a:rPr lang="de-DE" dirty="0"/>
-              <a:t>ETL – Schedule</a:t>
-            </a:r>
-          </a:p>
-        </p:txBody>
-      </p:sp>
-      <p:sp>
-        <p:nvSpPr>
-          <p:cNvPr id="4" name="Textfeld 3">
-            <a:extLst>
-              <a:ext uri="{FF2B5EF4-FFF2-40B4-BE49-F238E27FC236}">
-                <a16:creationId xmlns:a16="http://schemas.microsoft.com/office/drawing/2014/main" id="{C36A1A73-D613-125C-5B7B-46985C53CDA6}"/>
-              </a:ext>
-            </a:extLst>
-          </p:cNvPr>
-          <p:cNvSpPr txBox="1"/>
-          <p:nvPr/>
-        </p:nvSpPr>
-        <p:spPr>
-          <a:xfrm>
-            <a:off x="838200" y="1690688"/>
-            <a:ext cx="2259658" cy="369332"/>
-          </a:xfrm>
-          <a:prstGeom prst="rect">
-            <a:avLst/>
-          </a:prstGeom>
-          <a:noFill/>
-        </p:spPr>
-        <p:txBody>
-          <a:bodyPr wrap="none" rtlCol="0">
-            <a:spAutoFit/>
-          </a:bodyPr>
-          <a:lstStyle/>
-          <a:p>
-            <a:r>
-              <a:rPr lang="de-DE" u="sng" dirty="0"/>
-              <a:t>Dimension Verkäufer</a:t>
-            </a:r>
-          </a:p>
-        </p:txBody>
-      </p:sp>
-      <p:sp>
-        <p:nvSpPr>
-          <p:cNvPr id="6" name="Textfeld 5">
-            <a:extLst>
-              <a:ext uri="{FF2B5EF4-FFF2-40B4-BE49-F238E27FC236}">
-                <a16:creationId xmlns:a16="http://schemas.microsoft.com/office/drawing/2014/main" id="{17EF025E-B37F-0B25-14A6-A9D9F1278848}"/>
-              </a:ext>
-            </a:extLst>
-          </p:cNvPr>
-          <p:cNvSpPr txBox="1"/>
-          <p:nvPr/>
-        </p:nvSpPr>
-        <p:spPr>
-          <a:xfrm>
-            <a:off x="838200" y="2859858"/>
-            <a:ext cx="2944589" cy="369332"/>
-          </a:xfrm>
-          <a:prstGeom prst="rect">
-            <a:avLst/>
-          </a:prstGeom>
-          <a:noFill/>
-        </p:spPr>
-        <p:txBody>
-          <a:bodyPr wrap="none" rtlCol="0">
-            <a:spAutoFit/>
-          </a:bodyPr>
-          <a:lstStyle/>
-          <a:p>
-            <a:r>
-              <a:rPr lang="de-DE" u="sng" dirty="0"/>
-              <a:t>Dimension Verkaufsvorgang</a:t>
-            </a:r>
-          </a:p>
-        </p:txBody>
-      </p:sp>
-      <p:sp>
-        <p:nvSpPr>
-          <p:cNvPr id="8" name="Textfeld 7">
-            <a:extLst>
-              <a:ext uri="{FF2B5EF4-FFF2-40B4-BE49-F238E27FC236}">
-                <a16:creationId xmlns:a16="http://schemas.microsoft.com/office/drawing/2014/main" id="{9B3F62D3-5C4A-293E-DDC9-86D6DE180307}"/>
-              </a:ext>
-            </a:extLst>
-          </p:cNvPr>
-          <p:cNvSpPr txBox="1"/>
-          <p:nvPr/>
-        </p:nvSpPr>
-        <p:spPr>
-          <a:xfrm>
-            <a:off x="8763000" y="1506022"/>
-            <a:ext cx="1990545" cy="369332"/>
-          </a:xfrm>
-          <a:prstGeom prst="rect">
-            <a:avLst/>
-          </a:prstGeom>
-          <a:noFill/>
-        </p:spPr>
-        <p:txBody>
-          <a:bodyPr wrap="none" rtlCol="0">
-            <a:spAutoFit/>
-          </a:bodyPr>
-          <a:lstStyle/>
-          <a:p>
-            <a:r>
-              <a:rPr lang="de-DE" u="sng" dirty="0"/>
-              <a:t>Dimension Datum</a:t>
-            </a:r>
-          </a:p>
-        </p:txBody>
-      </p:sp>
-      <p:sp>
-        <p:nvSpPr>
-          <p:cNvPr id="10" name="Textfeld 9">
-            <a:extLst>
-              <a:ext uri="{FF2B5EF4-FFF2-40B4-BE49-F238E27FC236}">
-                <a16:creationId xmlns:a16="http://schemas.microsoft.com/office/drawing/2014/main" id="{D8D8EC8A-04C8-94DC-BC27-AB08E6F9504B}"/>
-              </a:ext>
-            </a:extLst>
-          </p:cNvPr>
-          <p:cNvSpPr txBox="1"/>
-          <p:nvPr/>
-        </p:nvSpPr>
-        <p:spPr>
-          <a:xfrm>
-            <a:off x="6312955" y="1069722"/>
-            <a:ext cx="1680268" cy="369332"/>
-          </a:xfrm>
-          <a:prstGeom prst="rect">
-            <a:avLst/>
-          </a:prstGeom>
-          <a:noFill/>
-        </p:spPr>
-        <p:txBody>
-          <a:bodyPr wrap="none" rtlCol="0">
-            <a:spAutoFit/>
-          </a:bodyPr>
-          <a:lstStyle/>
-          <a:p>
-            <a:r>
-              <a:rPr lang="de-DE" u="sng" dirty="0"/>
-              <a:t>Dimension Zeit</a:t>
-            </a:r>
-          </a:p>
-        </p:txBody>
-      </p:sp>
-      <p:sp>
-        <p:nvSpPr>
-          <p:cNvPr id="12" name="Textfeld 11">
-            <a:extLst>
-              <a:ext uri="{FF2B5EF4-FFF2-40B4-BE49-F238E27FC236}">
-                <a16:creationId xmlns:a16="http://schemas.microsoft.com/office/drawing/2014/main" id="{3DE37009-6E01-95A7-908C-6E3CB738357C}"/>
-              </a:ext>
-            </a:extLst>
-          </p:cNvPr>
-          <p:cNvSpPr txBox="1"/>
-          <p:nvPr/>
-        </p:nvSpPr>
-        <p:spPr>
-          <a:xfrm>
-            <a:off x="6108739" y="3244334"/>
-            <a:ext cx="1901226" cy="369332"/>
-          </a:xfrm>
-          <a:prstGeom prst="rect">
-            <a:avLst/>
-          </a:prstGeom>
-          <a:noFill/>
-        </p:spPr>
-        <p:txBody>
-          <a:bodyPr wrap="none" rtlCol="0">
-            <a:spAutoFit/>
-          </a:bodyPr>
-          <a:lstStyle/>
-          <a:p>
-            <a:r>
-              <a:rPr lang="de-DE" u="sng" dirty="0"/>
-              <a:t>Dimension Filiale</a:t>
-            </a:r>
-          </a:p>
-        </p:txBody>
-      </p:sp>
-      <p:sp>
-        <p:nvSpPr>
-          <p:cNvPr id="14" name="Textfeld 13">
-            <a:extLst>
-              <a:ext uri="{FF2B5EF4-FFF2-40B4-BE49-F238E27FC236}">
-                <a16:creationId xmlns:a16="http://schemas.microsoft.com/office/drawing/2014/main" id="{90F2C1CE-776F-E6F4-BA3D-39ABFEA8CCA9}"/>
-              </a:ext>
-            </a:extLst>
-          </p:cNvPr>
-          <p:cNvSpPr txBox="1"/>
-          <p:nvPr/>
-        </p:nvSpPr>
-        <p:spPr>
-          <a:xfrm>
-            <a:off x="1411224" y="4104299"/>
-            <a:ext cx="2085379" cy="369332"/>
-          </a:xfrm>
-          <a:prstGeom prst="rect">
-            <a:avLst/>
-          </a:prstGeom>
-          <a:noFill/>
-        </p:spPr>
-        <p:txBody>
-          <a:bodyPr wrap="none" rtlCol="0">
-            <a:spAutoFit/>
-          </a:bodyPr>
-          <a:lstStyle/>
-          <a:p>
-            <a:r>
-              <a:rPr lang="de-DE" u="sng" dirty="0"/>
-              <a:t>Dimension Produkt</a:t>
-            </a:r>
-          </a:p>
-        </p:txBody>
-      </p:sp>
-      <p:sp>
-        <p:nvSpPr>
-          <p:cNvPr id="16" name="Textfeld 15">
-            <a:extLst>
-              <a:ext uri="{FF2B5EF4-FFF2-40B4-BE49-F238E27FC236}">
-                <a16:creationId xmlns:a16="http://schemas.microsoft.com/office/drawing/2014/main" id="{8B669590-7EE9-E0EE-1719-D3F02D7D75F5}"/>
-              </a:ext>
-            </a:extLst>
-          </p:cNvPr>
-          <p:cNvSpPr txBox="1"/>
-          <p:nvPr/>
-        </p:nvSpPr>
-        <p:spPr>
-          <a:xfrm>
-            <a:off x="6169699" y="1378389"/>
-            <a:ext cx="2593301" cy="738664"/>
-          </a:xfrm>
-          <a:prstGeom prst="rect">
-            <a:avLst/>
-          </a:prstGeom>
-          <a:noFill/>
-        </p:spPr>
-        <p:txBody>
-          <a:bodyPr wrap="square" rtlCol="0">
-            <a:spAutoFit/>
-          </a:bodyPr>
-          <a:lstStyle/>
-          <a:p>
-            <a:r>
-              <a:rPr lang="de-DE" sz="1400" dirty="0"/>
-              <a:t>Wird vollständig zu Beginn angelegt und ändert sich dann nicht mehr</a:t>
-            </a:r>
-          </a:p>
-        </p:txBody>
-      </p:sp>
-    </p:spTree>
-    <p:extLst>
-      <p:ext uri="{BB962C8B-B14F-4D97-AF65-F5344CB8AC3E}">
-        <p14:creationId xmlns:p14="http://schemas.microsoft.com/office/powerpoint/2010/main" val="4178603353"/>
       </p:ext>
     </p:extLst>
   </p:cSld>
@@ -4863,7 +4752,7 @@
           <p:cNvPr id="2" name="Titel 1">
             <a:extLst>
               <a:ext uri="{FF2B5EF4-FFF2-40B4-BE49-F238E27FC236}">
-                <a16:creationId xmlns:a16="http://schemas.microsoft.com/office/drawing/2014/main" id="{F3530890-A338-17B9-45E2-17100BB72C32}"/>
+                <a16:creationId xmlns:a16="http://schemas.microsoft.com/office/drawing/2014/main" id="{3D506AFC-55D7-40D5-84C4-433E6F84B2D6}"/>
               </a:ext>
             </a:extLst>
           </p:cNvPr>
@@ -4881,7 +4770,7 @@
           <a:p>
             <a:r>
               <a:rPr lang="de-DE" dirty="0"/>
-              <a:t>Highlights, Probleme und Ratschläge</a:t>
+              <a:t>Schedule von ETL</a:t>
             </a:r>
           </a:p>
         </p:txBody>
@@ -4891,7 +4780,7 @@
           <p:cNvPr id="3" name="Inhaltsplatzhalter 2">
             <a:extLst>
               <a:ext uri="{FF2B5EF4-FFF2-40B4-BE49-F238E27FC236}">
-                <a16:creationId xmlns:a16="http://schemas.microsoft.com/office/drawing/2014/main" id="{B40B26C1-8FAA-BDD3-23E1-57BAD8C574AC}"/>
+                <a16:creationId xmlns:a16="http://schemas.microsoft.com/office/drawing/2014/main" id="{0480BDF2-C30D-4EBB-B71C-961D344D3752}"/>
               </a:ext>
             </a:extLst>
           </p:cNvPr>
@@ -4907,6 +4796,112 @@
           <a:bodyPr/>
           <a:lstStyle/>
           <a:p>
+            <a:r>
+              <a:rPr lang="de-DE" dirty="0" err="1"/>
+              <a:t>D_Datum</a:t>
+            </a:r>
+            <a:r>
+              <a:rPr lang="de-DE" dirty="0"/>
+              <a:t>: 1x jährlich</a:t>
+            </a:r>
+          </a:p>
+          <a:p>
+            <a:r>
+              <a:rPr lang="de-DE" dirty="0" err="1"/>
+              <a:t>D_Zeit</a:t>
+            </a:r>
+            <a:r>
+              <a:rPr lang="de-DE" dirty="0"/>
+              <a:t>: einmalig</a:t>
+            </a:r>
+          </a:p>
+          <a:p>
+            <a:r>
+              <a:rPr lang="de-DE" dirty="0" err="1"/>
+              <a:t>D_Verkäufer</a:t>
+            </a:r>
+            <a:r>
+              <a:rPr lang="de-DE" dirty="0"/>
+              <a:t>: 1x monatlich</a:t>
+            </a:r>
+          </a:p>
+          <a:p>
+            <a:r>
+              <a:rPr lang="de-DE" dirty="0" err="1"/>
+              <a:t>D_Verkaufsvorgänge</a:t>
+            </a:r>
+            <a:r>
+              <a:rPr lang="de-DE" dirty="0"/>
+              <a:t>: 1x täglich</a:t>
+            </a:r>
+          </a:p>
+          <a:p>
+            <a:r>
+              <a:rPr lang="de-DE" dirty="0" err="1"/>
+              <a:t>D_Filialen</a:t>
+            </a:r>
+            <a:r>
+              <a:rPr lang="de-DE" dirty="0"/>
+              <a:t>: 1x monatlich</a:t>
+            </a:r>
+          </a:p>
+          <a:p>
+            <a:r>
+              <a:rPr lang="de-DE" dirty="0" err="1"/>
+              <a:t>D_Produkte</a:t>
+            </a:r>
+            <a:r>
+              <a:rPr lang="de-DE" dirty="0"/>
+              <a:t>: 1x wöchentlich</a:t>
+            </a:r>
+          </a:p>
+          <a:p>
+            <a:r>
+              <a:rPr lang="de-DE" dirty="0" err="1"/>
+              <a:t>F_Verkäufe</a:t>
+            </a:r>
+            <a:r>
+              <a:rPr lang="de-DE" dirty="0"/>
+              <a:t>: 1x täglich</a:t>
+            </a:r>
+          </a:p>
+          <a:p>
+            <a:r>
+              <a:rPr lang="de-DE" dirty="0" err="1"/>
+              <a:t>F_Verkäuferumsatz</a:t>
+            </a:r>
+            <a:r>
+              <a:rPr lang="de-DE" dirty="0"/>
+              <a:t>: 1x täglich</a:t>
+            </a:r>
+          </a:p>
+        </p:txBody>
+      </p:sp>
+      <p:sp>
+        <p:nvSpPr>
+          <p:cNvPr id="4" name="Foliennummernplatzhalter 3">
+            <a:extLst>
+              <a:ext uri="{FF2B5EF4-FFF2-40B4-BE49-F238E27FC236}">
+                <a16:creationId xmlns:a16="http://schemas.microsoft.com/office/drawing/2014/main" id="{75771698-8527-EB68-0C9B-54224694B64F}"/>
+              </a:ext>
+            </a:extLst>
+          </p:cNvPr>
+          <p:cNvSpPr>
+            <a:spLocks noGrp="1"/>
+          </p:cNvSpPr>
+          <p:nvPr>
+            <p:ph type="sldNum" sz="quarter" idx="12"/>
+          </p:nvPr>
+        </p:nvSpPr>
+        <p:spPr/>
+        <p:txBody>
+          <a:bodyPr/>
+          <a:lstStyle/>
+          <a:p>
+            <a:fld id="{9B251280-DAE6-4033-B7F4-5E0D817A0287}" type="slidenum">
+              <a:rPr lang="de-DE" smtClean="0"/>
+              <a:t>12</a:t>
+            </a:fld>
             <a:endParaRPr lang="de-DE"/>
           </a:p>
         </p:txBody>
@@ -4914,7 +4909,546 @@
     </p:spTree>
     <p:extLst>
       <p:ext uri="{BB962C8B-B14F-4D97-AF65-F5344CB8AC3E}">
-        <p14:creationId xmlns:p14="http://schemas.microsoft.com/office/powerpoint/2010/main" val="2784786867"/>
+        <p14:creationId xmlns:p14="http://schemas.microsoft.com/office/powerpoint/2010/main" val="4114964035"/>
+      </p:ext>
+    </p:extLst>
+  </p:cSld>
+  <p:clrMapOvr>
+    <a:masterClrMapping/>
+  </p:clrMapOvr>
+</p:sld>
+</file>
+
+<file path=ppt/slides/slide13.xml><?xml version="1.0" encoding="utf-8"?>
+<p:sld xmlns:a="http://schemas.openxmlformats.org/drawingml/2006/main" xmlns:r="http://schemas.openxmlformats.org/officeDocument/2006/relationships" xmlns:p="http://schemas.openxmlformats.org/presentationml/2006/main">
+  <p:cSld>
+    <p:spTree>
+      <p:nvGrpSpPr>
+        <p:cNvPr id="1" name=""/>
+        <p:cNvGrpSpPr/>
+        <p:nvPr/>
+      </p:nvGrpSpPr>
+      <p:grpSpPr>
+        <a:xfrm>
+          <a:off x="0" y="0"/>
+          <a:ext cx="0" cy="0"/>
+          <a:chOff x="0" y="0"/>
+          <a:chExt cx="0" cy="0"/>
+        </a:xfrm>
+      </p:grpSpPr>
+      <p:sp>
+        <p:nvSpPr>
+          <p:cNvPr id="2" name="Titel 1">
+            <a:extLst>
+              <a:ext uri="{FF2B5EF4-FFF2-40B4-BE49-F238E27FC236}">
+                <a16:creationId xmlns:a16="http://schemas.microsoft.com/office/drawing/2014/main" id="{8369FE8D-0CB5-4023-A492-99B9D3B8977F}"/>
+              </a:ext>
+            </a:extLst>
+          </p:cNvPr>
+          <p:cNvSpPr>
+            <a:spLocks noGrp="1"/>
+          </p:cNvSpPr>
+          <p:nvPr>
+            <p:ph type="title"/>
+          </p:nvPr>
+        </p:nvSpPr>
+        <p:spPr/>
+        <p:txBody>
+          <a:bodyPr/>
+          <a:lstStyle/>
+          <a:p>
+            <a:r>
+              <a:rPr lang="de-DE" dirty="0"/>
+              <a:t>Was haben wir gelernt?</a:t>
+            </a:r>
+          </a:p>
+        </p:txBody>
+      </p:sp>
+      <p:sp>
+        <p:nvSpPr>
+          <p:cNvPr id="3" name="Inhaltsplatzhalter 2">
+            <a:extLst>
+              <a:ext uri="{FF2B5EF4-FFF2-40B4-BE49-F238E27FC236}">
+                <a16:creationId xmlns:a16="http://schemas.microsoft.com/office/drawing/2014/main" id="{54BD74B3-4CB1-49EE-BE27-797EDCCA8A49}"/>
+              </a:ext>
+            </a:extLst>
+          </p:cNvPr>
+          <p:cNvSpPr>
+            <a:spLocks noGrp="1"/>
+          </p:cNvSpPr>
+          <p:nvPr>
+            <p:ph idx="1"/>
+          </p:nvPr>
+        </p:nvSpPr>
+        <p:spPr/>
+        <p:txBody>
+          <a:bodyPr/>
+          <a:lstStyle/>
+          <a:p>
+            <a:r>
+              <a:rPr lang="de-DE" dirty="0"/>
+              <a:t>Entscheidungen, die in der BDB unwichtig wirken, können bei der Realisation des DWH und besonders des ETL zu deutlich erhöhter Komplexität führen</a:t>
+            </a:r>
+          </a:p>
+          <a:p>
+            <a:r>
+              <a:rPr lang="de-DE" dirty="0"/>
+              <a:t> Wir mussten sehr viele Dinge, die für die Realität sinnvoll gewesen wären, weglassen, um den Rahmen nicht zu sprengen</a:t>
+            </a:r>
+            <a:br>
+              <a:rPr lang="de-DE" dirty="0"/>
+            </a:br>
+            <a:r>
+              <a:rPr lang="de-DE" dirty="0">
+                <a:sym typeface="Wingdings" panose="05000000000000000000" pitchFamily="2" charset="2"/>
+              </a:rPr>
+              <a:t> Reale Projekte sind nochmal deutlich umfangreicher</a:t>
+            </a:r>
+            <a:endParaRPr lang="de-DE" dirty="0"/>
+          </a:p>
+        </p:txBody>
+      </p:sp>
+      <p:sp>
+        <p:nvSpPr>
+          <p:cNvPr id="4" name="Foliennummernplatzhalter 3">
+            <a:extLst>
+              <a:ext uri="{FF2B5EF4-FFF2-40B4-BE49-F238E27FC236}">
+                <a16:creationId xmlns:a16="http://schemas.microsoft.com/office/drawing/2014/main" id="{437004E8-2310-0224-4296-3F47543FC5EA}"/>
+              </a:ext>
+            </a:extLst>
+          </p:cNvPr>
+          <p:cNvSpPr>
+            <a:spLocks noGrp="1"/>
+          </p:cNvSpPr>
+          <p:nvPr>
+            <p:ph type="sldNum" sz="quarter" idx="12"/>
+          </p:nvPr>
+        </p:nvSpPr>
+        <p:spPr/>
+        <p:txBody>
+          <a:bodyPr/>
+          <a:lstStyle/>
+          <a:p>
+            <a:fld id="{9B251280-DAE6-4033-B7F4-5E0D817A0287}" type="slidenum">
+              <a:rPr lang="de-DE" smtClean="0"/>
+              <a:t>13</a:t>
+            </a:fld>
+            <a:endParaRPr lang="de-DE"/>
+          </a:p>
+        </p:txBody>
+      </p:sp>
+    </p:spTree>
+    <p:extLst>
+      <p:ext uri="{BB962C8B-B14F-4D97-AF65-F5344CB8AC3E}">
+        <p14:creationId xmlns:p14="http://schemas.microsoft.com/office/powerpoint/2010/main" val="2015700556"/>
+      </p:ext>
+    </p:extLst>
+  </p:cSld>
+  <p:clrMapOvr>
+    <a:masterClrMapping/>
+  </p:clrMapOvr>
+</p:sld>
+</file>
+
+<file path=ppt/slides/slide14.xml><?xml version="1.0" encoding="utf-8"?>
+<p:sld xmlns:a="http://schemas.openxmlformats.org/drawingml/2006/main" xmlns:r="http://schemas.openxmlformats.org/officeDocument/2006/relationships" xmlns:p="http://schemas.openxmlformats.org/presentationml/2006/main">
+  <p:cSld>
+    <p:spTree>
+      <p:nvGrpSpPr>
+        <p:cNvPr id="1" name=""/>
+        <p:cNvGrpSpPr/>
+        <p:nvPr/>
+      </p:nvGrpSpPr>
+      <p:grpSpPr>
+        <a:xfrm>
+          <a:off x="0" y="0"/>
+          <a:ext cx="0" cy="0"/>
+          <a:chOff x="0" y="0"/>
+          <a:chExt cx="0" cy="0"/>
+        </a:xfrm>
+      </p:grpSpPr>
+      <p:sp>
+        <p:nvSpPr>
+          <p:cNvPr id="2" name="Titel 1">
+            <a:extLst>
+              <a:ext uri="{FF2B5EF4-FFF2-40B4-BE49-F238E27FC236}">
+                <a16:creationId xmlns:a16="http://schemas.microsoft.com/office/drawing/2014/main" id="{C81934A0-B267-A2F4-1A0D-57EDE9168D86}"/>
+              </a:ext>
+            </a:extLst>
+          </p:cNvPr>
+          <p:cNvSpPr>
+            <a:spLocks noGrp="1"/>
+          </p:cNvSpPr>
+          <p:nvPr>
+            <p:ph type="title"/>
+          </p:nvPr>
+        </p:nvSpPr>
+        <p:spPr>
+          <a:xfrm>
+            <a:off x="697992" y="365125"/>
+            <a:ext cx="10515600" cy="1325563"/>
+          </a:xfrm>
+        </p:spPr>
+        <p:txBody>
+          <a:bodyPr/>
+          <a:lstStyle/>
+          <a:p>
+            <a:r>
+              <a:rPr lang="de-DE" dirty="0"/>
+              <a:t>Highlights</a:t>
+            </a:r>
+          </a:p>
+        </p:txBody>
+      </p:sp>
+      <p:sp>
+        <p:nvSpPr>
+          <p:cNvPr id="3" name="Inhaltsplatzhalter 2">
+            <a:extLst>
+              <a:ext uri="{FF2B5EF4-FFF2-40B4-BE49-F238E27FC236}">
+                <a16:creationId xmlns:a16="http://schemas.microsoft.com/office/drawing/2014/main" id="{F9B0685B-2211-B2A2-3B31-771E1EDA7435}"/>
+              </a:ext>
+            </a:extLst>
+          </p:cNvPr>
+          <p:cNvSpPr>
+            <a:spLocks noGrp="1"/>
+          </p:cNvSpPr>
+          <p:nvPr>
+            <p:ph idx="1"/>
+          </p:nvPr>
+        </p:nvSpPr>
+        <p:spPr>
+          <a:xfrm>
+            <a:off x="697992" y="1422802"/>
+            <a:ext cx="10515600" cy="2197735"/>
+          </a:xfrm>
+        </p:spPr>
+        <p:txBody>
+          <a:bodyPr/>
+          <a:lstStyle/>
+          <a:p>
+            <a:r>
+              <a:rPr lang="de-DE" dirty="0"/>
+              <a:t>Aufsetzen der Datenbank</a:t>
+            </a:r>
+          </a:p>
+          <a:p>
+            <a:r>
+              <a:rPr lang="de-DE" dirty="0"/>
+              <a:t>Testen von Abfragen</a:t>
+            </a:r>
+          </a:p>
+          <a:p>
+            <a:r>
+              <a:rPr lang="de-DE" dirty="0"/>
+              <a:t>Angenehme und konstruktive Teamarbeit</a:t>
+            </a:r>
+          </a:p>
+          <a:p>
+            <a:r>
+              <a:rPr lang="de-DE" dirty="0"/>
+              <a:t>Praktische und gesammelte Anwendung der Kursinhalte</a:t>
+            </a:r>
+          </a:p>
+        </p:txBody>
+      </p:sp>
+      <p:sp>
+        <p:nvSpPr>
+          <p:cNvPr id="4" name="Foliennummernplatzhalter 3">
+            <a:extLst>
+              <a:ext uri="{FF2B5EF4-FFF2-40B4-BE49-F238E27FC236}">
+                <a16:creationId xmlns:a16="http://schemas.microsoft.com/office/drawing/2014/main" id="{98130954-41BD-47BA-02A1-D80BD511D557}"/>
+              </a:ext>
+            </a:extLst>
+          </p:cNvPr>
+          <p:cNvSpPr>
+            <a:spLocks noGrp="1"/>
+          </p:cNvSpPr>
+          <p:nvPr>
+            <p:ph type="sldNum" sz="quarter" idx="12"/>
+          </p:nvPr>
+        </p:nvSpPr>
+        <p:spPr/>
+        <p:txBody>
+          <a:bodyPr/>
+          <a:lstStyle/>
+          <a:p>
+            <a:fld id="{9B251280-DAE6-4033-B7F4-5E0D817A0287}" type="slidenum">
+              <a:rPr lang="de-DE" smtClean="0"/>
+              <a:t>14</a:t>
+            </a:fld>
+            <a:endParaRPr lang="de-DE"/>
+          </a:p>
+        </p:txBody>
+      </p:sp>
+      <p:sp>
+        <p:nvSpPr>
+          <p:cNvPr id="5" name="Titel 1">
+            <a:extLst>
+              <a:ext uri="{FF2B5EF4-FFF2-40B4-BE49-F238E27FC236}">
+                <a16:creationId xmlns:a16="http://schemas.microsoft.com/office/drawing/2014/main" id="{512121AE-64ED-50D6-C549-A61B4D0DD65D}"/>
+              </a:ext>
+            </a:extLst>
+          </p:cNvPr>
+          <p:cNvSpPr txBox="1">
+            <a:spLocks/>
+          </p:cNvSpPr>
+          <p:nvPr/>
+        </p:nvSpPr>
+        <p:spPr>
+          <a:xfrm>
+            <a:off x="697992" y="3352651"/>
+            <a:ext cx="10515600" cy="1325563"/>
+          </a:xfrm>
+          <a:prstGeom prst="rect">
+            <a:avLst/>
+          </a:prstGeom>
+        </p:spPr>
+        <p:txBody>
+          <a:bodyPr vert="horz" lIns="91440" tIns="45720" rIns="91440" bIns="45720" rtlCol="0" anchor="ctr">
+            <a:normAutofit/>
+          </a:bodyPr>
+          <a:lstStyle>
+            <a:lvl1pPr algn="l" defTabSz="914400" rtl="0" eaLnBrk="1" latinLnBrk="0" hangingPunct="1">
+              <a:lnSpc>
+                <a:spcPct val="90000"/>
+              </a:lnSpc>
+              <a:spcBef>
+                <a:spcPct val="0"/>
+              </a:spcBef>
+              <a:buNone/>
+              <a:defRPr sz="4400" kern="1200">
+                <a:solidFill>
+                  <a:schemeClr val="tx1"/>
+                </a:solidFill>
+                <a:latin typeface="+mj-lt"/>
+                <a:ea typeface="+mj-ea"/>
+                <a:cs typeface="+mj-cs"/>
+              </a:defRPr>
+            </a:lvl1pPr>
+          </a:lstStyle>
+          <a:p>
+            <a:r>
+              <a:rPr lang="de-DE" dirty="0"/>
+              <a:t>Ratschlag</a:t>
+            </a:r>
+          </a:p>
+        </p:txBody>
+      </p:sp>
+      <p:sp>
+        <p:nvSpPr>
+          <p:cNvPr id="6" name="Inhaltsplatzhalter 2">
+            <a:extLst>
+              <a:ext uri="{FF2B5EF4-FFF2-40B4-BE49-F238E27FC236}">
+                <a16:creationId xmlns:a16="http://schemas.microsoft.com/office/drawing/2014/main" id="{FE729088-F7AE-CB09-A898-04E5D75BD0E3}"/>
+              </a:ext>
+            </a:extLst>
+          </p:cNvPr>
+          <p:cNvSpPr txBox="1">
+            <a:spLocks/>
+          </p:cNvSpPr>
+          <p:nvPr/>
+        </p:nvSpPr>
+        <p:spPr>
+          <a:xfrm>
+            <a:off x="697992" y="4410329"/>
+            <a:ext cx="10515600" cy="1045591"/>
+          </a:xfrm>
+          <a:prstGeom prst="rect">
+            <a:avLst/>
+          </a:prstGeom>
+        </p:spPr>
+        <p:txBody>
+          <a:bodyPr vert="horz" lIns="91440" tIns="45720" rIns="91440" bIns="45720" rtlCol="0">
+            <a:normAutofit/>
+          </a:bodyPr>
+          <a:lstStyle>
+            <a:lvl1pPr marL="228600" indent="-228600" algn="l" defTabSz="914400" rtl="0" eaLnBrk="1" latinLnBrk="0" hangingPunct="1">
+              <a:lnSpc>
+                <a:spcPct val="90000"/>
+              </a:lnSpc>
+              <a:spcBef>
+                <a:spcPts val="1000"/>
+              </a:spcBef>
+              <a:buFont typeface="Arial" panose="020B0604020202020204" pitchFamily="34" charset="0"/>
+              <a:buChar char="•"/>
+              <a:defRPr sz="2800" kern="1200">
+                <a:solidFill>
+                  <a:schemeClr val="tx1"/>
+                </a:solidFill>
+                <a:latin typeface="+mn-lt"/>
+                <a:ea typeface="+mn-ea"/>
+                <a:cs typeface="+mn-cs"/>
+              </a:defRPr>
+            </a:lvl1pPr>
+            <a:lvl2pPr marL="685800" indent="-228600" algn="l" defTabSz="914400" rtl="0" eaLnBrk="1" latinLnBrk="0" hangingPunct="1">
+              <a:lnSpc>
+                <a:spcPct val="90000"/>
+              </a:lnSpc>
+              <a:spcBef>
+                <a:spcPts val="500"/>
+              </a:spcBef>
+              <a:buFont typeface="Arial" panose="020B0604020202020204" pitchFamily="34" charset="0"/>
+              <a:buChar char="•"/>
+              <a:defRPr sz="2400" kern="1200">
+                <a:solidFill>
+                  <a:schemeClr val="tx1"/>
+                </a:solidFill>
+                <a:latin typeface="+mn-lt"/>
+                <a:ea typeface="+mn-ea"/>
+                <a:cs typeface="+mn-cs"/>
+              </a:defRPr>
+            </a:lvl2pPr>
+            <a:lvl3pPr marL="1143000" indent="-228600" algn="l" defTabSz="914400" rtl="0" eaLnBrk="1" latinLnBrk="0" hangingPunct="1">
+              <a:lnSpc>
+                <a:spcPct val="90000"/>
+              </a:lnSpc>
+              <a:spcBef>
+                <a:spcPts val="500"/>
+              </a:spcBef>
+              <a:buFont typeface="Arial" panose="020B0604020202020204" pitchFamily="34" charset="0"/>
+              <a:buChar char="•"/>
+              <a:defRPr sz="2000" kern="1200">
+                <a:solidFill>
+                  <a:schemeClr val="tx1"/>
+                </a:solidFill>
+                <a:latin typeface="+mn-lt"/>
+                <a:ea typeface="+mn-ea"/>
+                <a:cs typeface="+mn-cs"/>
+              </a:defRPr>
+            </a:lvl3pPr>
+            <a:lvl4pPr marL="1600200" indent="-228600" algn="l" defTabSz="914400" rtl="0" eaLnBrk="1" latinLnBrk="0" hangingPunct="1">
+              <a:lnSpc>
+                <a:spcPct val="90000"/>
+              </a:lnSpc>
+              <a:spcBef>
+                <a:spcPts val="500"/>
+              </a:spcBef>
+              <a:buFont typeface="Arial" panose="020B0604020202020204" pitchFamily="34" charset="0"/>
+              <a:buChar char="•"/>
+              <a:defRPr sz="1800" kern="1200">
+                <a:solidFill>
+                  <a:schemeClr val="tx1"/>
+                </a:solidFill>
+                <a:latin typeface="+mn-lt"/>
+                <a:ea typeface="+mn-ea"/>
+                <a:cs typeface="+mn-cs"/>
+              </a:defRPr>
+            </a:lvl4pPr>
+            <a:lvl5pPr marL="2057400" indent="-228600" algn="l" defTabSz="914400" rtl="0" eaLnBrk="1" latinLnBrk="0" hangingPunct="1">
+              <a:lnSpc>
+                <a:spcPct val="90000"/>
+              </a:lnSpc>
+              <a:spcBef>
+                <a:spcPts val="500"/>
+              </a:spcBef>
+              <a:buFont typeface="Arial" panose="020B0604020202020204" pitchFamily="34" charset="0"/>
+              <a:buChar char="•"/>
+              <a:defRPr sz="1800" kern="1200">
+                <a:solidFill>
+                  <a:schemeClr val="tx1"/>
+                </a:solidFill>
+                <a:latin typeface="+mn-lt"/>
+                <a:ea typeface="+mn-ea"/>
+                <a:cs typeface="+mn-cs"/>
+              </a:defRPr>
+            </a:lvl5pPr>
+            <a:lvl6pPr marL="2514600" indent="-228600" algn="l" defTabSz="914400" rtl="0" eaLnBrk="1" latinLnBrk="0" hangingPunct="1">
+              <a:lnSpc>
+                <a:spcPct val="90000"/>
+              </a:lnSpc>
+              <a:spcBef>
+                <a:spcPts val="500"/>
+              </a:spcBef>
+              <a:buFont typeface="Arial" panose="020B0604020202020204" pitchFamily="34" charset="0"/>
+              <a:buChar char="•"/>
+              <a:defRPr sz="1800" kern="1200">
+                <a:solidFill>
+                  <a:schemeClr val="tx1"/>
+                </a:solidFill>
+                <a:latin typeface="+mn-lt"/>
+                <a:ea typeface="+mn-ea"/>
+                <a:cs typeface="+mn-cs"/>
+              </a:defRPr>
+            </a:lvl6pPr>
+            <a:lvl7pPr marL="2971800" indent="-228600" algn="l" defTabSz="914400" rtl="0" eaLnBrk="1" latinLnBrk="0" hangingPunct="1">
+              <a:lnSpc>
+                <a:spcPct val="90000"/>
+              </a:lnSpc>
+              <a:spcBef>
+                <a:spcPts val="500"/>
+              </a:spcBef>
+              <a:buFont typeface="Arial" panose="020B0604020202020204" pitchFamily="34" charset="0"/>
+              <a:buChar char="•"/>
+              <a:defRPr sz="1800" kern="1200">
+                <a:solidFill>
+                  <a:schemeClr val="tx1"/>
+                </a:solidFill>
+                <a:latin typeface="+mn-lt"/>
+                <a:ea typeface="+mn-ea"/>
+                <a:cs typeface="+mn-cs"/>
+              </a:defRPr>
+            </a:lvl7pPr>
+            <a:lvl8pPr marL="3429000" indent="-228600" algn="l" defTabSz="914400" rtl="0" eaLnBrk="1" latinLnBrk="0" hangingPunct="1">
+              <a:lnSpc>
+                <a:spcPct val="90000"/>
+              </a:lnSpc>
+              <a:spcBef>
+                <a:spcPts val="500"/>
+              </a:spcBef>
+              <a:buFont typeface="Arial" panose="020B0604020202020204" pitchFamily="34" charset="0"/>
+              <a:buChar char="•"/>
+              <a:defRPr sz="1800" kern="1200">
+                <a:solidFill>
+                  <a:schemeClr val="tx1"/>
+                </a:solidFill>
+                <a:latin typeface="+mn-lt"/>
+                <a:ea typeface="+mn-ea"/>
+                <a:cs typeface="+mn-cs"/>
+              </a:defRPr>
+            </a:lvl8pPr>
+            <a:lvl9pPr marL="3886200" indent="-228600" algn="l" defTabSz="914400" rtl="0" eaLnBrk="1" latinLnBrk="0" hangingPunct="1">
+              <a:lnSpc>
+                <a:spcPct val="90000"/>
+              </a:lnSpc>
+              <a:spcBef>
+                <a:spcPts val="500"/>
+              </a:spcBef>
+              <a:buFont typeface="Arial" panose="020B0604020202020204" pitchFamily="34" charset="0"/>
+              <a:buChar char="•"/>
+              <a:defRPr sz="1800" kern="1200">
+                <a:solidFill>
+                  <a:schemeClr val="tx1"/>
+                </a:solidFill>
+                <a:latin typeface="+mn-lt"/>
+                <a:ea typeface="+mn-ea"/>
+                <a:cs typeface="+mn-cs"/>
+              </a:defRPr>
+            </a:lvl9pPr>
+          </a:lstStyle>
+          <a:p>
+            <a:r>
+              <a:rPr lang="de-DE" dirty="0"/>
+              <a:t>Das Management Studio macht nicht, was es soll?</a:t>
+            </a:r>
+          </a:p>
+          <a:p>
+            <a:pPr marL="0" indent="0">
+              <a:buNone/>
+            </a:pPr>
+            <a:r>
+              <a:rPr lang="de-DE" dirty="0">
+                <a:sym typeface="Wingdings" panose="05000000000000000000" pitchFamily="2" charset="2"/>
+              </a:rPr>
+              <a:t> Neustart hilft meistens</a:t>
+            </a:r>
+            <a:endParaRPr lang="de-DE" dirty="0"/>
+          </a:p>
+        </p:txBody>
+      </p:sp>
+    </p:spTree>
+    <p:extLst>
+      <p:ext uri="{BB962C8B-B14F-4D97-AF65-F5344CB8AC3E}">
+        <p14:creationId xmlns:p14="http://schemas.microsoft.com/office/powerpoint/2010/main" val="3532617835"/>
       </p:ext>
     </p:extLst>
   </p:cSld>
@@ -5042,6 +5576,35 @@
               <a:buNone/>
             </a:pPr>
             <a:endParaRPr lang="de-DE" dirty="0"/>
+          </a:p>
+        </p:txBody>
+      </p:sp>
+      <p:sp>
+        <p:nvSpPr>
+          <p:cNvPr id="4" name="Foliennummernplatzhalter 3">
+            <a:extLst>
+              <a:ext uri="{FF2B5EF4-FFF2-40B4-BE49-F238E27FC236}">
+                <a16:creationId xmlns:a16="http://schemas.microsoft.com/office/drawing/2014/main" id="{91C5491F-E57B-2180-E0B2-F2807057FCF5}"/>
+              </a:ext>
+            </a:extLst>
+          </p:cNvPr>
+          <p:cNvSpPr>
+            <a:spLocks noGrp="1"/>
+          </p:cNvSpPr>
+          <p:nvPr>
+            <p:ph type="sldNum" sz="quarter" idx="12"/>
+          </p:nvPr>
+        </p:nvSpPr>
+        <p:spPr/>
+        <p:txBody>
+          <a:bodyPr/>
+          <a:lstStyle/>
+          <a:p>
+            <a:fld id="{9B251280-DAE6-4033-B7F4-5E0D817A0287}" type="slidenum">
+              <a:rPr lang="de-DE" smtClean="0"/>
+              <a:t>2</a:t>
+            </a:fld>
+            <a:endParaRPr lang="de-DE"/>
           </a:p>
         </p:txBody>
       </p:sp>
@@ -5077,10 +5640,10 @@
       </p:grpSpPr>
       <p:sp>
         <p:nvSpPr>
-          <p:cNvPr id="4" name="Titel 3">
-            <a:extLst>
-              <a:ext uri="{FF2B5EF4-FFF2-40B4-BE49-F238E27FC236}">
-                <a16:creationId xmlns:a16="http://schemas.microsoft.com/office/drawing/2014/main" id="{D344207B-F6E8-FE0D-1E2A-589531ADD153}"/>
+          <p:cNvPr id="2" name="Titel 1">
+            <a:extLst>
+              <a:ext uri="{FF2B5EF4-FFF2-40B4-BE49-F238E27FC236}">
+                <a16:creationId xmlns:a16="http://schemas.microsoft.com/office/drawing/2014/main" id="{FFB860B5-6996-46D6-BDBA-BB4E12AA309C}"/>
               </a:ext>
             </a:extLst>
           </p:cNvPr>
@@ -5098,32 +5661,97 @@
           <a:p>
             <a:r>
               <a:rPr lang="de-DE" dirty="0"/>
-              <a:t>Business-Datenbank</a:t>
-            </a:r>
-          </a:p>
-        </p:txBody>
-      </p:sp>
-      <p:sp>
-        <p:nvSpPr>
-          <p:cNvPr id="6" name="Textplatzhalter 5">
-            <a:extLst>
-              <a:ext uri="{FF2B5EF4-FFF2-40B4-BE49-F238E27FC236}">
-                <a16:creationId xmlns:a16="http://schemas.microsoft.com/office/drawing/2014/main" id="{956B4F7D-75CB-2BC3-1D22-870DEF942471}"/>
-              </a:ext>
-            </a:extLst>
-          </p:cNvPr>
-          <p:cNvSpPr>
-            <a:spLocks noGrp="1"/>
-          </p:cNvSpPr>
-          <p:nvPr>
-            <p:ph type="body" idx="1"/>
-          </p:nvPr>
-        </p:nvSpPr>
-        <p:spPr/>
-        <p:txBody>
-          <a:bodyPr/>
-          <a:lstStyle/>
-          <a:p>
+              <a:t>Einschränkungen / Randbedingungen</a:t>
+            </a:r>
+          </a:p>
+        </p:txBody>
+      </p:sp>
+      <p:sp>
+        <p:nvSpPr>
+          <p:cNvPr id="3" name="Inhaltsplatzhalter 2">
+            <a:extLst>
+              <a:ext uri="{FF2B5EF4-FFF2-40B4-BE49-F238E27FC236}">
+                <a16:creationId xmlns:a16="http://schemas.microsoft.com/office/drawing/2014/main" id="{A96E3B3A-8665-46F9-9318-9B5104BBC729}"/>
+              </a:ext>
+            </a:extLst>
+          </p:cNvPr>
+          <p:cNvSpPr>
+            <a:spLocks noGrp="1"/>
+          </p:cNvSpPr>
+          <p:nvPr>
+            <p:ph idx="1"/>
+          </p:nvPr>
+        </p:nvSpPr>
+        <p:spPr/>
+        <p:txBody>
+          <a:bodyPr/>
+          <a:lstStyle/>
+          <a:p>
+            <a:r>
+              <a:rPr lang="de-DE" dirty="0"/>
+              <a:t>Bäckereikette mit 50 Filialen</a:t>
+            </a:r>
+          </a:p>
+          <a:p>
+            <a:r>
+              <a:rPr lang="de-DE" dirty="0"/>
+              <a:t>Jede Filiale hat nur eine Kasse mit Profilen je Verkäufer</a:t>
+            </a:r>
+            <a:br>
+              <a:rPr lang="de-DE" dirty="0"/>
+            </a:br>
+            <a:r>
+              <a:rPr lang="de-DE" dirty="0">
+                <a:sym typeface="Wingdings" panose="05000000000000000000" pitchFamily="2" charset="2"/>
+              </a:rPr>
+              <a:t> pro Filiale kann zu einem Zeitpunkt nur ein Verkauf stattfinden</a:t>
+            </a:r>
+          </a:p>
+          <a:p>
+            <a:r>
+              <a:rPr lang="de-DE" dirty="0"/>
+              <a:t>Es gibt eine Personaldatenbank mit allen Mitarbeitern aber im Kassensystem sind nur die Verkäufer gespeichert</a:t>
+            </a:r>
+          </a:p>
+          <a:p>
+            <a:r>
+              <a:rPr lang="de-DE" dirty="0"/>
+              <a:t>Die Bäcker speichern ihre Rezepte in einer Rezeptdatenbank und es gibt verschiedene Versionen, wenn sich Kleinigkeiten ändern, ohne dass es ein neues Produkt wird</a:t>
+            </a:r>
+          </a:p>
+          <a:p>
+            <a:r>
+              <a:rPr lang="de-DE" dirty="0"/>
+              <a:t>Es wird immer nur die aktuellste Produktversion verwendet</a:t>
+            </a:r>
+          </a:p>
+        </p:txBody>
+      </p:sp>
+      <p:sp>
+        <p:nvSpPr>
+          <p:cNvPr id="4" name="Foliennummernplatzhalter 3">
+            <a:extLst>
+              <a:ext uri="{FF2B5EF4-FFF2-40B4-BE49-F238E27FC236}">
+                <a16:creationId xmlns:a16="http://schemas.microsoft.com/office/drawing/2014/main" id="{88F8E208-AC06-343C-8B80-37A324207EBB}"/>
+              </a:ext>
+            </a:extLst>
+          </p:cNvPr>
+          <p:cNvSpPr>
+            <a:spLocks noGrp="1"/>
+          </p:cNvSpPr>
+          <p:nvPr>
+            <p:ph type="sldNum" sz="quarter" idx="12"/>
+          </p:nvPr>
+        </p:nvSpPr>
+        <p:spPr/>
+        <p:txBody>
+          <a:bodyPr/>
+          <a:lstStyle/>
+          <a:p>
+            <a:fld id="{9B251280-DAE6-4033-B7F4-5E0D817A0287}" type="slidenum">
+              <a:rPr lang="de-DE" smtClean="0"/>
+              <a:t>3</a:t>
+            </a:fld>
             <a:endParaRPr lang="de-DE"/>
           </a:p>
         </p:txBody>
@@ -5131,7 +5759,7 @@
     </p:spTree>
     <p:extLst>
       <p:ext uri="{BB962C8B-B14F-4D97-AF65-F5344CB8AC3E}">
-        <p14:creationId xmlns:p14="http://schemas.microsoft.com/office/powerpoint/2010/main" val="165896482"/>
+        <p14:creationId xmlns:p14="http://schemas.microsoft.com/office/powerpoint/2010/main" val="1540717743"/>
       </p:ext>
     </p:extLst>
   </p:cSld>
@@ -5160,6 +5788,118 @@
       </p:grpSpPr>
       <p:sp>
         <p:nvSpPr>
+          <p:cNvPr id="4" name="Titel 3">
+            <a:extLst>
+              <a:ext uri="{FF2B5EF4-FFF2-40B4-BE49-F238E27FC236}">
+                <a16:creationId xmlns:a16="http://schemas.microsoft.com/office/drawing/2014/main" id="{D344207B-F6E8-FE0D-1E2A-589531ADD153}"/>
+              </a:ext>
+            </a:extLst>
+          </p:cNvPr>
+          <p:cNvSpPr>
+            <a:spLocks noGrp="1"/>
+          </p:cNvSpPr>
+          <p:nvPr>
+            <p:ph type="title"/>
+          </p:nvPr>
+        </p:nvSpPr>
+        <p:spPr/>
+        <p:txBody>
+          <a:bodyPr/>
+          <a:lstStyle/>
+          <a:p>
+            <a:r>
+              <a:rPr lang="de-DE" dirty="0"/>
+              <a:t>Business-Datenbank</a:t>
+            </a:r>
+          </a:p>
+        </p:txBody>
+      </p:sp>
+      <p:sp>
+        <p:nvSpPr>
+          <p:cNvPr id="6" name="Textplatzhalter 5">
+            <a:extLst>
+              <a:ext uri="{FF2B5EF4-FFF2-40B4-BE49-F238E27FC236}">
+                <a16:creationId xmlns:a16="http://schemas.microsoft.com/office/drawing/2014/main" id="{956B4F7D-75CB-2BC3-1D22-870DEF942471}"/>
+              </a:ext>
+            </a:extLst>
+          </p:cNvPr>
+          <p:cNvSpPr>
+            <a:spLocks noGrp="1"/>
+          </p:cNvSpPr>
+          <p:nvPr>
+            <p:ph type="body" idx="1"/>
+          </p:nvPr>
+        </p:nvSpPr>
+        <p:spPr/>
+        <p:txBody>
+          <a:bodyPr/>
+          <a:lstStyle/>
+          <a:p>
+            <a:endParaRPr lang="de-DE"/>
+          </a:p>
+        </p:txBody>
+      </p:sp>
+      <p:sp>
+        <p:nvSpPr>
+          <p:cNvPr id="2" name="Foliennummernplatzhalter 1">
+            <a:extLst>
+              <a:ext uri="{FF2B5EF4-FFF2-40B4-BE49-F238E27FC236}">
+                <a16:creationId xmlns:a16="http://schemas.microsoft.com/office/drawing/2014/main" id="{CD8CD834-2B37-4BB4-2D3B-C198A9C8074B}"/>
+              </a:ext>
+            </a:extLst>
+          </p:cNvPr>
+          <p:cNvSpPr>
+            <a:spLocks noGrp="1"/>
+          </p:cNvSpPr>
+          <p:nvPr>
+            <p:ph type="sldNum" sz="quarter" idx="12"/>
+          </p:nvPr>
+        </p:nvSpPr>
+        <p:spPr/>
+        <p:txBody>
+          <a:bodyPr/>
+          <a:lstStyle/>
+          <a:p>
+            <a:fld id="{9B251280-DAE6-4033-B7F4-5E0D817A0287}" type="slidenum">
+              <a:rPr lang="de-DE" smtClean="0"/>
+              <a:t>4</a:t>
+            </a:fld>
+            <a:endParaRPr lang="de-DE"/>
+          </a:p>
+        </p:txBody>
+      </p:sp>
+    </p:spTree>
+    <p:extLst>
+      <p:ext uri="{BB962C8B-B14F-4D97-AF65-F5344CB8AC3E}">
+        <p14:creationId xmlns:p14="http://schemas.microsoft.com/office/powerpoint/2010/main" val="165896482"/>
+      </p:ext>
+    </p:extLst>
+  </p:cSld>
+  <p:clrMapOvr>
+    <a:masterClrMapping/>
+  </p:clrMapOvr>
+</p:sld>
+</file>
+
+<file path=ppt/slides/slide5.xml><?xml version="1.0" encoding="utf-8"?>
+<p:sld xmlns:a="http://schemas.openxmlformats.org/drawingml/2006/main" xmlns:r="http://schemas.openxmlformats.org/officeDocument/2006/relationships" xmlns:p="http://schemas.openxmlformats.org/presentationml/2006/main">
+  <p:cSld>
+    <p:spTree>
+      <p:nvGrpSpPr>
+        <p:cNvPr id="1" name=""/>
+        <p:cNvGrpSpPr/>
+        <p:nvPr/>
+      </p:nvGrpSpPr>
+      <p:grpSpPr>
+        <a:xfrm>
+          <a:off x="0" y="0"/>
+          <a:ext cx="0" cy="0"/>
+          <a:chOff x="0" y="0"/>
+          <a:chExt cx="0" cy="0"/>
+        </a:xfrm>
+      </p:grpSpPr>
+      <p:sp>
+        <p:nvSpPr>
           <p:cNvPr id="2" name="Titel 1">
             <a:extLst>
               <a:ext uri="{FF2B5EF4-FFF2-40B4-BE49-F238E27FC236}">
@@ -5223,6 +5963,35 @@
           </a:prstGeom>
         </p:spPr>
       </p:pic>
+      <p:sp>
+        <p:nvSpPr>
+          <p:cNvPr id="3" name="Foliennummernplatzhalter 2">
+            <a:extLst>
+              <a:ext uri="{FF2B5EF4-FFF2-40B4-BE49-F238E27FC236}">
+                <a16:creationId xmlns:a16="http://schemas.microsoft.com/office/drawing/2014/main" id="{95C491D6-7182-1444-551E-536C039CBE13}"/>
+              </a:ext>
+            </a:extLst>
+          </p:cNvPr>
+          <p:cNvSpPr>
+            <a:spLocks noGrp="1"/>
+          </p:cNvSpPr>
+          <p:nvPr>
+            <p:ph type="sldNum" sz="quarter" idx="12"/>
+          </p:nvPr>
+        </p:nvSpPr>
+        <p:spPr/>
+        <p:txBody>
+          <a:bodyPr/>
+          <a:lstStyle/>
+          <a:p>
+            <a:fld id="{9B251280-DAE6-4033-B7F4-5E0D817A0287}" type="slidenum">
+              <a:rPr lang="de-DE" smtClean="0"/>
+              <a:t>5</a:t>
+            </a:fld>
+            <a:endParaRPr lang="de-DE"/>
+          </a:p>
+        </p:txBody>
+      </p:sp>
     </p:spTree>
     <p:extLst>
       <p:ext uri="{BB962C8B-B14F-4D97-AF65-F5344CB8AC3E}">
@@ -5236,7 +6005,7 @@
 </p:sld>
 </file>
 
-<file path=ppt/slides/slide5.xml><?xml version="1.0" encoding="utf-8"?>
+<file path=ppt/slides/slide6.xml><?xml version="1.0" encoding="utf-8"?>
 <p:sld xmlns:a="http://schemas.openxmlformats.org/drawingml/2006/main" xmlns:r="http://schemas.openxmlformats.org/officeDocument/2006/relationships" xmlns:p="http://schemas.openxmlformats.org/presentationml/2006/main">
   <p:cSld>
     <p:spTree>
@@ -5359,93 +6128,39 @@
           </a:p>
         </p:txBody>
       </p:sp>
+      <p:sp>
+        <p:nvSpPr>
+          <p:cNvPr id="4" name="Foliennummernplatzhalter 3">
+            <a:extLst>
+              <a:ext uri="{FF2B5EF4-FFF2-40B4-BE49-F238E27FC236}">
+                <a16:creationId xmlns:a16="http://schemas.microsoft.com/office/drawing/2014/main" id="{4DAC92D2-84A4-AC51-AC12-D8C99FC84C6B}"/>
+              </a:ext>
+            </a:extLst>
+          </p:cNvPr>
+          <p:cNvSpPr>
+            <a:spLocks noGrp="1"/>
+          </p:cNvSpPr>
+          <p:nvPr>
+            <p:ph type="sldNum" sz="quarter" idx="12"/>
+          </p:nvPr>
+        </p:nvSpPr>
+        <p:spPr/>
+        <p:txBody>
+          <a:bodyPr/>
+          <a:lstStyle/>
+          <a:p>
+            <a:fld id="{9B251280-DAE6-4033-B7F4-5E0D817A0287}" type="slidenum">
+              <a:rPr lang="de-DE" smtClean="0"/>
+              <a:t>6</a:t>
+            </a:fld>
+            <a:endParaRPr lang="de-DE"/>
+          </a:p>
+        </p:txBody>
+      </p:sp>
     </p:spTree>
     <p:extLst>
       <p:ext uri="{BB962C8B-B14F-4D97-AF65-F5344CB8AC3E}">
         <p14:creationId xmlns:p14="http://schemas.microsoft.com/office/powerpoint/2010/main" val="4280927225"/>
-      </p:ext>
-    </p:extLst>
-  </p:cSld>
-  <p:clrMapOvr>
-    <a:masterClrMapping/>
-  </p:clrMapOvr>
-</p:sld>
-</file>
-
-<file path=ppt/slides/slide6.xml><?xml version="1.0" encoding="utf-8"?>
-<p:sld xmlns:a="http://schemas.openxmlformats.org/drawingml/2006/main" xmlns:r="http://schemas.openxmlformats.org/officeDocument/2006/relationships" xmlns:p="http://schemas.openxmlformats.org/presentationml/2006/main">
-  <p:cSld>
-    <p:spTree>
-      <p:nvGrpSpPr>
-        <p:cNvPr id="1" name=""/>
-        <p:cNvGrpSpPr/>
-        <p:nvPr/>
-      </p:nvGrpSpPr>
-      <p:grpSpPr>
-        <a:xfrm>
-          <a:off x="0" y="0"/>
-          <a:ext cx="0" cy="0"/>
-          <a:chOff x="0" y="0"/>
-          <a:chExt cx="0" cy="0"/>
-        </a:xfrm>
-      </p:grpSpPr>
-      <p:sp>
-        <p:nvSpPr>
-          <p:cNvPr id="4" name="Titel 3">
-            <a:extLst>
-              <a:ext uri="{FF2B5EF4-FFF2-40B4-BE49-F238E27FC236}">
-                <a16:creationId xmlns:a16="http://schemas.microsoft.com/office/drawing/2014/main" id="{D8BBB4D9-AB0A-37B6-B9D7-67AEE8951BA2}"/>
-              </a:ext>
-            </a:extLst>
-          </p:cNvPr>
-          <p:cNvSpPr>
-            <a:spLocks noGrp="1"/>
-          </p:cNvSpPr>
-          <p:nvPr>
-            <p:ph type="title"/>
-          </p:nvPr>
-        </p:nvSpPr>
-        <p:spPr/>
-        <p:txBody>
-          <a:bodyPr/>
-          <a:lstStyle/>
-          <a:p>
-            <a:r>
-              <a:rPr lang="de-DE" dirty="0"/>
-              <a:t>Data Warehouse</a:t>
-            </a:r>
-          </a:p>
-        </p:txBody>
-      </p:sp>
-      <p:sp>
-        <p:nvSpPr>
-          <p:cNvPr id="5" name="Textplatzhalter 4">
-            <a:extLst>
-              <a:ext uri="{FF2B5EF4-FFF2-40B4-BE49-F238E27FC236}">
-                <a16:creationId xmlns:a16="http://schemas.microsoft.com/office/drawing/2014/main" id="{DDD8E57D-6B19-DF39-2489-BEAA298E6F36}"/>
-              </a:ext>
-            </a:extLst>
-          </p:cNvPr>
-          <p:cNvSpPr>
-            <a:spLocks noGrp="1"/>
-          </p:cNvSpPr>
-          <p:nvPr>
-            <p:ph type="body" idx="1"/>
-          </p:nvPr>
-        </p:nvSpPr>
-        <p:spPr/>
-        <p:txBody>
-          <a:bodyPr/>
-          <a:lstStyle/>
-          <a:p>
-            <a:endParaRPr lang="de-DE"/>
-          </a:p>
-        </p:txBody>
-      </p:sp>
-    </p:spTree>
-    <p:extLst>
-      <p:ext uri="{BB962C8B-B14F-4D97-AF65-F5344CB8AC3E}">
-        <p14:creationId xmlns:p14="http://schemas.microsoft.com/office/powerpoint/2010/main" val="2824883227"/>
       </p:ext>
     </p:extLst>
   </p:cSld>
@@ -5477,7 +6192,7 @@
           <p:cNvPr id="4" name="Titel 3">
             <a:extLst>
               <a:ext uri="{FF2B5EF4-FFF2-40B4-BE49-F238E27FC236}">
-                <a16:creationId xmlns:a16="http://schemas.microsoft.com/office/drawing/2014/main" id="{7FBC5EB2-8E38-A6FF-3747-7C0FBA075449}"/>
+                <a16:creationId xmlns:a16="http://schemas.microsoft.com/office/drawing/2014/main" id="{D8BBB4D9-AB0A-37B6-B9D7-67AEE8951BA2}"/>
               </a:ext>
             </a:extLst>
           </p:cNvPr>
@@ -5495,114 +6210,69 @@
           <a:p>
             <a:r>
               <a:rPr lang="de-DE" dirty="0"/>
-              <a:t>DWH-Fragen</a:t>
-            </a:r>
-          </a:p>
-        </p:txBody>
-      </p:sp>
-      <p:sp>
-        <p:nvSpPr>
-          <p:cNvPr id="5" name="Inhaltsplatzhalter 4">
-            <a:extLst>
-              <a:ext uri="{FF2B5EF4-FFF2-40B4-BE49-F238E27FC236}">
-                <a16:creationId xmlns:a16="http://schemas.microsoft.com/office/drawing/2014/main" id="{CE1C7ED1-A131-55DE-7840-35E53E3E2D37}"/>
-              </a:ext>
-            </a:extLst>
-          </p:cNvPr>
-          <p:cNvSpPr>
-            <a:spLocks noGrp="1"/>
-          </p:cNvSpPr>
-          <p:nvPr>
-            <p:ph idx="1"/>
-          </p:nvPr>
-        </p:nvSpPr>
-        <p:spPr/>
-        <p:txBody>
-          <a:bodyPr>
-            <a:normAutofit fontScale="92500" lnSpcReduction="10000"/>
-          </a:bodyPr>
-          <a:lstStyle/>
-          <a:p>
-            <a:pPr marL="514350" lvl="0" indent="-514350">
-              <a:buFont typeface="+mj-lt"/>
-              <a:buAutoNum type="arabicPeriod"/>
-            </a:pPr>
-            <a:r>
-              <a:rPr lang="de-DE" dirty="0"/>
-              <a:t>Welche Filialen haben den größten/kleinsten Umsatz? </a:t>
-            </a:r>
-            <a:r>
-              <a:rPr lang="de-DE" i="1" dirty="0"/>
-              <a:t>(Verkäufe/Stunde, Kategorisierung der Filialen)</a:t>
-            </a:r>
-            <a:endParaRPr lang="de-DE" dirty="0"/>
-          </a:p>
-          <a:p>
-            <a:pPr marL="514350" lvl="0" indent="-514350">
-              <a:buFont typeface="+mj-lt"/>
-              <a:buAutoNum type="arabicPeriod"/>
-            </a:pPr>
-            <a:r>
-              <a:rPr lang="de-DE" dirty="0"/>
-              <a:t>Welche Produkte haben die größte/kleinste Marge? </a:t>
-            </a:r>
-            <a:r>
-              <a:rPr lang="de-DE" i="1" dirty="0"/>
-              <a:t>(Produktpreis, Kosten der Zutaten, Energieverbrauch, Herstellungsdauer)</a:t>
-            </a:r>
-            <a:endParaRPr lang="de-DE" dirty="0"/>
-          </a:p>
-          <a:p>
-            <a:pPr marL="514350" lvl="0" indent="-514350">
-              <a:buFont typeface="+mj-lt"/>
-              <a:buAutoNum type="arabicPeriod"/>
-            </a:pPr>
-            <a:r>
-              <a:rPr lang="de-DE" dirty="0"/>
-              <a:t>Welche Produkte haben in der Herstellung den größten/kleinsten Energieverbrauch? </a:t>
-            </a:r>
-            <a:r>
-              <a:rPr lang="de-DE" i="1" dirty="0"/>
-              <a:t>(Backdauer, Kühlung der Zutaten)</a:t>
-            </a:r>
-            <a:endParaRPr lang="de-DE" dirty="0"/>
-          </a:p>
-          <a:p>
-            <a:pPr marL="514350" lvl="0" indent="-514350">
-              <a:buFont typeface="+mj-lt"/>
-              <a:buAutoNum type="arabicPeriod"/>
-            </a:pPr>
-            <a:r>
-              <a:rPr lang="de-DE" dirty="0"/>
-              <a:t>Zu welchen Tageszeiten wird welche Produktkategorie an welchem Standort am meisten gekauft? (Verkäufe)</a:t>
-            </a:r>
-          </a:p>
-          <a:p>
-            <a:pPr marL="514350" lvl="0" indent="-514350">
-              <a:buFont typeface="+mj-lt"/>
-              <a:buAutoNum type="arabicPeriod"/>
-            </a:pPr>
-            <a:r>
-              <a:rPr lang="de-DE" dirty="0"/>
-              <a:t>Welche Produkte werden am meisten/am wenigsten verkauft?</a:t>
-            </a:r>
-          </a:p>
-          <a:p>
-            <a:pPr marL="514350" indent="-514350">
-              <a:buFont typeface="+mj-lt"/>
-              <a:buAutoNum type="arabicPeriod"/>
-            </a:pPr>
-            <a:r>
-              <a:rPr lang="de-DE" dirty="0"/>
-              <a:t>Welcher Verkäufer hat den größten durchschnittlichen Umsatz pro Verkauf?</a:t>
-            </a:r>
+              <a:t>Data Warehouse</a:t>
+            </a:r>
+          </a:p>
+        </p:txBody>
+      </p:sp>
+      <p:sp>
+        <p:nvSpPr>
+          <p:cNvPr id="5" name="Textplatzhalter 4">
+            <a:extLst>
+              <a:ext uri="{FF2B5EF4-FFF2-40B4-BE49-F238E27FC236}">
+                <a16:creationId xmlns:a16="http://schemas.microsoft.com/office/drawing/2014/main" id="{DDD8E57D-6B19-DF39-2489-BEAA298E6F36}"/>
+              </a:ext>
+            </a:extLst>
+          </p:cNvPr>
+          <p:cNvSpPr>
+            <a:spLocks noGrp="1"/>
+          </p:cNvSpPr>
+          <p:nvPr>
+            <p:ph type="body" idx="1"/>
+          </p:nvPr>
+        </p:nvSpPr>
+        <p:spPr/>
+        <p:txBody>
+          <a:bodyPr/>
+          <a:lstStyle/>
+          <a:p>
+            <a:endParaRPr lang="de-DE"/>
+          </a:p>
+        </p:txBody>
+      </p:sp>
+      <p:sp>
+        <p:nvSpPr>
+          <p:cNvPr id="2" name="Foliennummernplatzhalter 1">
+            <a:extLst>
+              <a:ext uri="{FF2B5EF4-FFF2-40B4-BE49-F238E27FC236}">
+                <a16:creationId xmlns:a16="http://schemas.microsoft.com/office/drawing/2014/main" id="{94F77171-AD0D-3A5E-9C9B-946B96B0AAF8}"/>
+              </a:ext>
+            </a:extLst>
+          </p:cNvPr>
+          <p:cNvSpPr>
+            <a:spLocks noGrp="1"/>
+          </p:cNvSpPr>
+          <p:nvPr>
+            <p:ph type="sldNum" sz="quarter" idx="12"/>
+          </p:nvPr>
+        </p:nvSpPr>
+        <p:spPr/>
+        <p:txBody>
+          <a:bodyPr/>
+          <a:lstStyle/>
+          <a:p>
+            <a:fld id="{9B251280-DAE6-4033-B7F4-5E0D817A0287}" type="slidenum">
+              <a:rPr lang="de-DE" smtClean="0"/>
+              <a:t>7</a:t>
+            </a:fld>
+            <a:endParaRPr lang="de-DE"/>
           </a:p>
         </p:txBody>
       </p:sp>
     </p:spTree>
     <p:extLst>
       <p:ext uri="{BB962C8B-B14F-4D97-AF65-F5344CB8AC3E}">
-        <p14:creationId xmlns:p14="http://schemas.microsoft.com/office/powerpoint/2010/main" val="237497836"/>
+        <p14:creationId xmlns:p14="http://schemas.microsoft.com/office/powerpoint/2010/main" val="2824883227"/>
       </p:ext>
     </p:extLst>
   </p:cSld>
@@ -5631,10 +6301,10 @@
       </p:grpSpPr>
       <p:sp>
         <p:nvSpPr>
-          <p:cNvPr id="2" name="Titel 1">
-            <a:extLst>
-              <a:ext uri="{FF2B5EF4-FFF2-40B4-BE49-F238E27FC236}">
-                <a16:creationId xmlns:a16="http://schemas.microsoft.com/office/drawing/2014/main" id="{325C50AD-AB12-3666-A634-324EE9A12F09}"/>
+          <p:cNvPr id="4" name="Titel 3">
+            <a:extLst>
+              <a:ext uri="{FF2B5EF4-FFF2-40B4-BE49-F238E27FC236}">
+                <a16:creationId xmlns:a16="http://schemas.microsoft.com/office/drawing/2014/main" id="{7FBC5EB2-8E38-A6FF-3747-7C0FBA075449}"/>
               </a:ext>
             </a:extLst>
           </p:cNvPr>
@@ -5651,55 +6321,144 @@
           <a:lstStyle/>
           <a:p>
             <a:r>
-              <a:rPr lang="de-DE" dirty="0" err="1"/>
-              <a:t>mER</a:t>
+              <a:rPr lang="de-DE" dirty="0"/>
+              <a:t>DWH-Fragen</a:t>
+            </a:r>
+          </a:p>
+        </p:txBody>
+      </p:sp>
+      <p:sp>
+        <p:nvSpPr>
+          <p:cNvPr id="5" name="Inhaltsplatzhalter 4">
+            <a:extLst>
+              <a:ext uri="{FF2B5EF4-FFF2-40B4-BE49-F238E27FC236}">
+                <a16:creationId xmlns:a16="http://schemas.microsoft.com/office/drawing/2014/main" id="{CE1C7ED1-A131-55DE-7840-35E53E3E2D37}"/>
+              </a:ext>
+            </a:extLst>
+          </p:cNvPr>
+          <p:cNvSpPr>
+            <a:spLocks noGrp="1"/>
+          </p:cNvSpPr>
+          <p:nvPr>
+            <p:ph idx="1"/>
+          </p:nvPr>
+        </p:nvSpPr>
+        <p:spPr/>
+        <p:txBody>
+          <a:bodyPr>
+            <a:normAutofit fontScale="92500" lnSpcReduction="10000"/>
+          </a:bodyPr>
+          <a:lstStyle/>
+          <a:p>
+            <a:pPr marL="514350" lvl="0" indent="-514350">
+              <a:buFont typeface="+mj-lt"/>
+              <a:buAutoNum type="arabicPeriod"/>
+            </a:pPr>
+            <a:r>
+              <a:rPr lang="de-DE" dirty="0"/>
+              <a:t>Welche Filialen haben den größten/kleinsten Umsatz? </a:t>
+            </a:r>
+            <a:r>
+              <a:rPr lang="de-DE" i="1" dirty="0"/>
+              <a:t>(Verkäufe/Stunde, Kategorisierung der Filialen)</a:t>
             </a:r>
             <a:endParaRPr lang="de-DE" dirty="0"/>
           </a:p>
-        </p:txBody>
-      </p:sp>
-      <p:pic>
-        <p:nvPicPr>
-          <p:cNvPr id="5" name="Inhaltsplatzhalter 4">
-            <a:extLst>
-              <a:ext uri="{FF2B5EF4-FFF2-40B4-BE49-F238E27FC236}">
-                <a16:creationId xmlns:a16="http://schemas.microsoft.com/office/drawing/2014/main" id="{C599200D-D61C-1F8B-D3A1-5E8901654166}"/>
-              </a:ext>
-            </a:extLst>
-          </p:cNvPr>
-          <p:cNvPicPr>
-            <a:picLocks noGrp="1" noChangeAspect="1"/>
-          </p:cNvPicPr>
-          <p:nvPr>
-            <p:ph idx="1"/>
-          </p:nvPr>
-        </p:nvPicPr>
-        <p:blipFill>
-          <a:blip r:embed="rId3">
-            <a:extLst>
-              <a:ext uri="{28A0092B-C50C-407E-A947-70E740481C1C}">
-                <a14:useLocalDpi xmlns:a14="http://schemas.microsoft.com/office/drawing/2010/main" val="0"/>
-              </a:ext>
-            </a:extLst>
-          </a:blip>
-          <a:stretch>
-            <a:fillRect/>
-          </a:stretch>
-        </p:blipFill>
-        <p:spPr>
-          <a:xfrm>
-            <a:off x="2617794" y="365125"/>
-            <a:ext cx="8736006" cy="5942782"/>
-          </a:xfrm>
-          <a:prstGeom prst="rect">
-            <a:avLst/>
-          </a:prstGeom>
-        </p:spPr>
-      </p:pic>
+          <a:p>
+            <a:pPr marL="514350" lvl="0" indent="-514350">
+              <a:buFont typeface="+mj-lt"/>
+              <a:buAutoNum type="arabicPeriod"/>
+            </a:pPr>
+            <a:r>
+              <a:rPr lang="de-DE" dirty="0"/>
+              <a:t>Welche Produkte haben die größte/kleinste Marge? </a:t>
+            </a:r>
+            <a:r>
+              <a:rPr lang="de-DE" i="1" dirty="0"/>
+              <a:t>(Produktpreis, Kosten der Zutaten, Energieverbrauch, Herstellungsdauer)</a:t>
+            </a:r>
+            <a:endParaRPr lang="de-DE" dirty="0"/>
+          </a:p>
+          <a:p>
+            <a:pPr marL="514350" lvl="0" indent="-514350">
+              <a:buFont typeface="+mj-lt"/>
+              <a:buAutoNum type="arabicPeriod"/>
+            </a:pPr>
+            <a:r>
+              <a:rPr lang="de-DE" dirty="0"/>
+              <a:t>Welche Produkte haben in der Herstellung den größten/kleinsten Energieverbrauch? </a:t>
+            </a:r>
+            <a:r>
+              <a:rPr lang="de-DE" i="1" dirty="0"/>
+              <a:t>(Backdauer, Kühlung der Zutaten)</a:t>
+            </a:r>
+            <a:endParaRPr lang="de-DE" dirty="0"/>
+          </a:p>
+          <a:p>
+            <a:pPr marL="514350" lvl="0" indent="-514350">
+              <a:buFont typeface="+mj-lt"/>
+              <a:buAutoNum type="arabicPeriod"/>
+            </a:pPr>
+            <a:r>
+              <a:rPr lang="de-DE" dirty="0"/>
+              <a:t>Zu welchen Tageszeiten wird welche Produktkategorie an welchem Standort am meisten gekauft? (Verkäufe)</a:t>
+            </a:r>
+          </a:p>
+          <a:p>
+            <a:pPr marL="514350" lvl="0" indent="-514350">
+              <a:buFont typeface="+mj-lt"/>
+              <a:buAutoNum type="arabicPeriod"/>
+            </a:pPr>
+            <a:r>
+              <a:rPr lang="de-DE" dirty="0"/>
+              <a:t>Welche Produkte werden am meisten/am wenigsten verkauft?</a:t>
+            </a:r>
+          </a:p>
+          <a:p>
+            <a:pPr marL="514350" indent="-514350">
+              <a:buFont typeface="+mj-lt"/>
+              <a:buAutoNum type="arabicPeriod"/>
+            </a:pPr>
+            <a:r>
+              <a:rPr lang="de-DE" dirty="0"/>
+              <a:t>Welcher Verkäufer hat den größten durchschnittlichen Umsatz pro Verkauf?</a:t>
+            </a:r>
+          </a:p>
+        </p:txBody>
+      </p:sp>
+      <p:sp>
+        <p:nvSpPr>
+          <p:cNvPr id="2" name="Foliennummernplatzhalter 1">
+            <a:extLst>
+              <a:ext uri="{FF2B5EF4-FFF2-40B4-BE49-F238E27FC236}">
+                <a16:creationId xmlns:a16="http://schemas.microsoft.com/office/drawing/2014/main" id="{CA9BA9A5-FB34-C0F4-3853-26E196ED2ADF}"/>
+              </a:ext>
+            </a:extLst>
+          </p:cNvPr>
+          <p:cNvSpPr>
+            <a:spLocks noGrp="1"/>
+          </p:cNvSpPr>
+          <p:nvPr>
+            <p:ph type="sldNum" sz="quarter" idx="12"/>
+          </p:nvPr>
+        </p:nvSpPr>
+        <p:spPr/>
+        <p:txBody>
+          <a:bodyPr/>
+          <a:lstStyle/>
+          <a:p>
+            <a:fld id="{9B251280-DAE6-4033-B7F4-5E0D817A0287}" type="slidenum">
+              <a:rPr lang="de-DE" smtClean="0"/>
+              <a:t>8</a:t>
+            </a:fld>
+            <a:endParaRPr lang="de-DE"/>
+          </a:p>
+        </p:txBody>
+      </p:sp>
     </p:spTree>
     <p:extLst>
       <p:ext uri="{BB962C8B-B14F-4D97-AF65-F5344CB8AC3E}">
-        <p14:creationId xmlns:p14="http://schemas.microsoft.com/office/powerpoint/2010/main" val="427920151"/>
+        <p14:creationId xmlns:p14="http://schemas.microsoft.com/office/powerpoint/2010/main" val="237497836"/>
       </p:ext>
     </p:extLst>
   </p:cSld>
@@ -5731,7 +6490,7 @@
           <p:cNvPr id="2" name="Titel 1">
             <a:extLst>
               <a:ext uri="{FF2B5EF4-FFF2-40B4-BE49-F238E27FC236}">
-                <a16:creationId xmlns:a16="http://schemas.microsoft.com/office/drawing/2014/main" id="{3904CDF3-4527-70B2-FABB-909DC6BA3CF1}"/>
+                <a16:creationId xmlns:a16="http://schemas.microsoft.com/office/drawing/2014/main" id="{325C50AD-AB12-3666-A634-324EE9A12F09}"/>
               </a:ext>
             </a:extLst>
           </p:cNvPr>
@@ -5748,16 +6507,10 @@
           <a:lstStyle/>
           <a:p>
             <a:r>
-              <a:rPr lang="de-DE" dirty="0"/>
-              <a:t>Logisches Modell</a:t>
-            </a:r>
-            <a:br>
-              <a:rPr lang="de-DE" dirty="0"/>
-            </a:br>
-            <a:r>
-              <a:rPr lang="de-DE" dirty="0"/>
-              <a:t>Galaxy Schema</a:t>
-            </a:r>
+              <a:rPr lang="de-DE" dirty="0" err="1"/>
+              <a:t>mER</a:t>
+            </a:r>
+            <a:endParaRPr lang="de-DE" dirty="0"/>
           </a:p>
         </p:txBody>
       </p:sp>
@@ -5766,7 +6519,7 @@
           <p:cNvPr id="5" name="Inhaltsplatzhalter 4">
             <a:extLst>
               <a:ext uri="{FF2B5EF4-FFF2-40B4-BE49-F238E27FC236}">
-                <a16:creationId xmlns:a16="http://schemas.microsoft.com/office/drawing/2014/main" id="{525D996C-32F6-0F32-53F9-94DC195EDD2E}"/>
+                <a16:creationId xmlns:a16="http://schemas.microsoft.com/office/drawing/2014/main" id="{C599200D-D61C-1F8B-D3A1-5E8901654166}"/>
               </a:ext>
             </a:extLst>
           </p:cNvPr>
@@ -5785,23 +6538,53 @@
               </a:ext>
             </a:extLst>
           </a:blip>
-          <a:srcRect/>
-          <a:stretch/>
+          <a:stretch>
+            <a:fillRect/>
+          </a:stretch>
         </p:blipFill>
         <p:spPr>
           <a:xfrm>
-            <a:off x="5155932" y="0"/>
-            <a:ext cx="5941996" cy="6727898"/>
+            <a:off x="2617794" y="365125"/>
+            <a:ext cx="8736006" cy="5942782"/>
           </a:xfrm>
           <a:prstGeom prst="rect">
             <a:avLst/>
           </a:prstGeom>
         </p:spPr>
       </p:pic>
+      <p:sp>
+        <p:nvSpPr>
+          <p:cNvPr id="3" name="Foliennummernplatzhalter 2">
+            <a:extLst>
+              <a:ext uri="{FF2B5EF4-FFF2-40B4-BE49-F238E27FC236}">
+                <a16:creationId xmlns:a16="http://schemas.microsoft.com/office/drawing/2014/main" id="{78B97866-E830-0B5A-6B4B-91CF1B695285}"/>
+              </a:ext>
+            </a:extLst>
+          </p:cNvPr>
+          <p:cNvSpPr>
+            <a:spLocks noGrp="1"/>
+          </p:cNvSpPr>
+          <p:nvPr>
+            <p:ph type="sldNum" sz="quarter" idx="12"/>
+          </p:nvPr>
+        </p:nvSpPr>
+        <p:spPr/>
+        <p:txBody>
+          <a:bodyPr/>
+          <a:lstStyle/>
+          <a:p>
+            <a:fld id="{9B251280-DAE6-4033-B7F4-5E0D817A0287}" type="slidenum">
+              <a:rPr lang="de-DE" smtClean="0"/>
+              <a:t>9</a:t>
+            </a:fld>
+            <a:endParaRPr lang="de-DE"/>
+          </a:p>
+        </p:txBody>
+      </p:sp>
     </p:spTree>
     <p:extLst>
       <p:ext uri="{BB962C8B-B14F-4D97-AF65-F5344CB8AC3E}">
-        <p14:creationId xmlns:p14="http://schemas.microsoft.com/office/powerpoint/2010/main" val="763179585"/>
+        <p14:creationId xmlns:p14="http://schemas.microsoft.com/office/powerpoint/2010/main" val="427920151"/>
       </p:ext>
     </p:extLst>
   </p:cSld>
